--- a/Plaquette_Enedril_6p.pptx
+++ b/Plaquette_Enedril_6p.pptx
@@ -4784,7 +4784,7 @@
         <p:spPr>
           <a:xfrm>
             <a:off x="2184400" y="6527800"/>
-            <a:ext cx="2540000" cy="127000"/>
+            <a:ext cx="4699000" cy="127000"/>
           </a:xfrm>
           <a:prstGeom prst="rect">
             <a:avLst/>
@@ -4864,33 +4864,9 @@
           </a:p>
         </p:txBody>
       </p:sp>
-      <p:pic>
-        <p:nvPicPr>
-          <p:cNvPr id="32" name="Picture 31" descr="_c_team_161_110.png"/>
-          <p:cNvPicPr>
-            <a:picLocks noChangeAspect="1"/>
-          </p:cNvPicPr>
-          <p:nvPr/>
-        </p:nvPicPr>
-        <p:blipFill>
-          <a:blip r:embed="rId5"/>
-          <a:stretch>
-            <a:fillRect/>
-          </a:stretch>
-        </p:blipFill>
-        <p:spPr>
-          <a:xfrm>
-            <a:off x="4927600" y="6502400"/>
-            <a:ext cx="2044700" cy="1397000"/>
-          </a:xfrm>
-          <a:prstGeom prst="rect">
-            <a:avLst/>
-          </a:prstGeom>
-        </p:spPr>
-      </p:pic>
-      <p:sp>
-        <p:nvSpPr>
-          <p:cNvPr id="33" name="TextBox 32"/>
+      <p:sp>
+        <p:nvSpPr>
+          <p:cNvPr id="32" name="TextBox 31"/>
           <p:cNvSpPr txBox="1"/>
           <p:nvPr/>
         </p:nvSpPr>
@@ -4932,7 +4908,7 @@
       </p:sp>
       <p:sp>
         <p:nvSpPr>
-          <p:cNvPr id="34" name="Rectangle 33"/>
+          <p:cNvPr id="33" name="Rectangle 32"/>
           <p:cNvSpPr/>
           <p:nvPr/>
         </p:nvSpPr>
@@ -4961,7 +4937,7 @@
       </p:sp>
       <p:sp>
         <p:nvSpPr>
-          <p:cNvPr id="35" name="TextBox 34"/>
+          <p:cNvPr id="34" name="TextBox 33"/>
           <p:cNvSpPr txBox="1"/>
           <p:nvPr/>
         </p:nvSpPr>
@@ -5028,7 +5004,7 @@
       </p:sp>
       <p:sp>
         <p:nvSpPr>
-          <p:cNvPr id="36" name="Rectangle 35"/>
+          <p:cNvPr id="35" name="Rectangle 34"/>
           <p:cNvSpPr/>
           <p:nvPr/>
         </p:nvSpPr>
@@ -5057,7 +5033,7 @@
       </p:sp>
       <p:sp>
         <p:nvSpPr>
-          <p:cNvPr id="37" name="TextBox 36"/>
+          <p:cNvPr id="36" name="TextBox 35"/>
           <p:cNvSpPr txBox="1"/>
           <p:nvPr/>
         </p:nvSpPr>
@@ -5124,7 +5100,7 @@
       </p:sp>
       <p:sp>
         <p:nvSpPr>
-          <p:cNvPr id="38" name="Rectangle 37"/>
+          <p:cNvPr id="37" name="Rectangle 36"/>
           <p:cNvSpPr/>
           <p:nvPr/>
         </p:nvSpPr>
@@ -5153,7 +5129,7 @@
       </p:sp>
       <p:sp>
         <p:nvSpPr>
-          <p:cNvPr id="39" name="TextBox 38"/>
+          <p:cNvPr id="38" name="TextBox 37"/>
           <p:cNvSpPr txBox="1"/>
           <p:nvPr/>
         </p:nvSpPr>
@@ -5220,7 +5196,7 @@
       </p:sp>
       <p:sp>
         <p:nvSpPr>
-          <p:cNvPr id="40" name="Rectangle 39"/>
+          <p:cNvPr id="39" name="Rectangle 38"/>
           <p:cNvSpPr/>
           <p:nvPr/>
         </p:nvSpPr>
@@ -5249,7 +5225,7 @@
       </p:sp>
       <p:sp>
         <p:nvSpPr>
-          <p:cNvPr id="41" name="TextBox 40"/>
+          <p:cNvPr id="40" name="TextBox 39"/>
           <p:cNvSpPr txBox="1"/>
           <p:nvPr/>
         </p:nvSpPr>
@@ -5316,7 +5292,7 @@
       </p:sp>
       <p:sp>
         <p:nvSpPr>
-          <p:cNvPr id="42" name="Rectangle 41"/>
+          <p:cNvPr id="41" name="Rectangle 40"/>
           <p:cNvSpPr/>
           <p:nvPr/>
         </p:nvSpPr>
@@ -5345,7 +5321,7 @@
       </p:sp>
       <p:sp>
         <p:nvSpPr>
-          <p:cNvPr id="43" name="TextBox 42"/>
+          <p:cNvPr id="42" name="TextBox 41"/>
           <p:cNvSpPr txBox="1"/>
           <p:nvPr/>
         </p:nvSpPr>
@@ -5412,7 +5388,7 @@
       </p:sp>
       <p:sp>
         <p:nvSpPr>
-          <p:cNvPr id="44" name="Rectangle 43"/>
+          <p:cNvPr id="43" name="Rectangle 42"/>
           <p:cNvSpPr/>
           <p:nvPr/>
         </p:nvSpPr>
@@ -5441,7 +5417,7 @@
       </p:sp>
       <p:sp>
         <p:nvSpPr>
-          <p:cNvPr id="45" name="TextBox 44"/>
+          <p:cNvPr id="44" name="TextBox 43"/>
           <p:cNvSpPr txBox="1"/>
           <p:nvPr/>
         </p:nvSpPr>
@@ -5483,7 +5459,7 @@
       </p:sp>
       <p:sp>
         <p:nvSpPr>
-          <p:cNvPr id="46" name="TextBox 45"/>
+          <p:cNvPr id="45" name="TextBox 44"/>
           <p:cNvSpPr txBox="1"/>
           <p:nvPr/>
         </p:nvSpPr>
@@ -14385,9 +14361,40 @@
           </a:p>
         </p:txBody>
       </p:sp>
+      <p:sp>
+        <p:nvSpPr>
+          <p:cNvPr id="21" name="Rectangle 20"/>
+          <p:cNvSpPr/>
+          <p:nvPr/>
+        </p:nvSpPr>
+        <p:spPr>
+          <a:xfrm>
+            <a:off x="457200" y="8432800"/>
+            <a:ext cx="6642100" cy="1320800"/>
+          </a:xfrm>
+          <a:prstGeom prst="rect">
+            <a:avLst/>
+          </a:prstGeom>
+          <a:solidFill>
+            <a:srgbClr val="FFFFFF"/>
+          </a:solidFill>
+          <a:ln w="9525">
+            <a:solidFill>
+              <a:srgbClr val="C5D6E8"/>
+            </a:solidFill>
+          </a:ln>
+        </p:spPr>
+        <p:txBody>
+          <a:bodyPr rtlCol="0" anchor="ctr"/>
+          <a:lstStyle/>
+          <a:p>
+            <a:pPr algn="ctr"/>
+          </a:p>
+        </p:txBody>
+      </p:sp>
       <p:pic>
         <p:nvPicPr>
-          <p:cNvPr id="21" name="Picture 20" descr="_c_w4_127_92.png"/>
+          <p:cNvPr id="22" name="Picture 21" descr="_c_pipecutter_140_44.png"/>
           <p:cNvPicPr>
             <a:picLocks noChangeAspect="1"/>
           </p:cNvPicPr>
@@ -14401,86 +14408,240 @@
         </p:blipFill>
         <p:spPr>
           <a:xfrm>
-            <a:off x="457200" y="8432800"/>
-            <a:ext cx="1612900" cy="1168400"/>
+            <a:off x="558800" y="8813800"/>
+            <a:ext cx="1778000" cy="558800"/>
           </a:xfrm>
           <a:prstGeom prst="rect">
             <a:avLst/>
           </a:prstGeom>
         </p:spPr>
       </p:pic>
-      <p:pic>
-        <p:nvPicPr>
-          <p:cNvPr id="22" name="Picture 21" descr="_c_w3_127_92.png"/>
-          <p:cNvPicPr>
-            <a:picLocks noChangeAspect="1"/>
-          </p:cNvPicPr>
-          <p:nvPr/>
-        </p:nvPicPr>
-        <p:blipFill>
-          <a:blip r:embed="rId6"/>
-          <a:stretch>
-            <a:fillRect/>
-          </a:stretch>
-        </p:blipFill>
-        <p:spPr>
-          <a:xfrm>
-            <a:off x="2133600" y="8432800"/>
-            <a:ext cx="1612900" cy="1168400"/>
-          </a:xfrm>
-          <a:prstGeom prst="rect">
-            <a:avLst/>
-          </a:prstGeom>
-        </p:spPr>
-      </p:pic>
-      <p:pic>
-        <p:nvPicPr>
-          <p:cNvPr id="23" name="Picture 22" descr="_c_w1_127_92.png"/>
-          <p:cNvPicPr>
-            <a:picLocks noChangeAspect="1"/>
-          </p:cNvPicPr>
-          <p:nvPr/>
-        </p:nvPicPr>
-        <p:blipFill>
-          <a:blip r:embed="rId7"/>
-          <a:stretch>
-            <a:fillRect/>
-          </a:stretch>
-        </p:blipFill>
-        <p:spPr>
-          <a:xfrm>
-            <a:off x="3810000" y="8432800"/>
-            <a:ext cx="1612900" cy="1168400"/>
-          </a:xfrm>
-          <a:prstGeom prst="rect">
-            <a:avLst/>
-          </a:prstGeom>
-        </p:spPr>
-      </p:pic>
-      <p:pic>
-        <p:nvPicPr>
-          <p:cNvPr id="24" name="Picture 23" descr="_c_w2_127_92.png"/>
-          <p:cNvPicPr>
-            <a:picLocks noChangeAspect="1"/>
-          </p:cNvPicPr>
-          <p:nvPr/>
-        </p:nvPicPr>
-        <p:blipFill>
-          <a:blip r:embed="rId8"/>
-          <a:stretch>
-            <a:fillRect/>
-          </a:stretch>
-        </p:blipFill>
-        <p:spPr>
-          <a:xfrm>
-            <a:off x="5486400" y="8432800"/>
-            <a:ext cx="1612900" cy="1168400"/>
-          </a:xfrm>
-          <a:prstGeom prst="rect">
-            <a:avLst/>
-          </a:prstGeom>
-        </p:spPr>
-      </p:pic>
+      <p:sp>
+        <p:nvSpPr>
+          <p:cNvPr id="23" name="TextBox 22"/>
+          <p:cNvSpPr txBox="1"/>
+          <p:nvPr/>
+        </p:nvSpPr>
+        <p:spPr>
+          <a:xfrm>
+            <a:off x="2489200" y="8534400"/>
+            <a:ext cx="4445000" cy="127000"/>
+          </a:xfrm>
+          <a:prstGeom prst="rect">
+            <a:avLst/>
+          </a:prstGeom>
+          <a:noFill/>
+        </p:spPr>
+        <p:txBody>
+          <a:bodyPr wrap="square" lIns="0" rIns="0" tIns="0" bIns="0" anchor="t">
+            <a:spAutoFit/>
+          </a:bodyPr>
+          <a:lstStyle/>
+          <a:p>
+            <a:pPr algn="l">
+              <a:lnSpc>
+                <a:spcPts val="950"/>
+              </a:lnSpc>
+              <a:spcAft>
+                <a:spcPts val="0"/>
+              </a:spcAft>
+            </a:pPr>
+            <a:r>
+              <a:rPr sz="860" b="1" i="0">
+                <a:solidFill>
+                  <a:srgbClr val="194E9A"/>
+                </a:solidFill>
+                <a:latin typeface="Ubuntu Mono"/>
+                <a:ea typeface="Ubuntu Mono"/>
+                <a:cs typeface="Ubuntu Mono"/>
+                <a:sym typeface="Ubuntu Mono"/>
+              </a:rPr>
+              <a:t>HYDRAULIC PIPE CUTTER</a:t>
+            </a:r>
+          </a:p>
+          <a:p>
+            <a:pPr algn="l">
+              <a:lnSpc>
+                <a:spcPts val="950"/>
+              </a:lnSpc>
+              <a:spcAft>
+                <a:spcPts val="0"/>
+              </a:spcAft>
+            </a:pPr>
+            <a:r>
+              <a:rPr sz="690" b="0" i="0">
+                <a:solidFill>
+                  <a:srgbClr val="5A6B7F"/>
+                </a:solidFill>
+                <a:latin typeface="Ubuntu Mono"/>
+                <a:ea typeface="Ubuntu Mono"/>
+                <a:cs typeface="Ubuntu Mono"/>
+                <a:sym typeface="Ubuntu Mono"/>
+              </a:rPr>
+              <a:t>Data sheet available</a:t>
+            </a:r>
+          </a:p>
+        </p:txBody>
+      </p:sp>
+      <p:sp>
+        <p:nvSpPr>
+          <p:cNvPr id="24" name="TextBox 23"/>
+          <p:cNvSpPr txBox="1"/>
+          <p:nvPr/>
+        </p:nvSpPr>
+        <p:spPr>
+          <a:xfrm>
+            <a:off x="2489200" y="8813800"/>
+            <a:ext cx="4445000" cy="127000"/>
+          </a:xfrm>
+          <a:prstGeom prst="rect">
+            <a:avLst/>
+          </a:prstGeom>
+          <a:noFill/>
+        </p:spPr>
+        <p:txBody>
+          <a:bodyPr wrap="square" lIns="0" rIns="0" tIns="0" bIns="0" anchor="t">
+            <a:spAutoFit/>
+          </a:bodyPr>
+          <a:lstStyle/>
+          <a:p>
+            <a:pPr algn="l">
+              <a:lnSpc>
+                <a:spcPts val="880"/>
+              </a:lnSpc>
+              <a:spcAft>
+                <a:spcPts val="240"/>
+              </a:spcAft>
+            </a:pPr>
+            <a:r>
+              <a:rPr sz="510" b="0" i="0">
+                <a:solidFill>
+                  <a:srgbClr val="1CB2FE"/>
+                </a:solidFill>
+                <a:latin typeface="Ubuntu Mono"/>
+                <a:ea typeface="Ubuntu Mono"/>
+                <a:cs typeface="Ubuntu Mono"/>
+                <a:sym typeface="Ubuntu Mono"/>
+              </a:rPr>
+              <a:t>■ </a:t>
+            </a:r>
+            <a:r>
+              <a:rPr sz="690" b="0" i="0">
+                <a:solidFill>
+                  <a:srgbClr val="0B1B2E"/>
+                </a:solidFill>
+                <a:latin typeface="Ubuntu Mono"/>
+                <a:ea typeface="Ubuntu Mono"/>
+                <a:cs typeface="Ubuntu Mono"/>
+                <a:sym typeface="Ubuntu Mono"/>
+              </a:rPr>
+              <a:t>Internal hydraulic cutter for single or multiple strings of concentric or eccentric casing.</a:t>
+            </a:r>
+          </a:p>
+          <a:p>
+            <a:pPr algn="l">
+              <a:lnSpc>
+                <a:spcPts val="880"/>
+              </a:lnSpc>
+              <a:spcAft>
+                <a:spcPts val="240"/>
+              </a:spcAft>
+            </a:pPr>
+            <a:r>
+              <a:rPr sz="510" b="0" i="0">
+                <a:solidFill>
+                  <a:srgbClr val="1CB2FE"/>
+                </a:solidFill>
+                <a:latin typeface="Ubuntu Mono"/>
+                <a:ea typeface="Ubuntu Mono"/>
+                <a:cs typeface="Ubuntu Mono"/>
+                <a:sym typeface="Ubuntu Mono"/>
+              </a:rPr>
+              <a:t>■ </a:t>
+            </a:r>
+            <a:r>
+              <a:rPr sz="690" b="0" i="0">
+                <a:solidFill>
+                  <a:srgbClr val="0B1B2E"/>
+                </a:solidFill>
+                <a:latin typeface="Ubuntu Mono"/>
+                <a:ea typeface="Ubuntu Mono"/>
+                <a:cs typeface="Ubuntu Mono"/>
+                <a:sym typeface="Ubuntu Mono"/>
+              </a:rPr>
+              <a:t>Mainly used in well abandonment, when casings are cemented and cannot be cut and pulled individually.</a:t>
+            </a:r>
+          </a:p>
+          <a:p>
+            <a:pPr algn="l">
+              <a:lnSpc>
+                <a:spcPts val="880"/>
+              </a:lnSpc>
+              <a:spcAft>
+                <a:spcPts val="240"/>
+              </a:spcAft>
+            </a:pPr>
+            <a:r>
+              <a:rPr sz="510" b="0" i="0">
+                <a:solidFill>
+                  <a:srgbClr val="1CB2FE"/>
+                </a:solidFill>
+                <a:latin typeface="Ubuntu Mono"/>
+                <a:ea typeface="Ubuntu Mono"/>
+                <a:cs typeface="Ubuntu Mono"/>
+                <a:sym typeface="Ubuntu Mono"/>
+              </a:rPr>
+              <a:t>■ </a:t>
+            </a:r>
+            <a:r>
+              <a:rPr sz="690" b="0" i="0">
+                <a:solidFill>
+                  <a:srgbClr val="0B1B2E"/>
+                </a:solidFill>
+                <a:latin typeface="Ubuntu Mono"/>
+                <a:ea typeface="Ubuntu Mono"/>
+                <a:cs typeface="Ubuntu Mono"/>
+                <a:sym typeface="Ubuntu Mono"/>
+              </a:rPr>
+              <a:t>Four tool diameters (3-5/8", 5-3/4", 8-1/4", 11-3/4") cutting casing from 4-1/2" to 36".</a:t>
+            </a:r>
+          </a:p>
+          <a:p>
+            <a:pPr algn="l">
+              <a:lnSpc>
+                <a:spcPts val="880"/>
+              </a:lnSpc>
+              <a:spcAft>
+                <a:spcPts val="240"/>
+              </a:spcAft>
+            </a:pPr>
+            <a:r>
+              <a:rPr sz="510" b="0" i="0">
+                <a:solidFill>
+                  <a:srgbClr val="1CB2FE"/>
+                </a:solidFill>
+                <a:latin typeface="Ubuntu Mono"/>
+                <a:ea typeface="Ubuntu Mono"/>
+                <a:cs typeface="Ubuntu Mono"/>
+                <a:sym typeface="Ubuntu Mono"/>
+              </a:rPr>
+              <a:t>■ </a:t>
+            </a:r>
+            <a:r>
+              <a:rPr sz="690" b="0" i="0">
+                <a:solidFill>
+                  <a:srgbClr val="0B1B2E"/>
+                </a:solidFill>
+                <a:latin typeface="Ubuntu Mono"/>
+                <a:ea typeface="Ubuntu Mono"/>
+                <a:cs typeface="Ubuntu Mono"/>
+                <a:sym typeface="Ubuntu Mono"/>
+              </a:rPr>
+              <a:t>Operates up to 400 L/min and 35 - 60 bar. Knives: standard, hardfacing or carbide.</a:t>
+            </a:r>
+          </a:p>
+        </p:txBody>
+      </p:sp>
       <p:sp>
         <p:nvSpPr>
           <p:cNvPr id="25" name="Rectangle 24"/>
@@ -14489,8 +14650,8 @@
         </p:nvSpPr>
         <p:spPr>
           <a:xfrm>
-            <a:off x="457200" y="9728200"/>
-            <a:ext cx="6642100" cy="558800"/>
+            <a:off x="457200" y="9855200"/>
+            <a:ext cx="6642100" cy="508000"/>
           </a:xfrm>
           <a:prstGeom prst="rect">
             <a:avLst/>
@@ -14518,8 +14679,8 @@
         </p:nvSpPr>
         <p:spPr>
           <a:xfrm>
-            <a:off x="635000" y="9728200"/>
-            <a:ext cx="6286500" cy="558800"/>
+            <a:off x="635000" y="9855200"/>
+            <a:ext cx="6286500" cy="508000"/>
           </a:xfrm>
           <a:prstGeom prst="rect">
             <a:avLst/>

--- a/Plaquette_Enedril_6p.pptx
+++ b/Plaquette_Enedril_6p.pptx
@@ -3907,7 +3907,7 @@
                 <a:cs typeface="Ubuntu Mono"/>
                 <a:sym typeface="Ubuntu Mono"/>
               </a:rPr>
-              <a:t>60</a:t>
+              <a:t>75</a:t>
             </a:r>
           </a:p>
         </p:txBody>
@@ -7978,7 +7978,7 @@
                 <a:cs typeface="Ubuntu Mono"/>
                 <a:sym typeface="Ubuntu Mono"/>
               </a:rPr>
-              <a:t>98,500 m drilled · 60 wells · up to 3,000 m TVD · geothermal, oil &amp; gas, underground gas storage</a:t>
+              <a:t>98,500 m drilled · 75 wells · up to 3,000 m TVD · geothermal, oil &amp; gas, underground gas storage</a:t>
             </a:r>
           </a:p>
         </p:txBody>

--- a/Plaquette_Enedril_6p.pptx
+++ b/Plaquette_Enedril_6p.pptx
@@ -11,6 +11,7 @@
     <p:sldId id="259" r:id="rId10"/>
     <p:sldId id="260" r:id="rId11"/>
     <p:sldId id="261" r:id="rId12"/>
+    <p:sldId id="262" r:id="rId13"/>
   </p:sldIdLst>
   <p:sldSz cx="7556500" cy="10693400" type="screen4x3"/>
   <p:notesSz cx="6858000" cy="9144000"/>
@@ -3714,7 +3715,7 @@
                 <a:cs typeface="Ubuntu Mono"/>
                 <a:sym typeface="Ubuntu Mono"/>
               </a:rPr>
-              <a:t>Enedril (formerly Mustang Services) is an independent French company founded in 2013 and specialised in directional drilling, fishing and well intervention for geothermal, oil &amp; gas and underground gas storage projects, in France and abroad. We combine solid field experience with technical know-how, and we are known for being fast, flexible and easy to work with.</a:t>
+              <a:t>Enedril (formerly Mustang Oil Services) is an independent French company founded in 2013 and specialised in directional drilling, fishing and well intervention for geothermal, oil &amp; gas and underground gas storage projects, in France and abroad. Run since 2022 by Fabien and Alexis, it combines solid field experience with technical know-how, and is known for being fast, flexible and easy to work with.</a:t>
             </a:r>
           </a:p>
         </p:txBody>
@@ -5549,7 +5550,7 @@
         </p:nvSpPr>
         <p:spPr>
           <a:xfrm>
-            <a:off x="457200" y="508000"/>
+            <a:off x="457200" y="558800"/>
             <a:ext cx="5588000" cy="127000"/>
           </a:xfrm>
           <a:prstGeom prst="rect">
@@ -5581,8 +5582,7 @@
                 <a:cs typeface="Ubuntu Mono"/>
                 <a:sym typeface="Ubuntu Mono"/>
               </a:rPr>
-              <a:t>DIRECTIONAL DRILLING
-&amp; MWD</a:t>
+              <a:t>OUR STORY</a:t>
             </a:r>
           </a:p>
         </p:txBody>
@@ -5595,8 +5595,8 @@
         </p:nvSpPr>
         <p:spPr>
           <a:xfrm>
-            <a:off x="457200" y="1498600"/>
-            <a:ext cx="44450" cy="711200"/>
+            <a:off x="457200" y="1168400"/>
+            <a:ext cx="44450" cy="457200"/>
           </a:xfrm>
           <a:prstGeom prst="rect">
             <a:avLst/>
@@ -5624,8 +5624,8 @@
         </p:nvSpPr>
         <p:spPr>
           <a:xfrm>
-            <a:off x="584200" y="1498600"/>
-            <a:ext cx="6515100" cy="127000"/>
+            <a:off x="635000" y="1168400"/>
+            <a:ext cx="6350000" cy="127000"/>
           </a:xfrm>
           <a:prstGeom prst="rect">
             <a:avLst/>
@@ -5640,23 +5640,23 @@
           <a:p>
             <a:pPr algn="l">
               <a:lnSpc>
-                <a:spcPts val="1100"/>
+                <a:spcPts val="1400"/>
               </a:lnSpc>
               <a:spcAft>
-                <a:spcPts val="400"/>
-              </a:spcAft>
-            </a:pPr>
-            <a:r>
-              <a:rPr sz="800" b="0" i="0">
-                <a:solidFill>
-                  <a:srgbClr val="0B1B2E"/>
-                </a:solidFill>
-                <a:latin typeface="Ubuntu Mono"/>
-                <a:ea typeface="Ubuntu Mono"/>
-                <a:cs typeface="Ubuntu Mono"/>
-                <a:sym typeface="Ubuntu Mono"/>
-              </a:rPr>
-              <a:t>Enedril provides advanced directional drilling solutions for complex wells with high precision requirements: downhole motors (PDM), rotary steerable systems (RSS) and high-temperature MWD tools. Experienced Directional Drillers and MWD Engineers steer and optimise the trajectory continuously, with well planning done in-house.</a:t>
+                <a:spcPts val="0"/>
+              </a:spcAft>
+            </a:pPr>
+            <a:r>
+              <a:rPr sz="1100" b="1" i="0">
+                <a:solidFill>
+                  <a:srgbClr val="194E9A"/>
+                </a:solidFill>
+                <a:latin typeface="Ubuntu Mono"/>
+                <a:ea typeface="Ubuntu Mono"/>
+                <a:cs typeface="Ubuntu Mono"/>
+                <a:sym typeface="Ubuntu Mono"/>
+              </a:rPr>
+              <a:t>From Mustang Oil Services to Enedril: a company with a history, and a new dynamic.</a:t>
             </a:r>
           </a:p>
         </p:txBody>
@@ -5669,8 +5669,37 @@
         </p:nvSpPr>
         <p:spPr>
           <a:xfrm>
-            <a:off x="457200" y="2387600"/>
-            <a:ext cx="2133600" cy="685800"/>
+            <a:off x="660400" y="2032000"/>
+            <a:ext cx="50800" cy="4978400"/>
+          </a:xfrm>
+          <a:prstGeom prst="rect">
+            <a:avLst/>
+          </a:prstGeom>
+          <a:solidFill>
+            <a:srgbClr val="B9CCE0"/>
+          </a:solidFill>
+          <a:ln>
+            <a:noFill/>
+          </a:ln>
+        </p:spPr>
+        <p:txBody>
+          <a:bodyPr rtlCol="0" anchor="ctr"/>
+          <a:lstStyle/>
+          <a:p>
+            <a:pPr algn="ctr"/>
+          </a:p>
+        </p:txBody>
+      </p:sp>
+      <p:sp>
+        <p:nvSpPr>
+          <p:cNvPr id="7" name="Rectangle 6"/>
+          <p:cNvSpPr/>
+          <p:nvPr/>
+        </p:nvSpPr>
+        <p:spPr>
+          <a:xfrm>
+            <a:off x="457200" y="1778000"/>
+            <a:ext cx="1651000" cy="685800"/>
           </a:xfrm>
           <a:prstGeom prst="rect">
             <a:avLst/>
@@ -5692,14 +5721,14 @@
       </p:sp>
       <p:sp>
         <p:nvSpPr>
-          <p:cNvPr id="7" name="TextBox 6"/>
+          <p:cNvPr id="8" name="TextBox 7"/>
           <p:cNvSpPr txBox="1"/>
           <p:nvPr/>
         </p:nvSpPr>
         <p:spPr>
           <a:xfrm>
-            <a:off x="457200" y="2497328"/>
-            <a:ext cx="2133600" cy="127000"/>
+            <a:off x="457200" y="1887727"/>
+            <a:ext cx="1651000" cy="127000"/>
           </a:xfrm>
           <a:prstGeom prst="rect">
             <a:avLst/>
@@ -5714,14 +5743,14 @@
           <a:p>
             <a:pPr algn="ctr">
               <a:lnSpc>
-                <a:spcPts val="1800"/>
+                <a:spcPts val="2700"/>
               </a:lnSpc>
               <a:spcAft>
                 <a:spcPts val="0"/>
               </a:spcAft>
             </a:pPr>
             <a:r>
-              <a:rPr sz="1500" b="1" i="0">
+              <a:rPr sz="2400" b="1" i="0">
                 <a:solidFill>
                   <a:srgbClr val="FFFFFF"/>
                 </a:solidFill>
@@ -5730,21 +5759,21 @@
                 <a:cs typeface="Ubuntu Mono"/>
                 <a:sym typeface="Ubuntu Mono"/>
               </a:rPr>
-              <a:t>3-1/8" to 9-5/8"</a:t>
-            </a:r>
-          </a:p>
-        </p:txBody>
-      </p:sp>
-      <p:sp>
-        <p:nvSpPr>
-          <p:cNvPr id="8" name="TextBox 7"/>
+              <a:t>2013</a:t>
+            </a:r>
+          </a:p>
+        </p:txBody>
+      </p:sp>
+      <p:sp>
+        <p:nvSpPr>
+          <p:cNvPr id="9" name="TextBox 8"/>
           <p:cNvSpPr txBox="1"/>
           <p:nvPr/>
         </p:nvSpPr>
         <p:spPr>
           <a:xfrm>
-            <a:off x="533400" y="2751328"/>
-            <a:ext cx="1981200" cy="127000"/>
+            <a:off x="533400" y="2256028"/>
+            <a:ext cx="1498600" cy="127000"/>
           </a:xfrm>
           <a:prstGeom prst="rect">
             <a:avLst/>
@@ -5775,21 +5804,117 @@
                 <a:cs typeface="Ubuntu Mono"/>
                 <a:sym typeface="Ubuntu Mono"/>
               </a:rPr>
-              <a:t>PDM motors, high-temperature power sections</a:t>
-            </a:r>
-          </a:p>
-        </p:txBody>
-      </p:sp>
-      <p:sp>
-        <p:nvSpPr>
-          <p:cNvPr id="9" name="Rectangle 8"/>
+              <a:t/>
+            </a:r>
+          </a:p>
+        </p:txBody>
+      </p:sp>
+      <p:sp>
+        <p:nvSpPr>
+          <p:cNvPr id="10" name="Rectangle 9"/>
           <p:cNvSpPr/>
           <p:nvPr/>
         </p:nvSpPr>
         <p:spPr>
           <a:xfrm>
-            <a:off x="2705100" y="2387600"/>
-            <a:ext cx="2133600" cy="685800"/>
+            <a:off x="2108200" y="2095500"/>
+            <a:ext cx="381000" cy="50800"/>
+          </a:xfrm>
+          <a:prstGeom prst="rect">
+            <a:avLst/>
+          </a:prstGeom>
+          <a:solidFill>
+            <a:srgbClr val="194E9A"/>
+          </a:solidFill>
+          <a:ln>
+            <a:noFill/>
+          </a:ln>
+        </p:spPr>
+        <p:txBody>
+          <a:bodyPr rtlCol="0" anchor="ctr"/>
+          <a:lstStyle/>
+          <a:p>
+            <a:pPr algn="ctr"/>
+          </a:p>
+        </p:txBody>
+      </p:sp>
+      <p:sp>
+        <p:nvSpPr>
+          <p:cNvPr id="11" name="TextBox 10"/>
+          <p:cNvSpPr txBox="1"/>
+          <p:nvPr/>
+        </p:nvSpPr>
+        <p:spPr>
+          <a:xfrm>
+            <a:off x="2616200" y="1828800"/>
+            <a:ext cx="4483100" cy="127000"/>
+          </a:xfrm>
+          <a:prstGeom prst="rect">
+            <a:avLst/>
+          </a:prstGeom>
+          <a:noFill/>
+        </p:spPr>
+        <p:txBody>
+          <a:bodyPr wrap="square" lIns="0" rIns="0" tIns="0" bIns="0" anchor="t">
+            <a:spAutoFit/>
+          </a:bodyPr>
+          <a:lstStyle/>
+          <a:p>
+            <a:pPr algn="l">
+              <a:lnSpc>
+                <a:spcPts val="1400"/>
+              </a:lnSpc>
+              <a:spcAft>
+                <a:spcPts val="500"/>
+              </a:spcAft>
+            </a:pPr>
+            <a:r>
+              <a:rPr sz="1100" b="1" i="0">
+                <a:solidFill>
+                  <a:srgbClr val="194E9A"/>
+                </a:solidFill>
+                <a:latin typeface="Ubuntu Mono"/>
+                <a:ea typeface="Ubuntu Mono"/>
+                <a:cs typeface="Ubuntu Mono"/>
+                <a:sym typeface="Ubuntu Mono"/>
+              </a:rPr>
+              <a:t>MUSTANG OIL SERVICES</a:t>
+            </a:r>
+          </a:p>
+          <a:p>
+            <a:pPr algn="l">
+              <a:lnSpc>
+                <a:spcPts val="1400"/>
+              </a:lnSpc>
+              <a:spcAft>
+                <a:spcPts val="500"/>
+              </a:spcAft>
+            </a:pPr>
+            <a:r>
+              <a:rPr sz="1000" b="0" i="0">
+                <a:solidFill>
+                  <a:srgbClr val="0B1B2E"/>
+                </a:solidFill>
+                <a:latin typeface="Ubuntu Mono"/>
+                <a:ea typeface="Ubuntu Mono"/>
+                <a:cs typeface="Ubuntu Mono"/>
+                <a:sym typeface="Ubuntu Mono"/>
+              </a:rPr>
+              <a:t>The company starts as Mustang Oil Services, dedicated to fishing only.</a:t>
+            </a:r>
+          </a:p>
+        </p:txBody>
+      </p:sp>
+      <p:sp>
+        <p:nvSpPr>
+          <p:cNvPr id="12" name="Rectangle 11"/>
+          <p:cNvSpPr/>
+          <p:nvPr/>
+        </p:nvSpPr>
+        <p:spPr>
+          <a:xfrm>
+            <a:off x="457200" y="3302000"/>
+            <a:ext cx="1651000" cy="685800"/>
           </a:xfrm>
           <a:prstGeom prst="rect">
             <a:avLst/>
@@ -5811,14 +5936,14 @@
       </p:sp>
       <p:sp>
         <p:nvSpPr>
-          <p:cNvPr id="10" name="TextBox 9"/>
+          <p:cNvPr id="13" name="TextBox 12"/>
           <p:cNvSpPr txBox="1"/>
           <p:nvPr/>
         </p:nvSpPr>
         <p:spPr>
           <a:xfrm>
-            <a:off x="2705100" y="2497328"/>
-            <a:ext cx="2133600" cy="127000"/>
+            <a:off x="457200" y="3411728"/>
+            <a:ext cx="1651000" cy="127000"/>
           </a:xfrm>
           <a:prstGeom prst="rect">
             <a:avLst/>
@@ -5833,14 +5958,14 @@
           <a:p>
             <a:pPr algn="ctr">
               <a:lnSpc>
-                <a:spcPts val="2500"/>
+                <a:spcPts val="2700"/>
               </a:lnSpc>
               <a:spcAft>
                 <a:spcPts val="0"/>
               </a:spcAft>
             </a:pPr>
             <a:r>
-              <a:rPr sz="2200" b="1" i="0">
+              <a:rPr sz="2400" b="1" i="0">
                 <a:solidFill>
                   <a:srgbClr val="FFFFFF"/>
                 </a:solidFill>
@@ -5849,21 +5974,21 @@
                 <a:cs typeface="Ubuntu Mono"/>
                 <a:sym typeface="Ubuntu Mono"/>
               </a:rPr>
-              <a:t>RSS</a:t>
-            </a:r>
-          </a:p>
-        </p:txBody>
-      </p:sp>
-      <p:sp>
-        <p:nvSpPr>
-          <p:cNvPr id="11" name="TextBox 10"/>
+              <a:t>2019</a:t>
+            </a:r>
+          </a:p>
+        </p:txBody>
+      </p:sp>
+      <p:sp>
+        <p:nvSpPr>
+          <p:cNvPr id="14" name="TextBox 13"/>
           <p:cNvSpPr txBox="1"/>
           <p:nvPr/>
         </p:nvSpPr>
         <p:spPr>
           <a:xfrm>
-            <a:off x="2781300" y="2840228"/>
-            <a:ext cx="1981200" cy="127000"/>
+            <a:off x="533400" y="3780028"/>
+            <a:ext cx="1498600" cy="127000"/>
           </a:xfrm>
           <a:prstGeom prst="rect">
             <a:avLst/>
@@ -5894,21 +6019,117 @@
                 <a:cs typeface="Ubuntu Mono"/>
                 <a:sym typeface="Ubuntu Mono"/>
               </a:rPr>
-              <a:t>Push-the-bit and point-the-bit systems</a:t>
-            </a:r>
-          </a:p>
-        </p:txBody>
-      </p:sp>
-      <p:sp>
-        <p:nvSpPr>
-          <p:cNvPr id="12" name="Rectangle 11"/>
+              <a:t/>
+            </a:r>
+          </a:p>
+        </p:txBody>
+      </p:sp>
+      <p:sp>
+        <p:nvSpPr>
+          <p:cNvPr id="15" name="Rectangle 14"/>
           <p:cNvSpPr/>
           <p:nvPr/>
         </p:nvSpPr>
         <p:spPr>
           <a:xfrm>
-            <a:off x="4953000" y="2387600"/>
-            <a:ext cx="2146300" cy="685800"/>
+            <a:off x="2108200" y="3619500"/>
+            <a:ext cx="381000" cy="50800"/>
+          </a:xfrm>
+          <a:prstGeom prst="rect">
+            <a:avLst/>
+          </a:prstGeom>
+          <a:solidFill>
+            <a:srgbClr val="0F7FCB"/>
+          </a:solidFill>
+          <a:ln>
+            <a:noFill/>
+          </a:ln>
+        </p:spPr>
+        <p:txBody>
+          <a:bodyPr rtlCol="0" anchor="ctr"/>
+          <a:lstStyle/>
+          <a:p>
+            <a:pPr algn="ctr"/>
+          </a:p>
+        </p:txBody>
+      </p:sp>
+      <p:sp>
+        <p:nvSpPr>
+          <p:cNvPr id="16" name="TextBox 15"/>
+          <p:cNvSpPr txBox="1"/>
+          <p:nvPr/>
+        </p:nvSpPr>
+        <p:spPr>
+          <a:xfrm>
+            <a:off x="2616200" y="3352800"/>
+            <a:ext cx="4483100" cy="127000"/>
+          </a:xfrm>
+          <a:prstGeom prst="rect">
+            <a:avLst/>
+          </a:prstGeom>
+          <a:noFill/>
+        </p:spPr>
+        <p:txBody>
+          <a:bodyPr wrap="square" lIns="0" rIns="0" tIns="0" bIns="0" anchor="t">
+            <a:spAutoFit/>
+          </a:bodyPr>
+          <a:lstStyle/>
+          <a:p>
+            <a:pPr algn="l">
+              <a:lnSpc>
+                <a:spcPts val="1400"/>
+              </a:lnSpc>
+              <a:spcAft>
+                <a:spcPts val="500"/>
+              </a:spcAft>
+            </a:pPr>
+            <a:r>
+              <a:rPr sz="1100" b="1" i="0">
+                <a:solidFill>
+                  <a:srgbClr val="194E9A"/>
+                </a:solidFill>
+                <a:latin typeface="Ubuntu Mono"/>
+                <a:ea typeface="Ubuntu Mono"/>
+                <a:cs typeface="Ubuntu Mono"/>
+                <a:sym typeface="Ubuntu Mono"/>
+              </a:rPr>
+              <a:t>DIRECTIONAL DRILLING + FISHING</a:t>
+            </a:r>
+          </a:p>
+          <a:p>
+            <a:pPr algn="l">
+              <a:lnSpc>
+                <a:spcPts val="1400"/>
+              </a:lnSpc>
+              <a:spcAft>
+                <a:spcPts val="500"/>
+              </a:spcAft>
+            </a:pPr>
+            <a:r>
+              <a:rPr sz="1000" b="0" i="0">
+                <a:solidFill>
+                  <a:srgbClr val="0B1B2E"/>
+                </a:solidFill>
+                <a:latin typeface="Ubuntu Mono"/>
+                <a:ea typeface="Ubuntu Mono"/>
+                <a:cs typeface="Ubuntu Mono"/>
+                <a:sym typeface="Ubuntu Mono"/>
+              </a:rPr>
+              <a:t>Directional drilling joins fishing: the offer now covers drilling projects as well as interventions.</a:t>
+            </a:r>
+          </a:p>
+        </p:txBody>
+      </p:sp>
+      <p:sp>
+        <p:nvSpPr>
+          <p:cNvPr id="17" name="Rectangle 16"/>
+          <p:cNvSpPr/>
+          <p:nvPr/>
+        </p:nvSpPr>
+        <p:spPr>
+          <a:xfrm>
+            <a:off x="457200" y="4826000"/>
+            <a:ext cx="1651000" cy="685800"/>
           </a:xfrm>
           <a:prstGeom prst="rect">
             <a:avLst/>
@@ -5930,14 +6151,14 @@
       </p:sp>
       <p:sp>
         <p:nvSpPr>
-          <p:cNvPr id="13" name="TextBox 12"/>
+          <p:cNvPr id="18" name="TextBox 17"/>
           <p:cNvSpPr txBox="1"/>
           <p:nvPr/>
         </p:nvSpPr>
         <p:spPr>
           <a:xfrm>
-            <a:off x="4953000" y="2497328"/>
-            <a:ext cx="2146300" cy="127000"/>
+            <a:off x="457200" y="4935728"/>
+            <a:ext cx="1651000" cy="127000"/>
           </a:xfrm>
           <a:prstGeom prst="rect">
             <a:avLst/>
@@ -5952,14 +6173,14 @@
           <a:p>
             <a:pPr algn="ctr">
               <a:lnSpc>
-                <a:spcPts val="2100"/>
+                <a:spcPts val="2700"/>
               </a:lnSpc>
               <a:spcAft>
                 <a:spcPts val="0"/>
               </a:spcAft>
             </a:pPr>
             <a:r>
-              <a:rPr sz="1800" b="1" i="0">
+              <a:rPr sz="2400" b="1" i="0">
                 <a:solidFill>
                   <a:srgbClr val="FFFFFF"/>
                 </a:solidFill>
@@ -5968,21 +6189,21 @@
                 <a:cs typeface="Ubuntu Mono"/>
                 <a:sym typeface="Ubuntu Mono"/>
               </a:rPr>
-              <a:t>up to 200°C</a:t>
-            </a:r>
-          </a:p>
-        </p:txBody>
-      </p:sp>
-      <p:sp>
-        <p:nvSpPr>
-          <p:cNvPr id="14" name="TextBox 13"/>
+              <a:t>2022</a:t>
+            </a:r>
+          </a:p>
+        </p:txBody>
+      </p:sp>
+      <p:sp>
+        <p:nvSpPr>
+          <p:cNvPr id="19" name="TextBox 18"/>
           <p:cNvSpPr txBox="1"/>
           <p:nvPr/>
         </p:nvSpPr>
         <p:spPr>
           <a:xfrm>
-            <a:off x="5029200" y="2789428"/>
-            <a:ext cx="1993900" cy="127000"/>
+            <a:off x="533400" y="5304028"/>
+            <a:ext cx="1498600" cy="127000"/>
           </a:xfrm>
           <a:prstGeom prst="rect">
             <a:avLst/>
@@ -6013,45 +6234,21 @@
                 <a:cs typeface="Ubuntu Mono"/>
                 <a:sym typeface="Ubuntu Mono"/>
               </a:rPr>
-              <a:t>MWD kits with HT electronics</a:t>
-            </a:r>
-          </a:p>
-        </p:txBody>
-      </p:sp>
-      <p:pic>
-        <p:nvPicPr>
-          <p:cNvPr id="15" name="Picture 14" descr="_c_motor_170_128.png"/>
-          <p:cNvPicPr>
-            <a:picLocks noChangeAspect="1"/>
-          </p:cNvPicPr>
-          <p:nvPr/>
-        </p:nvPicPr>
-        <p:blipFill>
-          <a:blip r:embed="rId3"/>
-          <a:stretch>
-            <a:fillRect/>
-          </a:stretch>
-        </p:blipFill>
-        <p:spPr>
-          <a:xfrm>
-            <a:off x="457200" y="3225800"/>
-            <a:ext cx="2159000" cy="1625600"/>
-          </a:xfrm>
-          <a:prstGeom prst="rect">
-            <a:avLst/>
-          </a:prstGeom>
-        </p:spPr>
-      </p:pic>
-      <p:sp>
-        <p:nvSpPr>
-          <p:cNvPr id="16" name="Rectangle 15"/>
+              <a:t/>
+            </a:r>
+          </a:p>
+        </p:txBody>
+      </p:sp>
+      <p:sp>
+        <p:nvSpPr>
+          <p:cNvPr id="20" name="Rectangle 19"/>
           <p:cNvSpPr/>
           <p:nvPr/>
         </p:nvSpPr>
         <p:spPr>
           <a:xfrm>
-            <a:off x="457200" y="4851400"/>
-            <a:ext cx="2159000" cy="685800"/>
+            <a:off x="2108200" y="5143500"/>
+            <a:ext cx="381000" cy="50800"/>
           </a:xfrm>
           <a:prstGeom prst="rect">
             <a:avLst/>
@@ -6073,14 +6270,14 @@
       </p:sp>
       <p:sp>
         <p:nvSpPr>
-          <p:cNvPr id="17" name="TextBox 16"/>
+          <p:cNvPr id="21" name="TextBox 20"/>
           <p:cNvSpPr txBox="1"/>
           <p:nvPr/>
         </p:nvSpPr>
         <p:spPr>
           <a:xfrm>
-            <a:off x="558800" y="4927600"/>
-            <a:ext cx="1955800" cy="127000"/>
+            <a:off x="2616200" y="4876800"/>
+            <a:ext cx="4483100" cy="127000"/>
           </a:xfrm>
           <a:prstGeom prst="rect">
             <a:avLst/>
@@ -6095,36 +6292,110 @@
           <a:p>
             <a:pPr algn="l">
               <a:lnSpc>
-                <a:spcPts val="760"/>
+                <a:spcPts val="1400"/>
               </a:lnSpc>
               <a:spcAft>
-                <a:spcPts val="100"/>
-              </a:spcAft>
-            </a:pPr>
-            <a:r>
-              <a:rPr sz="800" b="1" i="0">
-                <a:solidFill>
-                  <a:srgbClr val="FFFFFF"/>
-                </a:solidFill>
-                <a:latin typeface="Ubuntu Mono"/>
-                <a:ea typeface="Ubuntu Mono"/>
-                <a:cs typeface="Ubuntu Mono"/>
-                <a:sym typeface="Ubuntu Mono"/>
-              </a:rPr>
-              <a:t>MUD MOTORS &amp; RSS</a:t>
+                <a:spcPts val="500"/>
+              </a:spcAft>
+            </a:pPr>
+            <a:r>
+              <a:rPr sz="1100" b="1" i="0">
+                <a:solidFill>
+                  <a:srgbClr val="194E9A"/>
+                </a:solidFill>
+                <a:latin typeface="Ubuntu Mono"/>
+                <a:ea typeface="Ubuntu Mono"/>
+                <a:cs typeface="Ubuntu Mono"/>
+                <a:sym typeface="Ubuntu Mono"/>
+              </a:rPr>
+              <a:t>NEW OWNERS</a:t>
             </a:r>
           </a:p>
           <a:p>
             <a:pPr algn="l">
               <a:lnSpc>
-                <a:spcPts val="760"/>
+                <a:spcPts val="1400"/>
               </a:lnSpc>
               <a:spcAft>
-                <a:spcPts val="100"/>
-              </a:spcAft>
-            </a:pPr>
-            <a:r>
-              <a:rPr sz="640" b="0" i="0">
+                <a:spcPts val="500"/>
+              </a:spcAft>
+            </a:pPr>
+            <a:r>
+              <a:rPr sz="1000" b="0" i="0">
+                <a:solidFill>
+                  <a:srgbClr val="0B1B2E"/>
+                </a:solidFill>
+                <a:latin typeface="Ubuntu Mono"/>
+                <a:ea typeface="Ubuntu Mono"/>
+                <a:cs typeface="Ubuntu Mono"/>
+                <a:sym typeface="Ubuntu Mono"/>
+              </a:rPr>
+              <a:t>Fabien Jacquot and Alexis Estines take over the company.</a:t>
+            </a:r>
+          </a:p>
+        </p:txBody>
+      </p:sp>
+      <p:sp>
+        <p:nvSpPr>
+          <p:cNvPr id="22" name="Rectangle 21"/>
+          <p:cNvSpPr/>
+          <p:nvPr/>
+        </p:nvSpPr>
+        <p:spPr>
+          <a:xfrm>
+            <a:off x="457200" y="6350000"/>
+            <a:ext cx="1651000" cy="685800"/>
+          </a:xfrm>
+          <a:prstGeom prst="rect">
+            <a:avLst/>
+          </a:prstGeom>
+          <a:solidFill>
+            <a:srgbClr val="194E9A"/>
+          </a:solidFill>
+          <a:ln>
+            <a:noFill/>
+          </a:ln>
+        </p:spPr>
+        <p:txBody>
+          <a:bodyPr rtlCol="0" anchor="ctr"/>
+          <a:lstStyle/>
+          <a:p>
+            <a:pPr algn="ctr"/>
+          </a:p>
+        </p:txBody>
+      </p:sp>
+      <p:sp>
+        <p:nvSpPr>
+          <p:cNvPr id="23" name="TextBox 22"/>
+          <p:cNvSpPr txBox="1"/>
+          <p:nvPr/>
+        </p:nvSpPr>
+        <p:spPr>
+          <a:xfrm>
+            <a:off x="457200" y="6459728"/>
+            <a:ext cx="1651000" cy="127000"/>
+          </a:xfrm>
+          <a:prstGeom prst="rect">
+            <a:avLst/>
+          </a:prstGeom>
+          <a:noFill/>
+        </p:spPr>
+        <p:txBody>
+          <a:bodyPr wrap="square" lIns="0" rIns="0" tIns="0" bIns="0" anchor="t">
+            <a:spAutoFit/>
+          </a:bodyPr>
+          <a:lstStyle/>
+          <a:p>
+            <a:pPr algn="ctr">
+              <a:lnSpc>
+                <a:spcPts val="2700"/>
+              </a:lnSpc>
+              <a:spcAft>
+                <a:spcPts val="0"/>
+              </a:spcAft>
+            </a:pPr>
+            <a:r>
+              <a:rPr sz="2400" b="1" i="0">
                 <a:solidFill>
                   <a:srgbClr val="FFFFFF"/>
                 </a:solidFill>
@@ -6133,45 +6404,248 @@
                 <a:cs typeface="Ubuntu Mono"/>
                 <a:sym typeface="Ubuntu Mono"/>
               </a:rPr>
-              <a:t>PDMs from 3-1/8" to 9-5/8" OD with a wide range of power sections, including high-temperature stators. Push-the-bit and point-the-bit RSS for precise control in complex formations.</a:t>
-            </a:r>
-          </a:p>
-        </p:txBody>
-      </p:sp>
-      <p:pic>
-        <p:nvPicPr>
-          <p:cNvPr id="18" name="Picture 17" descr="_c_wellplan_345_128.png"/>
-          <p:cNvPicPr>
-            <a:picLocks noChangeAspect="1"/>
-          </p:cNvPicPr>
-          <p:nvPr/>
-        </p:nvPicPr>
-        <p:blipFill>
-          <a:blip r:embed="rId4"/>
-          <a:stretch>
-            <a:fillRect/>
-          </a:stretch>
-        </p:blipFill>
-        <p:spPr>
-          <a:xfrm>
-            <a:off x="2717800" y="3225800"/>
-            <a:ext cx="4381500" cy="1625600"/>
-          </a:xfrm>
-          <a:prstGeom prst="rect">
-            <a:avLst/>
-          </a:prstGeom>
-        </p:spPr>
-      </p:pic>
-      <p:sp>
-        <p:nvSpPr>
-          <p:cNvPr id="19" name="Rectangle 18"/>
+              <a:t>2025</a:t>
+            </a:r>
+          </a:p>
+        </p:txBody>
+      </p:sp>
+      <p:sp>
+        <p:nvSpPr>
+          <p:cNvPr id="24" name="TextBox 23"/>
+          <p:cNvSpPr txBox="1"/>
+          <p:nvPr/>
+        </p:nvSpPr>
+        <p:spPr>
+          <a:xfrm>
+            <a:off x="533400" y="6828028"/>
+            <a:ext cx="1498600" cy="127000"/>
+          </a:xfrm>
+          <a:prstGeom prst="rect">
+            <a:avLst/>
+          </a:prstGeom>
+          <a:noFill/>
+        </p:spPr>
+        <p:txBody>
+          <a:bodyPr wrap="square" lIns="0" rIns="0" tIns="0" bIns="0" anchor="t">
+            <a:spAutoFit/>
+          </a:bodyPr>
+          <a:lstStyle/>
+          <a:p>
+            <a:pPr algn="ctr">
+              <a:lnSpc>
+                <a:spcPts val="840"/>
+              </a:lnSpc>
+              <a:spcAft>
+                <a:spcPts val="0"/>
+              </a:spcAft>
+            </a:pPr>
+            <a:r>
+              <a:rPr sz="690" b="0" i="0">
+                <a:solidFill>
+                  <a:srgbClr val="FFFFFF"/>
+                </a:solidFill>
+                <a:latin typeface="Ubuntu Mono"/>
+                <a:ea typeface="Ubuntu Mono"/>
+                <a:cs typeface="Ubuntu Mono"/>
+                <a:sym typeface="Ubuntu Mono"/>
+              </a:rPr>
+              <a:t/>
+            </a:r>
+          </a:p>
+        </p:txBody>
+      </p:sp>
+      <p:sp>
+        <p:nvSpPr>
+          <p:cNvPr id="25" name="Rectangle 24"/>
           <p:cNvSpPr/>
           <p:nvPr/>
         </p:nvSpPr>
         <p:spPr>
           <a:xfrm>
-            <a:off x="2717800" y="4851400"/>
-            <a:ext cx="4381500" cy="685800"/>
+            <a:off x="2108200" y="6667500"/>
+            <a:ext cx="381000" cy="50800"/>
+          </a:xfrm>
+          <a:prstGeom prst="rect">
+            <a:avLst/>
+          </a:prstGeom>
+          <a:solidFill>
+            <a:srgbClr val="194E9A"/>
+          </a:solidFill>
+          <a:ln>
+            <a:noFill/>
+          </a:ln>
+        </p:spPr>
+        <p:txBody>
+          <a:bodyPr rtlCol="0" anchor="ctr"/>
+          <a:lstStyle/>
+          <a:p>
+            <a:pPr algn="ctr"/>
+          </a:p>
+        </p:txBody>
+      </p:sp>
+      <p:sp>
+        <p:nvSpPr>
+          <p:cNvPr id="26" name="TextBox 25"/>
+          <p:cNvSpPr txBox="1"/>
+          <p:nvPr/>
+        </p:nvSpPr>
+        <p:spPr>
+          <a:xfrm>
+            <a:off x="2616200" y="6400800"/>
+            <a:ext cx="4483100" cy="127000"/>
+          </a:xfrm>
+          <a:prstGeom prst="rect">
+            <a:avLst/>
+          </a:prstGeom>
+          <a:noFill/>
+        </p:spPr>
+        <p:txBody>
+          <a:bodyPr wrap="square" lIns="0" rIns="0" tIns="0" bIns="0" anchor="t">
+            <a:spAutoFit/>
+          </a:bodyPr>
+          <a:lstStyle/>
+          <a:p>
+            <a:pPr algn="l">
+              <a:lnSpc>
+                <a:spcPts val="1400"/>
+              </a:lnSpc>
+              <a:spcAft>
+                <a:spcPts val="500"/>
+              </a:spcAft>
+            </a:pPr>
+            <a:r>
+              <a:rPr sz="1100" b="1" i="0">
+                <a:solidFill>
+                  <a:srgbClr val="194E9A"/>
+                </a:solidFill>
+                <a:latin typeface="Ubuntu Mono"/>
+                <a:ea typeface="Ubuntu Mono"/>
+                <a:cs typeface="Ubuntu Mono"/>
+                <a:sym typeface="Ubuntu Mono"/>
+              </a:rPr>
+              <a:t>ENEDRIL</a:t>
+            </a:r>
+          </a:p>
+          <a:p>
+            <a:pPr algn="l">
+              <a:lnSpc>
+                <a:spcPts val="1400"/>
+              </a:lnSpc>
+              <a:spcAft>
+                <a:spcPts val="500"/>
+              </a:spcAft>
+            </a:pPr>
+            <a:r>
+              <a:rPr sz="1000" b="0" i="0">
+                <a:solidFill>
+                  <a:srgbClr val="0B1B2E"/>
+                </a:solidFill>
+                <a:latin typeface="Ubuntu Mono"/>
+                <a:ea typeface="Ubuntu Mono"/>
+                <a:cs typeface="Ubuntu Mono"/>
+                <a:sym typeface="Ubuntu Mono"/>
+              </a:rPr>
+              <a:t>Rebranding: Mustang Oil Services becomes Enedril, Fishing and Drilling Solutions.</a:t>
+            </a:r>
+          </a:p>
+        </p:txBody>
+      </p:sp>
+      <p:sp>
+        <p:nvSpPr>
+          <p:cNvPr id="27" name="Rectangle 26"/>
+          <p:cNvSpPr/>
+          <p:nvPr/>
+        </p:nvSpPr>
+        <p:spPr>
+          <a:xfrm>
+            <a:off x="457200" y="7797800"/>
+            <a:ext cx="6642100" cy="1143000"/>
+          </a:xfrm>
+          <a:prstGeom prst="rect">
+            <a:avLst/>
+          </a:prstGeom>
+          <a:solidFill>
+            <a:srgbClr val="194E9A"/>
+          </a:solidFill>
+          <a:ln>
+            <a:noFill/>
+          </a:ln>
+        </p:spPr>
+        <p:txBody>
+          <a:bodyPr rtlCol="0" anchor="ctr"/>
+          <a:lstStyle/>
+          <a:p>
+            <a:pPr algn="ctr"/>
+          </a:p>
+        </p:txBody>
+      </p:sp>
+      <p:sp>
+        <p:nvSpPr>
+          <p:cNvPr id="28" name="TextBox 27"/>
+          <p:cNvSpPr txBox="1"/>
+          <p:nvPr/>
+        </p:nvSpPr>
+        <p:spPr>
+          <a:xfrm>
+            <a:off x="635000" y="7797800"/>
+            <a:ext cx="6286500" cy="1143000"/>
+          </a:xfrm>
+          <a:prstGeom prst="rect">
+            <a:avLst/>
+          </a:prstGeom>
+          <a:noFill/>
+        </p:spPr>
+        <p:txBody>
+          <a:bodyPr wrap="square" lIns="0" rIns="0" tIns="0" bIns="0" anchor="ctr">
+            <a:spAutoFit/>
+          </a:bodyPr>
+          <a:lstStyle/>
+          <a:p>
+            <a:pPr algn="l">
+              <a:lnSpc>
+                <a:spcPts val="1400"/>
+              </a:lnSpc>
+              <a:spcAft>
+                <a:spcPts val="0"/>
+              </a:spcAft>
+            </a:pPr>
+            <a:r>
+              <a:rPr sz="840" b="1" i="0">
+                <a:solidFill>
+                  <a:srgbClr val="1CB2FE"/>
+                </a:solidFill>
+                <a:latin typeface="Ubuntu Mono"/>
+                <a:ea typeface="Ubuntu Mono"/>
+                <a:cs typeface="Ubuntu Mono"/>
+                <a:sym typeface="Ubuntu Mono"/>
+              </a:rPr>
+              <a:t>CONTINUITY  </a:t>
+            </a:r>
+            <a:r>
+              <a:rPr sz="1050" b="1" i="0">
+                <a:solidFill>
+                  <a:srgbClr val="FFFFFF"/>
+                </a:solidFill>
+                <a:latin typeface="Ubuntu Mono"/>
+                <a:ea typeface="Ubuntu Mono"/>
+                <a:cs typeface="Ubuntu Mono"/>
+                <a:sym typeface="Ubuntu Mono"/>
+              </a:rPr>
+              <a:t>Since 2022 the activities continue: fishing, workover, plug and abandonment and directional drilling, with the same commitment to our clients.</a:t>
+            </a:r>
+          </a:p>
+        </p:txBody>
+      </p:sp>
+      <p:sp>
+        <p:nvSpPr>
+          <p:cNvPr id="29" name="Rectangle 28"/>
+          <p:cNvSpPr/>
+          <p:nvPr/>
+        </p:nvSpPr>
+        <p:spPr>
+          <a:xfrm>
+            <a:off x="457200" y="9093200"/>
+            <a:ext cx="6642100" cy="1143000"/>
           </a:xfrm>
           <a:prstGeom prst="rect">
             <a:avLst/>
@@ -6193,1764 +6667,14 @@
       </p:sp>
       <p:sp>
         <p:nvSpPr>
-          <p:cNvPr id="20" name="TextBox 19"/>
+          <p:cNvPr id="30" name="TextBox 29"/>
           <p:cNvSpPr txBox="1"/>
           <p:nvPr/>
         </p:nvSpPr>
         <p:spPr>
           <a:xfrm>
-            <a:off x="2819400" y="4927600"/>
-            <a:ext cx="4191000" cy="127000"/>
-          </a:xfrm>
-          <a:prstGeom prst="rect">
-            <a:avLst/>
-          </a:prstGeom>
-          <a:noFill/>
-        </p:spPr>
-        <p:txBody>
-          <a:bodyPr wrap="square" lIns="0" rIns="0" tIns="0" bIns="0" anchor="t">
-            <a:spAutoFit/>
-          </a:bodyPr>
-          <a:lstStyle/>
-          <a:p>
-            <a:pPr algn="l">
-              <a:lnSpc>
-                <a:spcPts val="800"/>
-              </a:lnSpc>
-              <a:spcAft>
-                <a:spcPts val="100"/>
-              </a:spcAft>
-            </a:pPr>
-            <a:r>
-              <a:rPr sz="800" b="1" i="0">
-                <a:solidFill>
-                  <a:srgbClr val="FFFFFF"/>
-                </a:solidFill>
-                <a:latin typeface="Ubuntu Mono"/>
-                <a:ea typeface="Ubuntu Mono"/>
-                <a:cs typeface="Ubuntu Mono"/>
-                <a:sym typeface="Ubuntu Mono"/>
-              </a:rPr>
-              <a:t>WELL PLANNING</a:t>
-            </a:r>
-          </a:p>
-          <a:p>
-            <a:pPr algn="l">
-              <a:lnSpc>
-                <a:spcPts val="800"/>
-              </a:lnSpc>
-              <a:spcAft>
-                <a:spcPts val="100"/>
-              </a:spcAft>
-            </a:pPr>
-            <a:r>
-              <a:rPr sz="660" b="0" i="0">
-                <a:solidFill>
-                  <a:srgbClr val="FFFFFF"/>
-                </a:solidFill>
-                <a:latin typeface="Ubuntu Mono"/>
-                <a:ea typeface="Ubuntu Mono"/>
-                <a:cs typeface="Ubuntu Mono"/>
-                <a:sym typeface="Ubuntu Mono"/>
-              </a:rPr>
-              <a:t>Innova and DrillScan software: torque and drag, hydraulics and anti-collision, to drill safely and efficiently in line with project goals. Full simulation, high-frequency data recorder.</a:t>
-            </a:r>
-          </a:p>
-        </p:txBody>
-      </p:sp>
-      <p:sp>
-        <p:nvSpPr>
-          <p:cNvPr id="21" name="Rectangle 20"/>
-          <p:cNvSpPr/>
-          <p:nvPr/>
-        </p:nvSpPr>
-        <p:spPr>
-          <a:xfrm>
-            <a:off x="457200" y="5715000"/>
-            <a:ext cx="6642100" cy="3238500"/>
-          </a:xfrm>
-          <a:prstGeom prst="rect">
-            <a:avLst/>
-          </a:prstGeom>
-          <a:solidFill>
-            <a:srgbClr val="EAF4FC"/>
-          </a:solidFill>
-          <a:ln>
-            <a:noFill/>
-          </a:ln>
-        </p:spPr>
-        <p:txBody>
-          <a:bodyPr rtlCol="0" anchor="ctr"/>
-          <a:lstStyle/>
-          <a:p>
-            <a:pPr algn="ctr"/>
-          </a:p>
-        </p:txBody>
-      </p:sp>
-      <p:sp>
-        <p:nvSpPr>
-          <p:cNvPr id="22" name="TextBox 21"/>
-          <p:cNvSpPr txBox="1"/>
-          <p:nvPr/>
-        </p:nvSpPr>
-        <p:spPr>
-          <a:xfrm>
-            <a:off x="609600" y="5816600"/>
-            <a:ext cx="3810000" cy="127000"/>
-          </a:xfrm>
-          <a:prstGeom prst="rect">
-            <a:avLst/>
-          </a:prstGeom>
-          <a:noFill/>
-        </p:spPr>
-        <p:txBody>
-          <a:bodyPr wrap="square" lIns="0" rIns="0" tIns="0" bIns="0" anchor="t">
-            <a:spAutoFit/>
-          </a:bodyPr>
-          <a:lstStyle/>
-          <a:p>
-            <a:pPr algn="l">
-              <a:spcAft>
-                <a:spcPts val="0"/>
-              </a:spcAft>
-            </a:pPr>
-            <a:r>
-              <a:rPr sz="1300" b="1" i="0">
-                <a:solidFill>
-                  <a:srgbClr val="194E9A"/>
-                </a:solidFill>
-                <a:latin typeface="Ubuntu Mono"/>
-                <a:ea typeface="Ubuntu Mono"/>
-                <a:cs typeface="Ubuntu Mono"/>
-                <a:sym typeface="Ubuntu Mono"/>
-              </a:rPr>
-              <a:t>BOOST MUD PULSE MWD SYSTEM</a:t>
-            </a:r>
-          </a:p>
-        </p:txBody>
-      </p:sp>
-      <p:sp>
-        <p:nvSpPr>
-          <p:cNvPr id="23" name="TextBox 22"/>
-          <p:cNvSpPr txBox="1"/>
-          <p:nvPr/>
-        </p:nvSpPr>
-        <p:spPr>
-          <a:xfrm>
-            <a:off x="609600" y="6045200"/>
-            <a:ext cx="4191000" cy="127000"/>
-          </a:xfrm>
-          <a:prstGeom prst="rect">
-            <a:avLst/>
-          </a:prstGeom>
-          <a:noFill/>
-        </p:spPr>
-        <p:txBody>
-          <a:bodyPr wrap="square" lIns="0" rIns="0" tIns="0" bIns="0" anchor="t">
-            <a:spAutoFit/>
-          </a:bodyPr>
-          <a:lstStyle/>
-          <a:p>
-            <a:pPr algn="l">
-              <a:lnSpc>
-                <a:spcPts val="940"/>
-              </a:lnSpc>
-              <a:spcAft>
-                <a:spcPts val="0"/>
-              </a:spcAft>
-            </a:pPr>
-            <a:r>
-              <a:rPr sz="740" b="0" i="0">
-                <a:solidFill>
-                  <a:srgbClr val="0B1B2E"/>
-                </a:solidFill>
-                <a:latin typeface="Ubuntu Mono"/>
-                <a:ea typeface="Ubuntu Mono"/>
-                <a:cs typeface="Ubuntu Mono"/>
-                <a:sym typeface="Ubuntu Mono"/>
-              </a:rPr>
-              <a:t>Rock solid performance for aggressive drilling conditions. A positive mud pulse system that sends surveys, directional telemetry, gamma ray and other sensor data to surface in real time.</a:t>
-            </a:r>
-          </a:p>
-        </p:txBody>
-      </p:sp>
-      <p:pic>
-        <p:nvPicPr>
-          <p:cNvPr id="24" name="Picture 23" descr="_c_boost_160_108.png"/>
-          <p:cNvPicPr>
-            <a:picLocks noChangeAspect="1"/>
-          </p:cNvPicPr>
-          <p:nvPr/>
-        </p:nvPicPr>
-        <p:blipFill>
-          <a:blip r:embed="rId5"/>
-          <a:stretch>
-            <a:fillRect/>
-          </a:stretch>
-        </p:blipFill>
-        <p:spPr>
-          <a:xfrm>
-            <a:off x="4953000" y="5791200"/>
-            <a:ext cx="2032000" cy="1371600"/>
-          </a:xfrm>
-          <a:prstGeom prst="rect">
-            <a:avLst/>
-          </a:prstGeom>
-        </p:spPr>
-      </p:pic>
-      <p:sp>
-        <p:nvSpPr>
-          <p:cNvPr id="25" name="TextBox 24"/>
-          <p:cNvSpPr txBox="1"/>
-          <p:nvPr/>
-        </p:nvSpPr>
-        <p:spPr>
-          <a:xfrm>
-            <a:off x="609600" y="6527800"/>
-            <a:ext cx="4254500" cy="127000"/>
-          </a:xfrm>
-          <a:prstGeom prst="rect">
-            <a:avLst/>
-          </a:prstGeom>
-          <a:noFill/>
-        </p:spPr>
-        <p:txBody>
-          <a:bodyPr wrap="square" lIns="0" rIns="0" tIns="0" bIns="0" anchor="t">
-            <a:spAutoFit/>
-          </a:bodyPr>
-          <a:lstStyle/>
-          <a:p>
-            <a:pPr algn="l">
-              <a:lnSpc>
-                <a:spcPts val="910"/>
-              </a:lnSpc>
-              <a:spcAft>
-                <a:spcPts val="160"/>
-              </a:spcAft>
-            </a:pPr>
-            <a:r>
-              <a:rPr sz="530" b="0" i="0">
-                <a:solidFill>
-                  <a:srgbClr val="1CB2FE"/>
-                </a:solidFill>
-                <a:latin typeface="Ubuntu Mono"/>
-                <a:ea typeface="Ubuntu Mono"/>
-                <a:cs typeface="Ubuntu Mono"/>
-                <a:sym typeface="Ubuntu Mono"/>
-              </a:rPr>
-              <a:t>■ </a:t>
-            </a:r>
-            <a:r>
-              <a:rPr sz="710" b="0" i="0">
-                <a:solidFill>
-                  <a:srgbClr val="0B1B2E"/>
-                </a:solidFill>
-                <a:latin typeface="Ubuntu Mono"/>
-                <a:ea typeface="Ubuntu Mono"/>
-                <a:cs typeface="Ubuntu Mono"/>
-                <a:sym typeface="Ubuntu Mono"/>
-              </a:rPr>
-              <a:t>Field-proven design, standard rating 185°C, 200°C version available</a:t>
-            </a:r>
-          </a:p>
-          <a:p>
-            <a:pPr algn="l">
-              <a:lnSpc>
-                <a:spcPts val="910"/>
-              </a:lnSpc>
-              <a:spcAft>
-                <a:spcPts val="160"/>
-              </a:spcAft>
-            </a:pPr>
-            <a:r>
-              <a:rPr sz="530" b="0" i="0">
-                <a:solidFill>
-                  <a:srgbClr val="1CB2FE"/>
-                </a:solidFill>
-                <a:latin typeface="Ubuntu Mono"/>
-                <a:ea typeface="Ubuntu Mono"/>
-                <a:cs typeface="Ubuntu Mono"/>
-                <a:sym typeface="Ubuntu Mono"/>
-              </a:rPr>
-              <a:t>■ </a:t>
-            </a:r>
-            <a:r>
-              <a:rPr sz="710" b="0" i="0">
-                <a:solidFill>
-                  <a:srgbClr val="0B1B2E"/>
-                </a:solidFill>
-                <a:latin typeface="Ubuntu Mono"/>
-                <a:ea typeface="Ubuntu Mono"/>
-                <a:cs typeface="Ubuntu Mono"/>
-                <a:sym typeface="Ubuntu Mono"/>
-              </a:rPr>
-              <a:t>Top and bottom mounted positive pulse systems</a:t>
-            </a:r>
-          </a:p>
-          <a:p>
-            <a:pPr algn="l">
-              <a:lnSpc>
-                <a:spcPts val="910"/>
-              </a:lnSpc>
-              <a:spcAft>
-                <a:spcPts val="160"/>
-              </a:spcAft>
-            </a:pPr>
-            <a:r>
-              <a:rPr sz="530" b="0" i="0">
-                <a:solidFill>
-                  <a:srgbClr val="1CB2FE"/>
-                </a:solidFill>
-                <a:latin typeface="Ubuntu Mono"/>
-                <a:ea typeface="Ubuntu Mono"/>
-                <a:cs typeface="Ubuntu Mono"/>
-                <a:sym typeface="Ubuntu Mono"/>
-              </a:rPr>
-              <a:t>■ </a:t>
-            </a:r>
-            <a:r>
-              <a:rPr sz="710" b="0" i="0">
-                <a:solidFill>
-                  <a:srgbClr val="0B1B2E"/>
-                </a:solidFill>
-                <a:latin typeface="Ubuntu Mono"/>
-                <a:ea typeface="Ubuntu Mono"/>
-                <a:cs typeface="Ubuntu Mono"/>
-                <a:sym typeface="Ubuntu Mono"/>
-              </a:rPr>
-              <a:t>Motor-driven pulser with anti-plugging technology: performs in LCM and high-solids mud</a:t>
-            </a:r>
-          </a:p>
-          <a:p>
-            <a:pPr algn="l">
-              <a:lnSpc>
-                <a:spcPts val="910"/>
-              </a:lnSpc>
-              <a:spcAft>
-                <a:spcPts val="160"/>
-              </a:spcAft>
-            </a:pPr>
-            <a:r>
-              <a:rPr sz="530" b="0" i="0">
-                <a:solidFill>
-                  <a:srgbClr val="1CB2FE"/>
-                </a:solidFill>
-                <a:latin typeface="Ubuntu Mono"/>
-                <a:ea typeface="Ubuntu Mono"/>
-                <a:cs typeface="Ubuntu Mono"/>
-                <a:sym typeface="Ubuntu Mono"/>
-              </a:rPr>
-              <a:t>■ </a:t>
-            </a:r>
-            <a:r>
-              <a:rPr sz="710" b="0" i="0">
-                <a:solidFill>
-                  <a:srgbClr val="0B1B2E"/>
-                </a:solidFill>
-                <a:latin typeface="Ubuntu Mono"/>
-                <a:ea typeface="Ubuntu Mono"/>
-                <a:cs typeface="Ubuntu Mono"/>
-                <a:sym typeface="Ubuntu Mono"/>
-              </a:rPr>
-              <a:t>Wide range of flow rates and rotary speeds, easy to assemble and service</a:t>
-            </a:r>
-          </a:p>
-          <a:p>
-            <a:pPr algn="l">
-              <a:lnSpc>
-                <a:spcPts val="910"/>
-              </a:lnSpc>
-              <a:spcAft>
-                <a:spcPts val="160"/>
-              </a:spcAft>
-            </a:pPr>
-            <a:r>
-              <a:rPr sz="530" b="0" i="0">
-                <a:solidFill>
-                  <a:srgbClr val="1CB2FE"/>
-                </a:solidFill>
-                <a:latin typeface="Ubuntu Mono"/>
-                <a:ea typeface="Ubuntu Mono"/>
-                <a:cs typeface="Ubuntu Mono"/>
-                <a:sym typeface="Ubuntu Mono"/>
-              </a:rPr>
-              <a:t>■ </a:t>
-            </a:r>
-            <a:r>
-              <a:rPr sz="710" b="0" i="0">
-                <a:solidFill>
-                  <a:srgbClr val="0B1B2E"/>
-                </a:solidFill>
-                <a:latin typeface="Ubuntu Mono"/>
-                <a:ea typeface="Ubuntu Mono"/>
-                <a:cs typeface="Ubuntu Mono"/>
-                <a:sym typeface="Ubuntu Mono"/>
-              </a:rPr>
-              <a:t>Down-linking for adjustable logging sequences (4 programmable)</a:t>
-            </a:r>
-          </a:p>
-        </p:txBody>
-      </p:sp>
-      <p:sp>
-        <p:nvSpPr>
-          <p:cNvPr id="26" name="Rectangle 25"/>
-          <p:cNvSpPr/>
-          <p:nvPr/>
-        </p:nvSpPr>
-        <p:spPr>
-          <a:xfrm>
-            <a:off x="609600" y="7620000"/>
-            <a:ext cx="1549400" cy="355600"/>
-          </a:xfrm>
-          <a:prstGeom prst="rect">
-            <a:avLst/>
-          </a:prstGeom>
-          <a:solidFill>
-            <a:srgbClr val="FFFFFF"/>
-          </a:solidFill>
-          <a:ln w="9525">
-            <a:solidFill>
-              <a:srgbClr val="C5D6E8"/>
-            </a:solidFill>
-          </a:ln>
-        </p:spPr>
-        <p:txBody>
-          <a:bodyPr rtlCol="0" anchor="ctr"/>
-          <a:lstStyle/>
-          <a:p>
-            <a:pPr algn="ctr"/>
-          </a:p>
-        </p:txBody>
-      </p:sp>
-      <p:sp>
-        <p:nvSpPr>
-          <p:cNvPr id="27" name="TextBox 26"/>
-          <p:cNvSpPr txBox="1"/>
-          <p:nvPr/>
-        </p:nvSpPr>
-        <p:spPr>
-          <a:xfrm>
-            <a:off x="685800" y="7670800"/>
-            <a:ext cx="1422400" cy="127000"/>
-          </a:xfrm>
-          <a:prstGeom prst="rect">
-            <a:avLst/>
-          </a:prstGeom>
-          <a:noFill/>
-        </p:spPr>
-        <p:txBody>
-          <a:bodyPr wrap="square" lIns="0" rIns="0" tIns="0" bIns="0" anchor="t">
-            <a:spAutoFit/>
-          </a:bodyPr>
-          <a:lstStyle/>
-          <a:p>
-            <a:pPr algn="l">
-              <a:lnSpc>
-                <a:spcPts val="940"/>
-              </a:lnSpc>
-              <a:spcAft>
-                <a:spcPts val="0"/>
-              </a:spcAft>
-            </a:pPr>
-            <a:r>
-              <a:rPr sz="580" b="0" i="0">
-                <a:solidFill>
-                  <a:srgbClr val="5A6B7F"/>
-                </a:solidFill>
-                <a:latin typeface="Ubuntu Mono"/>
-                <a:ea typeface="Ubuntu Mono"/>
-                <a:cs typeface="Ubuntu Mono"/>
-                <a:sym typeface="Ubuntu Mono"/>
-              </a:rPr>
-              <a:t>OUTSIDE DIAMETER</a:t>
-            </a:r>
-          </a:p>
-          <a:p>
-            <a:pPr algn="l">
-              <a:lnSpc>
-                <a:spcPts val="940"/>
-              </a:lnSpc>
-              <a:spcAft>
-                <a:spcPts val="0"/>
-              </a:spcAft>
-            </a:pPr>
-            <a:r>
-              <a:rPr sz="860" b="1" i="0">
-                <a:solidFill>
-                  <a:srgbClr val="194E9A"/>
-                </a:solidFill>
-                <a:latin typeface="Ubuntu Mono"/>
-                <a:ea typeface="Ubuntu Mono"/>
-                <a:cs typeface="Ubuntu Mono"/>
-                <a:sym typeface="Ubuntu Mono"/>
-              </a:rPr>
-              <a:t>47.6 mm (1.875")</a:t>
-            </a:r>
-          </a:p>
-        </p:txBody>
-      </p:sp>
-      <p:sp>
-        <p:nvSpPr>
-          <p:cNvPr id="28" name="Rectangle 27"/>
-          <p:cNvSpPr/>
-          <p:nvPr/>
-        </p:nvSpPr>
-        <p:spPr>
-          <a:xfrm>
-            <a:off x="2216150" y="7620000"/>
-            <a:ext cx="1549400" cy="355600"/>
-          </a:xfrm>
-          <a:prstGeom prst="rect">
-            <a:avLst/>
-          </a:prstGeom>
-          <a:solidFill>
-            <a:srgbClr val="FFFFFF"/>
-          </a:solidFill>
-          <a:ln w="9525">
-            <a:solidFill>
-              <a:srgbClr val="C5D6E8"/>
-            </a:solidFill>
-          </a:ln>
-        </p:spPr>
-        <p:txBody>
-          <a:bodyPr rtlCol="0" anchor="ctr"/>
-          <a:lstStyle/>
-          <a:p>
-            <a:pPr algn="ctr"/>
-          </a:p>
-        </p:txBody>
-      </p:sp>
-      <p:sp>
-        <p:nvSpPr>
-          <p:cNvPr id="29" name="TextBox 28"/>
-          <p:cNvSpPr txBox="1"/>
-          <p:nvPr/>
-        </p:nvSpPr>
-        <p:spPr>
-          <a:xfrm>
-            <a:off x="2292350" y="7670800"/>
-            <a:ext cx="1422400" cy="127000"/>
-          </a:xfrm>
-          <a:prstGeom prst="rect">
-            <a:avLst/>
-          </a:prstGeom>
-          <a:noFill/>
-        </p:spPr>
-        <p:txBody>
-          <a:bodyPr wrap="square" lIns="0" rIns="0" tIns="0" bIns="0" anchor="t">
-            <a:spAutoFit/>
-          </a:bodyPr>
-          <a:lstStyle/>
-          <a:p>
-            <a:pPr algn="l">
-              <a:lnSpc>
-                <a:spcPts val="940"/>
-              </a:lnSpc>
-              <a:spcAft>
-                <a:spcPts val="0"/>
-              </a:spcAft>
-            </a:pPr>
-            <a:r>
-              <a:rPr sz="580" b="0" i="0">
-                <a:solidFill>
-                  <a:srgbClr val="5A6B7F"/>
-                </a:solidFill>
-                <a:latin typeface="Ubuntu Mono"/>
-                <a:ea typeface="Ubuntu Mono"/>
-                <a:cs typeface="Ubuntu Mono"/>
-                <a:sym typeface="Ubuntu Mono"/>
-              </a:rPr>
-              <a:t>PRESSURE RATING</a:t>
-            </a:r>
-          </a:p>
-          <a:p>
-            <a:pPr algn="l">
-              <a:lnSpc>
-                <a:spcPts val="940"/>
-              </a:lnSpc>
-              <a:spcAft>
-                <a:spcPts val="0"/>
-              </a:spcAft>
-            </a:pPr>
-            <a:r>
-              <a:rPr sz="860" b="1" i="0">
-                <a:solidFill>
-                  <a:srgbClr val="194E9A"/>
-                </a:solidFill>
-                <a:latin typeface="Ubuntu Mono"/>
-                <a:ea typeface="Ubuntu Mono"/>
-                <a:cs typeface="Ubuntu Mono"/>
-                <a:sym typeface="Ubuntu Mono"/>
-              </a:rPr>
-              <a:t>20,000 psi</a:t>
-            </a:r>
-          </a:p>
-        </p:txBody>
-      </p:sp>
-      <p:sp>
-        <p:nvSpPr>
-          <p:cNvPr id="30" name="Rectangle 29"/>
-          <p:cNvSpPr/>
-          <p:nvPr/>
-        </p:nvSpPr>
-        <p:spPr>
-          <a:xfrm>
-            <a:off x="3822700" y="7620000"/>
-            <a:ext cx="1549400" cy="355600"/>
-          </a:xfrm>
-          <a:prstGeom prst="rect">
-            <a:avLst/>
-          </a:prstGeom>
-          <a:solidFill>
-            <a:srgbClr val="FFFFFF"/>
-          </a:solidFill>
-          <a:ln w="9525">
-            <a:solidFill>
-              <a:srgbClr val="C5D6E8"/>
-            </a:solidFill>
-          </a:ln>
-        </p:spPr>
-        <p:txBody>
-          <a:bodyPr rtlCol="0" anchor="ctr"/>
-          <a:lstStyle/>
-          <a:p>
-            <a:pPr algn="ctr"/>
-          </a:p>
-        </p:txBody>
-      </p:sp>
-      <p:sp>
-        <p:nvSpPr>
-          <p:cNvPr id="31" name="TextBox 30"/>
-          <p:cNvSpPr txBox="1"/>
-          <p:nvPr/>
-        </p:nvSpPr>
-        <p:spPr>
-          <a:xfrm>
-            <a:off x="3898900" y="7670800"/>
-            <a:ext cx="1422400" cy="127000"/>
-          </a:xfrm>
-          <a:prstGeom prst="rect">
-            <a:avLst/>
-          </a:prstGeom>
-          <a:noFill/>
-        </p:spPr>
-        <p:txBody>
-          <a:bodyPr wrap="square" lIns="0" rIns="0" tIns="0" bIns="0" anchor="t">
-            <a:spAutoFit/>
-          </a:bodyPr>
-          <a:lstStyle/>
-          <a:p>
-            <a:pPr algn="l">
-              <a:lnSpc>
-                <a:spcPts val="940"/>
-              </a:lnSpc>
-              <a:spcAft>
-                <a:spcPts val="0"/>
-              </a:spcAft>
-            </a:pPr>
-            <a:r>
-              <a:rPr sz="580" b="0" i="0">
-                <a:solidFill>
-                  <a:srgbClr val="5A6B7F"/>
-                </a:solidFill>
-                <a:latin typeface="Ubuntu Mono"/>
-                <a:ea typeface="Ubuntu Mono"/>
-                <a:cs typeface="Ubuntu Mono"/>
-                <a:sym typeface="Ubuntu Mono"/>
-              </a:rPr>
-              <a:t>TEMPERATURE</a:t>
-            </a:r>
-          </a:p>
-          <a:p>
-            <a:pPr algn="l">
-              <a:lnSpc>
-                <a:spcPts val="940"/>
-              </a:lnSpc>
-              <a:spcAft>
-                <a:spcPts val="0"/>
-              </a:spcAft>
-            </a:pPr>
-            <a:r>
-              <a:rPr sz="860" b="1" i="0">
-                <a:solidFill>
-                  <a:srgbClr val="194E9A"/>
-                </a:solidFill>
-                <a:latin typeface="Ubuntu Mono"/>
-                <a:ea typeface="Ubuntu Mono"/>
-                <a:cs typeface="Ubuntu Mono"/>
-                <a:sym typeface="Ubuntu Mono"/>
-              </a:rPr>
-              <a:t>-20 to 185°C</a:t>
-            </a:r>
-          </a:p>
-        </p:txBody>
-      </p:sp>
-      <p:sp>
-        <p:nvSpPr>
-          <p:cNvPr id="32" name="Rectangle 31"/>
-          <p:cNvSpPr/>
-          <p:nvPr/>
-        </p:nvSpPr>
-        <p:spPr>
-          <a:xfrm>
-            <a:off x="5429250" y="7620000"/>
-            <a:ext cx="1549400" cy="355600"/>
-          </a:xfrm>
-          <a:prstGeom prst="rect">
-            <a:avLst/>
-          </a:prstGeom>
-          <a:solidFill>
-            <a:srgbClr val="FFFFFF"/>
-          </a:solidFill>
-          <a:ln w="9525">
-            <a:solidFill>
-              <a:srgbClr val="C5D6E8"/>
-            </a:solidFill>
-          </a:ln>
-        </p:spPr>
-        <p:txBody>
-          <a:bodyPr rtlCol="0" anchor="ctr"/>
-          <a:lstStyle/>
-          <a:p>
-            <a:pPr algn="ctr"/>
-          </a:p>
-        </p:txBody>
-      </p:sp>
-      <p:sp>
-        <p:nvSpPr>
-          <p:cNvPr id="33" name="TextBox 32"/>
-          <p:cNvSpPr txBox="1"/>
-          <p:nvPr/>
-        </p:nvSpPr>
-        <p:spPr>
-          <a:xfrm>
-            <a:off x="5505450" y="7670800"/>
-            <a:ext cx="1422400" cy="127000"/>
-          </a:xfrm>
-          <a:prstGeom prst="rect">
-            <a:avLst/>
-          </a:prstGeom>
-          <a:noFill/>
-        </p:spPr>
-        <p:txBody>
-          <a:bodyPr wrap="square" lIns="0" rIns="0" tIns="0" bIns="0" anchor="t">
-            <a:spAutoFit/>
-          </a:bodyPr>
-          <a:lstStyle/>
-          <a:p>
-            <a:pPr algn="l">
-              <a:lnSpc>
-                <a:spcPts val="940"/>
-              </a:lnSpc>
-              <a:spcAft>
-                <a:spcPts val="0"/>
-              </a:spcAft>
-            </a:pPr>
-            <a:r>
-              <a:rPr sz="580" b="0" i="0">
-                <a:solidFill>
-                  <a:srgbClr val="5A6B7F"/>
-                </a:solidFill>
-                <a:latin typeface="Ubuntu Mono"/>
-                <a:ea typeface="Ubuntu Mono"/>
-                <a:cs typeface="Ubuntu Mono"/>
-                <a:sym typeface="Ubuntu Mono"/>
-              </a:rPr>
-              <a:t>COLLAR SIZES</a:t>
-            </a:r>
-          </a:p>
-          <a:p>
-            <a:pPr algn="l">
-              <a:lnSpc>
-                <a:spcPts val="940"/>
-              </a:lnSpc>
-              <a:spcAft>
-                <a:spcPts val="0"/>
-              </a:spcAft>
-            </a:pPr>
-            <a:r>
-              <a:rPr sz="860" b="1" i="0">
-                <a:solidFill>
-                  <a:srgbClr val="194E9A"/>
-                </a:solidFill>
-                <a:latin typeface="Ubuntu Mono"/>
-                <a:ea typeface="Ubuntu Mono"/>
-                <a:cs typeface="Ubuntu Mono"/>
-                <a:sym typeface="Ubuntu Mono"/>
-              </a:rPr>
-              <a:t>3.5" to 8"</a:t>
-            </a:r>
-          </a:p>
-        </p:txBody>
-      </p:sp>
-      <p:sp>
-        <p:nvSpPr>
-          <p:cNvPr id="34" name="Rectangle 33"/>
-          <p:cNvSpPr/>
-          <p:nvPr/>
-        </p:nvSpPr>
-        <p:spPr>
-          <a:xfrm>
-            <a:off x="609600" y="8026400"/>
-            <a:ext cx="1549400" cy="355600"/>
-          </a:xfrm>
-          <a:prstGeom prst="rect">
-            <a:avLst/>
-          </a:prstGeom>
-          <a:solidFill>
-            <a:srgbClr val="FFFFFF"/>
-          </a:solidFill>
-          <a:ln w="9525">
-            <a:solidFill>
-              <a:srgbClr val="C5D6E8"/>
-            </a:solidFill>
-          </a:ln>
-        </p:spPr>
-        <p:txBody>
-          <a:bodyPr rtlCol="0" anchor="ctr"/>
-          <a:lstStyle/>
-          <a:p>
-            <a:pPr algn="ctr"/>
-          </a:p>
-        </p:txBody>
-      </p:sp>
-      <p:sp>
-        <p:nvSpPr>
-          <p:cNvPr id="35" name="TextBox 34"/>
-          <p:cNvSpPr txBox="1"/>
-          <p:nvPr/>
-        </p:nvSpPr>
-        <p:spPr>
-          <a:xfrm>
-            <a:off x="685800" y="8077200"/>
-            <a:ext cx="1422400" cy="127000"/>
-          </a:xfrm>
-          <a:prstGeom prst="rect">
-            <a:avLst/>
-          </a:prstGeom>
-          <a:noFill/>
-        </p:spPr>
-        <p:txBody>
-          <a:bodyPr wrap="square" lIns="0" rIns="0" tIns="0" bIns="0" anchor="t">
-            <a:spAutoFit/>
-          </a:bodyPr>
-          <a:lstStyle/>
-          <a:p>
-            <a:pPr algn="l">
-              <a:lnSpc>
-                <a:spcPts val="940"/>
-              </a:lnSpc>
-              <a:spcAft>
-                <a:spcPts val="0"/>
-              </a:spcAft>
-            </a:pPr>
-            <a:r>
-              <a:rPr sz="580" b="0" i="0">
-                <a:solidFill>
-                  <a:srgbClr val="5A6B7F"/>
-                </a:solidFill>
-                <a:latin typeface="Ubuntu Mono"/>
-                <a:ea typeface="Ubuntu Mono"/>
-                <a:cs typeface="Ubuntu Mono"/>
-                <a:sym typeface="Ubuntu Mono"/>
-              </a:rPr>
-              <a:t>FLOW RATE</a:t>
-            </a:r>
-          </a:p>
-          <a:p>
-            <a:pPr algn="l">
-              <a:lnSpc>
-                <a:spcPts val="940"/>
-              </a:lnSpc>
-              <a:spcAft>
-                <a:spcPts val="0"/>
-              </a:spcAft>
-            </a:pPr>
-            <a:r>
-              <a:rPr sz="860" b="1" i="0">
-                <a:solidFill>
-                  <a:srgbClr val="194E9A"/>
-                </a:solidFill>
-                <a:latin typeface="Ubuntu Mono"/>
-                <a:ea typeface="Ubuntu Mono"/>
-                <a:cs typeface="Ubuntu Mono"/>
-                <a:sym typeface="Ubuntu Mono"/>
-              </a:rPr>
-              <a:t>75 - 1,200 gpm</a:t>
-            </a:r>
-          </a:p>
-        </p:txBody>
-      </p:sp>
-      <p:sp>
-        <p:nvSpPr>
-          <p:cNvPr id="36" name="Rectangle 35"/>
-          <p:cNvSpPr/>
-          <p:nvPr/>
-        </p:nvSpPr>
-        <p:spPr>
-          <a:xfrm>
-            <a:off x="2216150" y="8026400"/>
-            <a:ext cx="1549400" cy="355600"/>
-          </a:xfrm>
-          <a:prstGeom prst="rect">
-            <a:avLst/>
-          </a:prstGeom>
-          <a:solidFill>
-            <a:srgbClr val="FFFFFF"/>
-          </a:solidFill>
-          <a:ln w="9525">
-            <a:solidFill>
-              <a:srgbClr val="C5D6E8"/>
-            </a:solidFill>
-          </a:ln>
-        </p:spPr>
-        <p:txBody>
-          <a:bodyPr rtlCol="0" anchor="ctr"/>
-          <a:lstStyle/>
-          <a:p>
-            <a:pPr algn="ctr"/>
-          </a:p>
-        </p:txBody>
-      </p:sp>
-      <p:sp>
-        <p:nvSpPr>
-          <p:cNvPr id="37" name="TextBox 36"/>
-          <p:cNvSpPr txBox="1"/>
-          <p:nvPr/>
-        </p:nvSpPr>
-        <p:spPr>
-          <a:xfrm>
-            <a:off x="2292350" y="8077200"/>
-            <a:ext cx="1422400" cy="127000"/>
-          </a:xfrm>
-          <a:prstGeom prst="rect">
-            <a:avLst/>
-          </a:prstGeom>
-          <a:noFill/>
-        </p:spPr>
-        <p:txBody>
-          <a:bodyPr wrap="square" lIns="0" rIns="0" tIns="0" bIns="0" anchor="t">
-            <a:spAutoFit/>
-          </a:bodyPr>
-          <a:lstStyle/>
-          <a:p>
-            <a:pPr algn="l">
-              <a:lnSpc>
-                <a:spcPts val="940"/>
-              </a:lnSpc>
-              <a:spcAft>
-                <a:spcPts val="0"/>
-              </a:spcAft>
-            </a:pPr>
-            <a:r>
-              <a:rPr sz="580" b="0" i="0">
-                <a:solidFill>
-                  <a:srgbClr val="5A6B7F"/>
-                </a:solidFill>
-                <a:latin typeface="Ubuntu Mono"/>
-                <a:ea typeface="Ubuntu Mono"/>
-                <a:cs typeface="Ubuntu Mono"/>
-                <a:sym typeface="Ubuntu Mono"/>
-              </a:rPr>
-              <a:t>BATTERY LIFE</a:t>
-            </a:r>
-          </a:p>
-          <a:p>
-            <a:pPr algn="l">
-              <a:lnSpc>
-                <a:spcPts val="940"/>
-              </a:lnSpc>
-              <a:spcAft>
-                <a:spcPts val="0"/>
-              </a:spcAft>
-            </a:pPr>
-            <a:r>
-              <a:rPr sz="860" b="1" i="0">
-                <a:solidFill>
-                  <a:srgbClr val="194E9A"/>
-                </a:solidFill>
-                <a:latin typeface="Ubuntu Mono"/>
-                <a:ea typeface="Ubuntu Mono"/>
-                <a:cs typeface="Ubuntu Mono"/>
-                <a:sym typeface="Ubuntu Mono"/>
-              </a:rPr>
-              <a:t>400+ h (2 modules)</a:t>
-            </a:r>
-          </a:p>
-        </p:txBody>
-      </p:sp>
-      <p:sp>
-        <p:nvSpPr>
-          <p:cNvPr id="38" name="Rectangle 37"/>
-          <p:cNvSpPr/>
-          <p:nvPr/>
-        </p:nvSpPr>
-        <p:spPr>
-          <a:xfrm>
-            <a:off x="3822700" y="8026400"/>
-            <a:ext cx="1549400" cy="355600"/>
-          </a:xfrm>
-          <a:prstGeom prst="rect">
-            <a:avLst/>
-          </a:prstGeom>
-          <a:solidFill>
-            <a:srgbClr val="FFFFFF"/>
-          </a:solidFill>
-          <a:ln w="9525">
-            <a:solidFill>
-              <a:srgbClr val="C5D6E8"/>
-            </a:solidFill>
-          </a:ln>
-        </p:spPr>
-        <p:txBody>
-          <a:bodyPr rtlCol="0" anchor="ctr"/>
-          <a:lstStyle/>
-          <a:p>
-            <a:pPr algn="ctr"/>
-          </a:p>
-        </p:txBody>
-      </p:sp>
-      <p:sp>
-        <p:nvSpPr>
-          <p:cNvPr id="39" name="TextBox 38"/>
-          <p:cNvSpPr txBox="1"/>
-          <p:nvPr/>
-        </p:nvSpPr>
-        <p:spPr>
-          <a:xfrm>
-            <a:off x="3898900" y="8077200"/>
-            <a:ext cx="1422400" cy="127000"/>
-          </a:xfrm>
-          <a:prstGeom prst="rect">
-            <a:avLst/>
-          </a:prstGeom>
-          <a:noFill/>
-        </p:spPr>
-        <p:txBody>
-          <a:bodyPr wrap="square" lIns="0" rIns="0" tIns="0" bIns="0" anchor="t">
-            <a:spAutoFit/>
-          </a:bodyPr>
-          <a:lstStyle/>
-          <a:p>
-            <a:pPr algn="l">
-              <a:lnSpc>
-                <a:spcPts val="940"/>
-              </a:lnSpc>
-              <a:spcAft>
-                <a:spcPts val="0"/>
-              </a:spcAft>
-            </a:pPr>
-            <a:r>
-              <a:rPr sz="580" b="0" i="0">
-                <a:solidFill>
-                  <a:srgbClr val="5A6B7F"/>
-                </a:solidFill>
-                <a:latin typeface="Ubuntu Mono"/>
-                <a:ea typeface="Ubuntu Mono"/>
-                <a:cs typeface="Ubuntu Mono"/>
-                <a:sym typeface="Ubuntu Mono"/>
-              </a:rPr>
-              <a:t>SHOCK LIMIT</a:t>
-            </a:r>
-          </a:p>
-          <a:p>
-            <a:pPr algn="l">
-              <a:lnSpc>
-                <a:spcPts val="940"/>
-              </a:lnSpc>
-              <a:spcAft>
-                <a:spcPts val="0"/>
-              </a:spcAft>
-            </a:pPr>
-            <a:r>
-              <a:rPr sz="860" b="1" i="0">
-                <a:solidFill>
-                  <a:srgbClr val="194E9A"/>
-                </a:solidFill>
-                <a:latin typeface="Ubuntu Mono"/>
-                <a:ea typeface="Ubuntu Mono"/>
-                <a:cs typeface="Ubuntu Mono"/>
-                <a:sym typeface="Ubuntu Mono"/>
-              </a:rPr>
-              <a:t>500 g</a:t>
-            </a:r>
-          </a:p>
-        </p:txBody>
-      </p:sp>
-      <p:sp>
-        <p:nvSpPr>
-          <p:cNvPr id="40" name="Rectangle 39"/>
-          <p:cNvSpPr/>
-          <p:nvPr/>
-        </p:nvSpPr>
-        <p:spPr>
-          <a:xfrm>
-            <a:off x="5429250" y="8026400"/>
-            <a:ext cx="1549400" cy="355600"/>
-          </a:xfrm>
-          <a:prstGeom prst="rect">
-            <a:avLst/>
-          </a:prstGeom>
-          <a:solidFill>
-            <a:srgbClr val="FFFFFF"/>
-          </a:solidFill>
-          <a:ln w="9525">
-            <a:solidFill>
-              <a:srgbClr val="C5D6E8"/>
-            </a:solidFill>
-          </a:ln>
-        </p:spPr>
-        <p:txBody>
-          <a:bodyPr rtlCol="0" anchor="ctr"/>
-          <a:lstStyle/>
-          <a:p>
-            <a:pPr algn="ctr"/>
-          </a:p>
-        </p:txBody>
-      </p:sp>
-      <p:sp>
-        <p:nvSpPr>
-          <p:cNvPr id="41" name="TextBox 40"/>
-          <p:cNvSpPr txBox="1"/>
-          <p:nvPr/>
-        </p:nvSpPr>
-        <p:spPr>
-          <a:xfrm>
-            <a:off x="5505450" y="8077200"/>
-            <a:ext cx="1422400" cy="127000"/>
-          </a:xfrm>
-          <a:prstGeom prst="rect">
-            <a:avLst/>
-          </a:prstGeom>
-          <a:noFill/>
-        </p:spPr>
-        <p:txBody>
-          <a:bodyPr wrap="square" lIns="0" rIns="0" tIns="0" bIns="0" anchor="t">
-            <a:spAutoFit/>
-          </a:bodyPr>
-          <a:lstStyle/>
-          <a:p>
-            <a:pPr algn="l">
-              <a:lnSpc>
-                <a:spcPts val="940"/>
-              </a:lnSpc>
-              <a:spcAft>
-                <a:spcPts val="0"/>
-              </a:spcAft>
-            </a:pPr>
-            <a:r>
-              <a:rPr sz="580" b="0" i="0">
-                <a:solidFill>
-                  <a:srgbClr val="5A6B7F"/>
-                </a:solidFill>
-                <a:latin typeface="Ubuntu Mono"/>
-                <a:ea typeface="Ubuntu Mono"/>
-                <a:cs typeface="Ubuntu Mono"/>
-                <a:sym typeface="Ubuntu Mono"/>
-              </a:rPr>
-              <a:t>INTERNAL MEMORY</a:t>
-            </a:r>
-          </a:p>
-          <a:p>
-            <a:pPr algn="l">
-              <a:lnSpc>
-                <a:spcPts val="940"/>
-              </a:lnSpc>
-              <a:spcAft>
-                <a:spcPts val="0"/>
-              </a:spcAft>
-            </a:pPr>
-            <a:r>
-              <a:rPr sz="860" b="1" i="0">
-                <a:solidFill>
-                  <a:srgbClr val="194E9A"/>
-                </a:solidFill>
-                <a:latin typeface="Ubuntu Mono"/>
-                <a:ea typeface="Ubuntu Mono"/>
-                <a:cs typeface="Ubuntu Mono"/>
-                <a:sym typeface="Ubuntu Mono"/>
-              </a:rPr>
-              <a:t>24 MB</a:t>
-            </a:r>
-          </a:p>
-        </p:txBody>
-      </p:sp>
-      <p:sp>
-        <p:nvSpPr>
-          <p:cNvPr id="42" name="TextBox 41"/>
-          <p:cNvSpPr txBox="1"/>
-          <p:nvPr/>
-        </p:nvSpPr>
-        <p:spPr>
-          <a:xfrm>
-            <a:off x="609600" y="8483600"/>
-            <a:ext cx="6350000" cy="127000"/>
-          </a:xfrm>
-          <a:prstGeom prst="rect">
-            <a:avLst/>
-          </a:prstGeom>
-          <a:noFill/>
-        </p:spPr>
-        <p:txBody>
-          <a:bodyPr wrap="square" lIns="0" rIns="0" tIns="0" bIns="0" anchor="t">
-            <a:spAutoFit/>
-          </a:bodyPr>
-          <a:lstStyle/>
-          <a:p>
-            <a:pPr algn="l">
-              <a:lnSpc>
-                <a:spcPts val="860"/>
-              </a:lnSpc>
-              <a:spcAft>
-                <a:spcPts val="0"/>
-              </a:spcAft>
-            </a:pPr>
-            <a:r>
-              <a:rPr sz="680" b="1" i="0">
-                <a:solidFill>
-                  <a:srgbClr val="194E9A"/>
-                </a:solidFill>
-                <a:latin typeface="Ubuntu Mono"/>
-                <a:ea typeface="Ubuntu Mono"/>
-                <a:cs typeface="Ubuntu Mono"/>
-                <a:sym typeface="Ubuntu Mono"/>
-              </a:rPr>
-              <a:t>Telemetry: </a:t>
-            </a:r>
-            <a:r>
-              <a:rPr sz="680" b="0" i="0">
-                <a:solidFill>
-                  <a:srgbClr val="0B1B2E"/>
-                </a:solidFill>
-                <a:latin typeface="Ubuntu Mono"/>
-                <a:ea typeface="Ubuntu Mono"/>
-                <a:cs typeface="Ubuntu Mono"/>
-                <a:sym typeface="Ubuntu Mono"/>
-              </a:rPr>
-              <a:t>inclination, azimuth, toolface, continuous inclination and azimuth, gamma ray, shock, vibration, RPM, stick-slip, temperature, annular pressure, battery status. Inclination ±0.10°, azimuth ±0.50°, toolface ±0.20°.</a:t>
-            </a:r>
-          </a:p>
-        </p:txBody>
-      </p:sp>
-      <p:sp>
-        <p:nvSpPr>
-          <p:cNvPr id="43" name="TextBox 42"/>
-          <p:cNvSpPr txBox="1"/>
-          <p:nvPr/>
-        </p:nvSpPr>
-        <p:spPr>
-          <a:xfrm>
-            <a:off x="457200" y="9093200"/>
-            <a:ext cx="3810000" cy="127000"/>
-          </a:xfrm>
-          <a:prstGeom prst="rect">
-            <a:avLst/>
-          </a:prstGeom>
-          <a:noFill/>
-        </p:spPr>
-        <p:txBody>
-          <a:bodyPr wrap="square" lIns="0" rIns="0" tIns="0" bIns="0" anchor="t">
-            <a:spAutoFit/>
-          </a:bodyPr>
-          <a:lstStyle/>
-          <a:p>
-            <a:pPr algn="l">
-              <a:spcAft>
-                <a:spcPts val="0"/>
-              </a:spcAft>
-            </a:pPr>
-            <a:r>
-              <a:rPr sz="860" b="1" i="0">
-                <a:solidFill>
-                  <a:srgbClr val="194E9A"/>
-                </a:solidFill>
-                <a:latin typeface="Ubuntu Mono"/>
-                <a:ea typeface="Ubuntu Mono"/>
-                <a:cs typeface="Ubuntu Mono"/>
-                <a:sym typeface="Ubuntu Mono"/>
-              </a:rPr>
-              <a:t>ALSO AVAILABLE</a:t>
-            </a:r>
-          </a:p>
-        </p:txBody>
-      </p:sp>
-      <p:sp>
-        <p:nvSpPr>
-          <p:cNvPr id="44" name="Rectangle 43"/>
-          <p:cNvSpPr/>
-          <p:nvPr/>
-        </p:nvSpPr>
-        <p:spPr>
-          <a:xfrm>
-            <a:off x="457200" y="9296400"/>
-            <a:ext cx="2273300" cy="215900"/>
-          </a:xfrm>
-          <a:prstGeom prst="rect">
-            <a:avLst/>
-          </a:prstGeom>
-          <a:solidFill>
-            <a:srgbClr val="FFFFFF"/>
-          </a:solidFill>
-          <a:ln w="9525">
-            <a:solidFill>
-              <a:srgbClr val="0F7FCB"/>
-            </a:solidFill>
-          </a:ln>
-        </p:spPr>
-        <p:txBody>
-          <a:bodyPr rtlCol="0" anchor="ctr"/>
-          <a:lstStyle/>
-          <a:p>
-            <a:pPr algn="ctr"/>
-          </a:p>
-        </p:txBody>
-      </p:sp>
-      <p:sp>
-        <p:nvSpPr>
-          <p:cNvPr id="45" name="TextBox 44"/>
-          <p:cNvSpPr txBox="1"/>
-          <p:nvPr/>
-        </p:nvSpPr>
-        <p:spPr>
-          <a:xfrm>
-            <a:off x="457200" y="9349740"/>
-            <a:ext cx="2273300" cy="127000"/>
-          </a:xfrm>
-          <a:prstGeom prst="rect">
-            <a:avLst/>
-          </a:prstGeom>
-          <a:noFill/>
-        </p:spPr>
-        <p:txBody>
-          <a:bodyPr wrap="square" lIns="0" rIns="0" tIns="0" bIns="0" anchor="t">
-            <a:spAutoFit/>
-          </a:bodyPr>
-          <a:lstStyle/>
-          <a:p>
-            <a:pPr algn="ctr">
-              <a:spcAft>
-                <a:spcPts val="0"/>
-              </a:spcAft>
-            </a:pPr>
-            <a:r>
-              <a:rPr sz="660" b="0" i="0">
-                <a:solidFill>
-                  <a:srgbClr val="194E9A"/>
-                </a:solidFill>
-                <a:latin typeface="Ubuntu Mono"/>
-                <a:ea typeface="Ubuntu Mono"/>
-                <a:cs typeface="Ubuntu Mono"/>
-                <a:sym typeface="Ubuntu Mono"/>
-              </a:rPr>
-              <a:t>Survey equipment (LWD, gyro, dual telemetry)</a:t>
-            </a:r>
-          </a:p>
-        </p:txBody>
-      </p:sp>
-      <p:sp>
-        <p:nvSpPr>
-          <p:cNvPr id="46" name="Rectangle 45"/>
-          <p:cNvSpPr/>
-          <p:nvPr/>
-        </p:nvSpPr>
-        <p:spPr>
-          <a:xfrm>
-            <a:off x="2806700" y="9296400"/>
-            <a:ext cx="796925" cy="215900"/>
-          </a:xfrm>
-          <a:prstGeom prst="rect">
-            <a:avLst/>
-          </a:prstGeom>
-          <a:solidFill>
-            <a:srgbClr val="FFFFFF"/>
-          </a:solidFill>
-          <a:ln w="9525">
-            <a:solidFill>
-              <a:srgbClr val="0F7FCB"/>
-            </a:solidFill>
-          </a:ln>
-        </p:spPr>
-        <p:txBody>
-          <a:bodyPr rtlCol="0" anchor="ctr"/>
-          <a:lstStyle/>
-          <a:p>
-            <a:pPr algn="ctr"/>
-          </a:p>
-        </p:txBody>
-      </p:sp>
-      <p:sp>
-        <p:nvSpPr>
-          <p:cNvPr id="47" name="TextBox 46"/>
-          <p:cNvSpPr txBox="1"/>
-          <p:nvPr/>
-        </p:nvSpPr>
-        <p:spPr>
-          <a:xfrm>
-            <a:off x="2806700" y="9349740"/>
-            <a:ext cx="796925" cy="127000"/>
-          </a:xfrm>
-          <a:prstGeom prst="rect">
-            <a:avLst/>
-          </a:prstGeom>
-          <a:noFill/>
-        </p:spPr>
-        <p:txBody>
-          <a:bodyPr wrap="square" lIns="0" rIns="0" tIns="0" bIns="0" anchor="t">
-            <a:spAutoFit/>
-          </a:bodyPr>
-          <a:lstStyle/>
-          <a:p>
-            <a:pPr algn="ctr">
-              <a:spcAft>
-                <a:spcPts val="0"/>
-              </a:spcAft>
-            </a:pPr>
-            <a:r>
-              <a:rPr sz="660" b="0" i="0">
-                <a:solidFill>
-                  <a:srgbClr val="194E9A"/>
-                </a:solidFill>
-                <a:latin typeface="Ubuntu Mono"/>
-                <a:ea typeface="Ubuntu Mono"/>
-                <a:cs typeface="Ubuntu Mono"/>
-                <a:sym typeface="Ubuntu Mono"/>
-              </a:rPr>
-              <a:t>Turbodrilling</a:t>
-            </a:r>
-          </a:p>
-        </p:txBody>
-      </p:sp>
-      <p:sp>
-        <p:nvSpPr>
-          <p:cNvPr id="48" name="Rectangle 47"/>
-          <p:cNvSpPr/>
-          <p:nvPr/>
-        </p:nvSpPr>
-        <p:spPr>
-          <a:xfrm>
-            <a:off x="3679825" y="9296400"/>
-            <a:ext cx="796925" cy="215900"/>
-          </a:xfrm>
-          <a:prstGeom prst="rect">
-            <a:avLst/>
-          </a:prstGeom>
-          <a:solidFill>
-            <a:srgbClr val="FFFFFF"/>
-          </a:solidFill>
-          <a:ln w="9525">
-            <a:solidFill>
-              <a:srgbClr val="0F7FCB"/>
-            </a:solidFill>
-          </a:ln>
-        </p:spPr>
-        <p:txBody>
-          <a:bodyPr rtlCol="0" anchor="ctr"/>
-          <a:lstStyle/>
-          <a:p>
-            <a:pPr algn="ctr"/>
-          </a:p>
-        </p:txBody>
-      </p:sp>
-      <p:sp>
-        <p:nvSpPr>
-          <p:cNvPr id="49" name="TextBox 48"/>
-          <p:cNvSpPr txBox="1"/>
-          <p:nvPr/>
-        </p:nvSpPr>
-        <p:spPr>
-          <a:xfrm>
-            <a:off x="3679825" y="9349740"/>
-            <a:ext cx="796925" cy="127000"/>
-          </a:xfrm>
-          <a:prstGeom prst="rect">
-            <a:avLst/>
-          </a:prstGeom>
-          <a:noFill/>
-        </p:spPr>
-        <p:txBody>
-          <a:bodyPr wrap="square" lIns="0" rIns="0" tIns="0" bIns="0" anchor="t">
-            <a:spAutoFit/>
-          </a:bodyPr>
-          <a:lstStyle/>
-          <a:p>
-            <a:pPr algn="ctr">
-              <a:spcAft>
-                <a:spcPts val="0"/>
-              </a:spcAft>
-            </a:pPr>
-            <a:r>
-              <a:rPr sz="660" b="0" i="0">
-                <a:solidFill>
-                  <a:srgbClr val="194E9A"/>
-                </a:solidFill>
-                <a:latin typeface="Ubuntu Mono"/>
-                <a:ea typeface="Ubuntu Mono"/>
-                <a:cs typeface="Ubuntu Mono"/>
-                <a:sym typeface="Ubuntu Mono"/>
-              </a:rPr>
-              <a:t>Jar placement</a:t>
-            </a:r>
-          </a:p>
-        </p:txBody>
-      </p:sp>
-      <p:sp>
-        <p:nvSpPr>
-          <p:cNvPr id="50" name="Rectangle 49"/>
-          <p:cNvSpPr/>
-          <p:nvPr/>
-        </p:nvSpPr>
-        <p:spPr>
-          <a:xfrm>
-            <a:off x="4552950" y="9296400"/>
-            <a:ext cx="1225550" cy="215900"/>
-          </a:xfrm>
-          <a:prstGeom prst="rect">
-            <a:avLst/>
-          </a:prstGeom>
-          <a:solidFill>
-            <a:srgbClr val="FFFFFF"/>
-          </a:solidFill>
-          <a:ln w="9525">
-            <a:solidFill>
-              <a:srgbClr val="0F7FCB"/>
-            </a:solidFill>
-          </a:ln>
-        </p:spPr>
-        <p:txBody>
-          <a:bodyPr rtlCol="0" anchor="ctr"/>
-          <a:lstStyle/>
-          <a:p>
-            <a:pPr algn="ctr"/>
-          </a:p>
-        </p:txBody>
-      </p:sp>
-      <p:sp>
-        <p:nvSpPr>
-          <p:cNvPr id="51" name="TextBox 50"/>
-          <p:cNvSpPr txBox="1"/>
-          <p:nvPr/>
-        </p:nvSpPr>
-        <p:spPr>
-          <a:xfrm>
-            <a:off x="4552950" y="9349740"/>
-            <a:ext cx="1225550" cy="127000"/>
-          </a:xfrm>
-          <a:prstGeom prst="rect">
-            <a:avLst/>
-          </a:prstGeom>
-          <a:noFill/>
-        </p:spPr>
-        <p:txBody>
-          <a:bodyPr wrap="square" lIns="0" rIns="0" tIns="0" bIns="0" anchor="t">
-            <a:spAutoFit/>
-          </a:bodyPr>
-          <a:lstStyle/>
-          <a:p>
-            <a:pPr algn="ctr">
-              <a:spcAft>
-                <a:spcPts val="0"/>
-              </a:spcAft>
-            </a:pPr>
-            <a:r>
-              <a:rPr sz="660" b="0" i="0">
-                <a:solidFill>
-                  <a:srgbClr val="194E9A"/>
-                </a:solidFill>
-                <a:latin typeface="Ubuntu Mono"/>
-                <a:ea typeface="Ubuntu Mono"/>
-                <a:cs typeface="Ubuntu Mono"/>
-                <a:sym typeface="Ubuntu Mono"/>
-              </a:rPr>
-              <a:t>Non-magnetic equipment</a:t>
-            </a:r>
-          </a:p>
-        </p:txBody>
-      </p:sp>
-      <p:sp>
-        <p:nvSpPr>
-          <p:cNvPr id="52" name="Rectangle 51"/>
-          <p:cNvSpPr/>
-          <p:nvPr/>
-        </p:nvSpPr>
-        <p:spPr>
-          <a:xfrm>
-            <a:off x="5854700" y="9296400"/>
-            <a:ext cx="1177925" cy="215900"/>
-          </a:xfrm>
-          <a:prstGeom prst="rect">
-            <a:avLst/>
-          </a:prstGeom>
-          <a:solidFill>
-            <a:srgbClr val="FFFFFF"/>
-          </a:solidFill>
-          <a:ln w="9525">
-            <a:solidFill>
-              <a:srgbClr val="0F7FCB"/>
-            </a:solidFill>
-          </a:ln>
-        </p:spPr>
-        <p:txBody>
-          <a:bodyPr rtlCol="0" anchor="ctr"/>
-          <a:lstStyle/>
-          <a:p>
-            <a:pPr algn="ctr"/>
-          </a:p>
-        </p:txBody>
-      </p:sp>
-      <p:sp>
-        <p:nvSpPr>
-          <p:cNvPr id="53" name="TextBox 52"/>
-          <p:cNvSpPr txBox="1"/>
-          <p:nvPr/>
-        </p:nvSpPr>
-        <p:spPr>
-          <a:xfrm>
-            <a:off x="5854700" y="9349740"/>
-            <a:ext cx="1177925" cy="127000"/>
-          </a:xfrm>
-          <a:prstGeom prst="rect">
-            <a:avLst/>
-          </a:prstGeom>
-          <a:noFill/>
-        </p:spPr>
-        <p:txBody>
-          <a:bodyPr wrap="square" lIns="0" rIns="0" tIns="0" bIns="0" anchor="t">
-            <a:spAutoFit/>
-          </a:bodyPr>
-          <a:lstStyle/>
-          <a:p>
-            <a:pPr algn="ctr">
-              <a:spcAft>
-                <a:spcPts val="0"/>
-              </a:spcAft>
-            </a:pPr>
-            <a:r>
-              <a:rPr sz="660" b="0" i="0">
-                <a:solidFill>
-                  <a:srgbClr val="194E9A"/>
-                </a:solidFill>
-                <a:latin typeface="Ubuntu Mono"/>
-                <a:ea typeface="Ubuntu Mono"/>
-                <a:cs typeface="Ubuntu Mono"/>
-                <a:sym typeface="Ubuntu Mono"/>
-              </a:rPr>
-              <a:t>Slimhole tools 3-1/2"</a:t>
-            </a:r>
-          </a:p>
-        </p:txBody>
-      </p:sp>
-      <p:sp>
-        <p:nvSpPr>
-          <p:cNvPr id="54" name="Rectangle 53"/>
-          <p:cNvSpPr/>
-          <p:nvPr/>
-        </p:nvSpPr>
-        <p:spPr>
-          <a:xfrm>
-            <a:off x="457200" y="9563100"/>
-            <a:ext cx="1320800" cy="215900"/>
-          </a:xfrm>
-          <a:prstGeom prst="rect">
-            <a:avLst/>
-          </a:prstGeom>
-          <a:solidFill>
-            <a:srgbClr val="FFFFFF"/>
-          </a:solidFill>
-          <a:ln w="9525">
-            <a:solidFill>
-              <a:srgbClr val="0F7FCB"/>
-            </a:solidFill>
-          </a:ln>
-        </p:spPr>
-        <p:txBody>
-          <a:bodyPr rtlCol="0" anchor="ctr"/>
-          <a:lstStyle/>
-          <a:p>
-            <a:pPr algn="ctr"/>
-          </a:p>
-        </p:txBody>
-      </p:sp>
-      <p:sp>
-        <p:nvSpPr>
-          <p:cNvPr id="55" name="TextBox 54"/>
-          <p:cNvSpPr txBox="1"/>
-          <p:nvPr/>
-        </p:nvSpPr>
-        <p:spPr>
-          <a:xfrm>
-            <a:off x="457200" y="9616440"/>
-            <a:ext cx="1320800" cy="127000"/>
-          </a:xfrm>
-          <a:prstGeom prst="rect">
-            <a:avLst/>
-          </a:prstGeom>
-          <a:noFill/>
-        </p:spPr>
-        <p:txBody>
-          <a:bodyPr wrap="square" lIns="0" rIns="0" tIns="0" bIns="0" anchor="t">
-            <a:spAutoFit/>
-          </a:bodyPr>
-          <a:lstStyle/>
-          <a:p>
-            <a:pPr algn="ctr">
-              <a:spcAft>
-                <a:spcPts val="0"/>
-              </a:spcAft>
-            </a:pPr>
-            <a:r>
-              <a:rPr sz="660" b="0" i="0">
-                <a:solidFill>
-                  <a:srgbClr val="194E9A"/>
-                </a:solidFill>
-                <a:latin typeface="Ubuntu Mono"/>
-                <a:ea typeface="Ubuntu Mono"/>
-                <a:cs typeface="Ubuntu Mono"/>
-                <a:sym typeface="Ubuntu Mono"/>
-              </a:rPr>
-              <a:t>High-temperature systems</a:t>
-            </a:r>
-          </a:p>
-        </p:txBody>
-      </p:sp>
-      <p:sp>
-        <p:nvSpPr>
-          <p:cNvPr id="56" name="Rectangle 55"/>
-          <p:cNvSpPr/>
-          <p:nvPr/>
-        </p:nvSpPr>
-        <p:spPr>
-          <a:xfrm>
-            <a:off x="457200" y="9956800"/>
-            <a:ext cx="6642100" cy="330200"/>
-          </a:xfrm>
-          <a:prstGeom prst="rect">
-            <a:avLst/>
-          </a:prstGeom>
-          <a:solidFill>
-            <a:srgbClr val="194E9A"/>
-          </a:solidFill>
-          <a:ln>
-            <a:noFill/>
-          </a:ln>
-        </p:spPr>
-        <p:txBody>
-          <a:bodyPr rtlCol="0" anchor="ctr"/>
-          <a:lstStyle/>
-          <a:p>
-            <a:pPr algn="ctr"/>
-          </a:p>
-        </p:txBody>
-      </p:sp>
-      <p:sp>
-        <p:nvSpPr>
-          <p:cNvPr id="57" name="TextBox 56"/>
-          <p:cNvSpPr txBox="1"/>
-          <p:nvPr/>
-        </p:nvSpPr>
-        <p:spPr>
-          <a:xfrm>
-            <a:off x="457200" y="9956800"/>
-            <a:ext cx="6642100" cy="330200"/>
+            <a:off x="635000" y="9093200"/>
+            <a:ext cx="6286500" cy="1143000"/>
           </a:xfrm>
           <a:prstGeom prst="rect">
             <a:avLst/>
@@ -7963,13 +6687,16 @@
           </a:bodyPr>
           <a:lstStyle/>
           <a:p>
-            <a:pPr algn="ctr">
+            <a:pPr algn="l">
+              <a:lnSpc>
+                <a:spcPts val="1400"/>
+              </a:lnSpc>
               <a:spcAft>
                 <a:spcPts val="0"/>
               </a:spcAft>
             </a:pPr>
             <a:r>
-              <a:rPr sz="800" b="1" i="0">
+              <a:rPr sz="840" b="1" i="0">
                 <a:solidFill>
                   <a:srgbClr val="FFFFFF"/>
                 </a:solidFill>
@@ -7978,14 +6705,26 @@
                 <a:cs typeface="Ubuntu Mono"/>
                 <a:sym typeface="Ubuntu Mono"/>
               </a:rPr>
-              <a:t>98,500 m drilled · 75 wells · up to 3,000 m TVD · geothermal, oil &amp; gas, underground gas storage</a:t>
-            </a:r>
-          </a:p>
-        </p:txBody>
-      </p:sp>
-      <p:sp>
-        <p:nvSpPr>
-          <p:cNvPr id="58" name="Rectangle 57"/>
+              <a:t>A NEW DYNAMIC  </a:t>
+            </a:r>
+            <a:r>
+              <a:rPr sz="1050" b="1" i="0">
+                <a:solidFill>
+                  <a:srgbClr val="FFFFFF"/>
+                </a:solidFill>
+                <a:latin typeface="Ubuntu Mono"/>
+                <a:ea typeface="Ubuntu Mono"/>
+                <a:cs typeface="Ubuntu Mono"/>
+                <a:sym typeface="Ubuntu Mono"/>
+              </a:rPr>
+              <a:t>Fabien and Alexis want to give the company a new momentum, with, among other steps, the 2025 rebranding that gave birth to Enedril.</a:t>
+            </a:r>
+          </a:p>
+        </p:txBody>
+      </p:sp>
+      <p:sp>
+        <p:nvSpPr>
+          <p:cNvPr id="31" name="Rectangle 30"/>
           <p:cNvSpPr/>
           <p:nvPr/>
         </p:nvSpPr>
@@ -8014,7 +6753,7 @@
       </p:sp>
       <p:sp>
         <p:nvSpPr>
-          <p:cNvPr id="59" name="TextBox 58"/>
+          <p:cNvPr id="32" name="TextBox 31"/>
           <p:cNvSpPr txBox="1"/>
           <p:nvPr/>
         </p:nvSpPr>
@@ -8056,7 +6795,7 @@
       </p:sp>
       <p:sp>
         <p:nvSpPr>
-          <p:cNvPr id="60" name="TextBox 59"/>
+          <p:cNvPr id="33" name="TextBox 32"/>
           <p:cNvSpPr txBox="1"/>
           <p:nvPr/>
         </p:nvSpPr>
@@ -8162,14 +6901,14 @@
           <a:p>
             <a:pPr algn="l">
               <a:lnSpc>
-                <a:spcPts val="2700"/>
+                <a:spcPts val="3000"/>
               </a:lnSpc>
               <a:spcAft>
                 <a:spcPts val="0"/>
               </a:spcAft>
             </a:pPr>
             <a:r>
-              <a:rPr sz="2400" b="1" i="0">
+              <a:rPr sz="2700" b="1" i="0">
                 <a:solidFill>
                   <a:srgbClr val="1CB2FE"/>
                 </a:solidFill>
@@ -8178,8 +6917,8 @@
                 <a:cs typeface="Ubuntu Mono"/>
                 <a:sym typeface="Ubuntu Mono"/>
               </a:rPr>
-              <a:t>FISHING, WORKOVER
-&amp; PLUG AND ABANDONMENT</a:t>
+              <a:t>DIRECTIONAL DRILLING
+&amp; MWD</a:t>
             </a:r>
           </a:p>
         </p:txBody>
@@ -8192,7 +6931,7 @@
         </p:nvSpPr>
         <p:spPr>
           <a:xfrm>
-            <a:off x="457200" y="1447800"/>
+            <a:off x="457200" y="1498600"/>
             <a:ext cx="44450" cy="711200"/>
           </a:xfrm>
           <a:prstGeom prst="rect">
@@ -8221,7 +6960,7 @@
         </p:nvSpPr>
         <p:spPr>
           <a:xfrm>
-            <a:off x="584200" y="1447800"/>
+            <a:off x="584200" y="1498600"/>
             <a:ext cx="6515100" cy="127000"/>
           </a:xfrm>
           <a:prstGeom prst="rect">
@@ -8253,7 +6992,7 @@
                 <a:cs typeface="Ubuntu Mono"/>
                 <a:sym typeface="Ubuntu Mono"/>
               </a:rPr>
-              <a:t>Fishing, workover and plug &amp; abandonment (P&amp;A): the full range of operations to recover, restore and secure wells, during drilling, workover or abandonment. Our fishing team responds quickly with a large rental and sale fleet, backed by our own workshop and custom tool design.</a:t>
+              <a:t>Enedril provides advanced directional drilling solutions for complex wells with high precision requirements: downhole motors (PDM), rotary steerable systems (RSS) and high-temperature MWD tools. Experienced Directional Drillers and MWD Engineers steer and optimise the trajectory continuously, with well planning done in-house.</a:t>
             </a:r>
           </a:p>
         </p:txBody>
@@ -8266,8 +7005,8 @@
         </p:nvSpPr>
         <p:spPr>
           <a:xfrm>
-            <a:off x="457200" y="2311400"/>
-            <a:ext cx="1587500" cy="660400"/>
+            <a:off x="457200" y="2387600"/>
+            <a:ext cx="2133600" cy="685800"/>
           </a:xfrm>
           <a:prstGeom prst="rect">
             <a:avLst/>
@@ -8295,8 +7034,8 @@
         </p:nvSpPr>
         <p:spPr>
           <a:xfrm>
-            <a:off x="457200" y="2417064"/>
-            <a:ext cx="1587500" cy="127000"/>
+            <a:off x="457200" y="2497328"/>
+            <a:ext cx="2133600" cy="127000"/>
           </a:xfrm>
           <a:prstGeom prst="rect">
             <a:avLst/>
@@ -8311,14 +7050,14 @@
           <a:p>
             <a:pPr algn="ctr">
               <a:lnSpc>
-                <a:spcPts val="2500"/>
+                <a:spcPts val="1800"/>
               </a:lnSpc>
               <a:spcAft>
                 <a:spcPts val="0"/>
               </a:spcAft>
             </a:pPr>
             <a:r>
-              <a:rPr sz="2200" b="1" i="0">
+              <a:rPr sz="1500" b="1" i="0">
                 <a:solidFill>
                   <a:srgbClr val="FFFFFF"/>
                 </a:solidFill>
@@ -8327,7 +7066,7 @@
                 <a:cs typeface="Ubuntu Mono"/>
                 <a:sym typeface="Ubuntu Mono"/>
               </a:rPr>
-              <a:t>2,500</a:t>
+              <a:t>3-1/8" to 9-5/8"</a:t>
             </a:r>
           </a:p>
         </p:txBody>
@@ -8340,8 +7079,8 @@
         </p:nvSpPr>
         <p:spPr>
           <a:xfrm>
-            <a:off x="533400" y="2759964"/>
-            <a:ext cx="1435100" cy="127000"/>
+            <a:off x="533400" y="2751328"/>
+            <a:ext cx="1981200" cy="127000"/>
           </a:xfrm>
           <a:prstGeom prst="rect">
             <a:avLst/>
@@ -8372,7 +7111,7 @@
                 <a:cs typeface="Ubuntu Mono"/>
                 <a:sym typeface="Ubuntu Mono"/>
               </a:rPr>
-              <a:t>tools available</a:t>
+              <a:t>PDM motors, high-temperature power sections</a:t>
             </a:r>
           </a:p>
         </p:txBody>
@@ -8385,8 +7124,8 @@
         </p:nvSpPr>
         <p:spPr>
           <a:xfrm>
-            <a:off x="2120900" y="2311400"/>
-            <a:ext cx="1587500" cy="660400"/>
+            <a:off x="2705100" y="2387600"/>
+            <a:ext cx="2133600" cy="685800"/>
           </a:xfrm>
           <a:prstGeom prst="rect">
             <a:avLst/>
@@ -8414,8 +7153,8 @@
         </p:nvSpPr>
         <p:spPr>
           <a:xfrm>
-            <a:off x="2120900" y="2417064"/>
-            <a:ext cx="1587500" cy="127000"/>
+            <a:off x="2705100" y="2497328"/>
+            <a:ext cx="2133600" cy="127000"/>
           </a:xfrm>
           <a:prstGeom prst="rect">
             <a:avLst/>
@@ -8430,14 +7169,14 @@
           <a:p>
             <a:pPr algn="ctr">
               <a:lnSpc>
-                <a:spcPts val="2300"/>
+                <a:spcPts val="2500"/>
               </a:lnSpc>
               <a:spcAft>
                 <a:spcPts val="0"/>
               </a:spcAft>
             </a:pPr>
             <a:r>
-              <a:rPr sz="2000" b="1" i="0">
+              <a:rPr sz="2200" b="1" i="0">
                 <a:solidFill>
                   <a:srgbClr val="FFFFFF"/>
                 </a:solidFill>
@@ -8446,7 +7185,7 @@
                 <a:cs typeface="Ubuntu Mono"/>
                 <a:sym typeface="Ubuntu Mono"/>
               </a:rPr>
-              <a:t>24 / 48h</a:t>
+              <a:t>RSS</a:t>
             </a:r>
           </a:p>
         </p:txBody>
@@ -8459,8 +7198,8 @@
         </p:nvSpPr>
         <p:spPr>
           <a:xfrm>
-            <a:off x="2197100" y="2734564"/>
-            <a:ext cx="1435100" cy="127000"/>
+            <a:off x="2781300" y="2840228"/>
+            <a:ext cx="1981200" cy="127000"/>
           </a:xfrm>
           <a:prstGeom prst="rect">
             <a:avLst/>
@@ -8491,7 +7230,7 @@
                 <a:cs typeface="Ubuntu Mono"/>
                 <a:sym typeface="Ubuntu Mono"/>
               </a:rPr>
-              <a:t>response time</a:t>
+              <a:t>Push-the-bit and point-the-bit systems</a:t>
             </a:r>
           </a:p>
         </p:txBody>
@@ -8504,8 +7243,8 @@
         </p:nvSpPr>
         <p:spPr>
           <a:xfrm>
-            <a:off x="3784600" y="2311400"/>
-            <a:ext cx="1587500" cy="660400"/>
+            <a:off x="4953000" y="2387600"/>
+            <a:ext cx="2146300" cy="685800"/>
           </a:xfrm>
           <a:prstGeom prst="rect">
             <a:avLst/>
@@ -8533,8 +7272,8 @@
         </p:nvSpPr>
         <p:spPr>
           <a:xfrm>
-            <a:off x="3784600" y="2417064"/>
-            <a:ext cx="1587500" cy="127000"/>
+            <a:off x="4953000" y="2497328"/>
+            <a:ext cx="2146300" cy="127000"/>
           </a:xfrm>
           <a:prstGeom prst="rect">
             <a:avLst/>
@@ -8549,14 +7288,14 @@
           <a:p>
             <a:pPr algn="ctr">
               <a:lnSpc>
-                <a:spcPts val="2500"/>
+                <a:spcPts val="2100"/>
               </a:lnSpc>
               <a:spcAft>
                 <a:spcPts val="0"/>
               </a:spcAft>
             </a:pPr>
             <a:r>
-              <a:rPr sz="2200" b="1" i="0">
+              <a:rPr sz="1800" b="1" i="0">
                 <a:solidFill>
                   <a:srgbClr val="FFFFFF"/>
                 </a:solidFill>
@@ -8565,7 +7304,7 @@
                 <a:cs typeface="Ubuntu Mono"/>
                 <a:sym typeface="Ubuntu Mono"/>
               </a:rPr>
-              <a:t>142</a:t>
+              <a:t>up to 200°C</a:t>
             </a:r>
           </a:p>
         </p:txBody>
@@ -8578,8 +7317,8 @@
         </p:nvSpPr>
         <p:spPr>
           <a:xfrm>
-            <a:off x="3860800" y="2759964"/>
-            <a:ext cx="1435100" cy="127000"/>
+            <a:off x="5029200" y="2789428"/>
+            <a:ext cx="1993900" cy="127000"/>
           </a:xfrm>
           <a:prstGeom prst="rect">
             <a:avLst/>
@@ -8610,679 +7349,14 @@
                 <a:cs typeface="Ubuntu Mono"/>
                 <a:sym typeface="Ubuntu Mono"/>
               </a:rPr>
-              <a:t>fishing, workover and P&amp;A interventions</a:t>
-            </a:r>
-          </a:p>
-        </p:txBody>
-      </p:sp>
-      <p:sp>
-        <p:nvSpPr>
-          <p:cNvPr id="15" name="Rectangle 14"/>
-          <p:cNvSpPr/>
-          <p:nvPr/>
-        </p:nvSpPr>
-        <p:spPr>
-          <a:xfrm>
-            <a:off x="5448300" y="2311400"/>
-            <a:ext cx="1651000" cy="660400"/>
-          </a:xfrm>
-          <a:prstGeom prst="rect">
-            <a:avLst/>
-          </a:prstGeom>
-          <a:solidFill>
-            <a:srgbClr val="194E9A"/>
-          </a:solidFill>
-          <a:ln>
-            <a:noFill/>
-          </a:ln>
-        </p:spPr>
-        <p:txBody>
-          <a:bodyPr rtlCol="0" anchor="ctr"/>
-          <a:lstStyle/>
-          <a:p>
-            <a:pPr algn="ctr"/>
-          </a:p>
-        </p:txBody>
-      </p:sp>
-      <p:sp>
-        <p:nvSpPr>
-          <p:cNvPr id="16" name="TextBox 15"/>
-          <p:cNvSpPr txBox="1"/>
-          <p:nvPr/>
-        </p:nvSpPr>
-        <p:spPr>
-          <a:xfrm>
-            <a:off x="5448300" y="2417064"/>
-            <a:ext cx="1651000" cy="127000"/>
-          </a:xfrm>
-          <a:prstGeom prst="rect">
-            <a:avLst/>
-          </a:prstGeom>
-          <a:noFill/>
-        </p:spPr>
-        <p:txBody>
-          <a:bodyPr wrap="square" lIns="0" rIns="0" tIns="0" bIns="0" anchor="t">
-            <a:spAutoFit/>
-          </a:bodyPr>
-          <a:lstStyle/>
-          <a:p>
-            <a:pPr algn="ctr">
-              <a:lnSpc>
-                <a:spcPts val="2000"/>
-              </a:lnSpc>
-              <a:spcAft>
-                <a:spcPts val="0"/>
-              </a:spcAft>
-            </a:pPr>
-            <a:r>
-              <a:rPr sz="1700" b="1" i="0">
-                <a:solidFill>
-                  <a:srgbClr val="FFFFFF"/>
-                </a:solidFill>
-                <a:latin typeface="Ubuntu Mono"/>
-                <a:ea typeface="Ubuntu Mono"/>
-                <a:cs typeface="Ubuntu Mono"/>
-                <a:sym typeface="Ubuntu Mono"/>
-              </a:rPr>
-              <a:t>ISO 9001</a:t>
-            </a:r>
-          </a:p>
-        </p:txBody>
-      </p:sp>
-      <p:sp>
-        <p:nvSpPr>
-          <p:cNvPr id="17" name="TextBox 16"/>
-          <p:cNvSpPr txBox="1"/>
-          <p:nvPr/>
-        </p:nvSpPr>
-        <p:spPr>
-          <a:xfrm>
-            <a:off x="5524500" y="2696464"/>
-            <a:ext cx="1498600" cy="127000"/>
-          </a:xfrm>
-          <a:prstGeom prst="rect">
-            <a:avLst/>
-          </a:prstGeom>
-          <a:noFill/>
-        </p:spPr>
-        <p:txBody>
-          <a:bodyPr wrap="square" lIns="0" rIns="0" tIns="0" bIns="0" anchor="t">
-            <a:spAutoFit/>
-          </a:bodyPr>
-          <a:lstStyle/>
-          <a:p>
-            <a:pPr algn="ctr">
-              <a:lnSpc>
-                <a:spcPts val="840"/>
-              </a:lnSpc>
-              <a:spcAft>
-                <a:spcPts val="0"/>
-              </a:spcAft>
-            </a:pPr>
-            <a:r>
-              <a:rPr sz="690" b="0" i="0">
-                <a:solidFill>
-                  <a:srgbClr val="FFFFFF"/>
-                </a:solidFill>
-                <a:latin typeface="Ubuntu Mono"/>
-                <a:ea typeface="Ubuntu Mono"/>
-                <a:cs typeface="Ubuntu Mono"/>
-                <a:sym typeface="Ubuntu Mono"/>
-              </a:rPr>
-              <a:t>certified quality management</a:t>
-            </a:r>
-          </a:p>
-        </p:txBody>
-      </p:sp>
-      <p:sp>
-        <p:nvSpPr>
-          <p:cNvPr id="18" name="Rectangle 17"/>
-          <p:cNvSpPr/>
-          <p:nvPr/>
-        </p:nvSpPr>
-        <p:spPr>
-          <a:xfrm>
-            <a:off x="457200" y="3149600"/>
-            <a:ext cx="2120900" cy="1549400"/>
-          </a:xfrm>
-          <a:prstGeom prst="rect">
-            <a:avLst/>
-          </a:prstGeom>
-          <a:solidFill>
-            <a:srgbClr val="194E9A"/>
-          </a:solidFill>
-          <a:ln>
-            <a:noFill/>
-          </a:ln>
-        </p:spPr>
-        <p:txBody>
-          <a:bodyPr rtlCol="0" anchor="ctr"/>
-          <a:lstStyle/>
-          <a:p>
-            <a:pPr algn="ctr"/>
-          </a:p>
-        </p:txBody>
-      </p:sp>
-      <p:sp>
-        <p:nvSpPr>
-          <p:cNvPr id="19" name="TextBox 18"/>
-          <p:cNvSpPr txBox="1"/>
-          <p:nvPr/>
-        </p:nvSpPr>
-        <p:spPr>
-          <a:xfrm>
-            <a:off x="558800" y="3238500"/>
-            <a:ext cx="1917700" cy="127000"/>
-          </a:xfrm>
-          <a:prstGeom prst="rect">
-            <a:avLst/>
-          </a:prstGeom>
-          <a:noFill/>
-        </p:spPr>
-        <p:txBody>
-          <a:bodyPr wrap="square" lIns="0" rIns="0" tIns="0" bIns="0" anchor="t">
-            <a:spAutoFit/>
-          </a:bodyPr>
-          <a:lstStyle/>
-          <a:p>
-            <a:pPr algn="l">
-              <a:spcAft>
-                <a:spcPts val="0"/>
-              </a:spcAft>
-            </a:pPr>
-            <a:r>
-              <a:rPr sz="860" b="1" i="0">
-                <a:solidFill>
-                  <a:srgbClr val="FFFFFF"/>
-                </a:solidFill>
-                <a:latin typeface="Ubuntu Mono"/>
-                <a:ea typeface="Ubuntu Mono"/>
-                <a:cs typeface="Ubuntu Mono"/>
-                <a:sym typeface="Ubuntu Mono"/>
-              </a:rPr>
-              <a:t>FISHING</a:t>
-            </a:r>
-          </a:p>
-        </p:txBody>
-      </p:sp>
-      <p:sp>
-        <p:nvSpPr>
-          <p:cNvPr id="20" name="TextBox 19"/>
-          <p:cNvSpPr txBox="1"/>
-          <p:nvPr/>
-        </p:nvSpPr>
-        <p:spPr>
-          <a:xfrm>
-            <a:off x="558800" y="3429000"/>
-            <a:ext cx="1917700" cy="127000"/>
-          </a:xfrm>
-          <a:prstGeom prst="rect">
-            <a:avLst/>
-          </a:prstGeom>
-          <a:noFill/>
-        </p:spPr>
-        <p:txBody>
-          <a:bodyPr wrap="square" lIns="0" rIns="0" tIns="0" bIns="0" anchor="t">
-            <a:spAutoFit/>
-          </a:bodyPr>
-          <a:lstStyle/>
-          <a:p>
-            <a:pPr algn="l">
-              <a:lnSpc>
-                <a:spcPts val="930"/>
-              </a:lnSpc>
-              <a:spcAft>
-                <a:spcPts val="200"/>
-              </a:spcAft>
-            </a:pPr>
-            <a:r>
-              <a:rPr sz="710" b="0" i="0">
-                <a:solidFill>
-                  <a:srgbClr val="FFFFFF"/>
-                </a:solidFill>
-                <a:latin typeface="Ubuntu Mono"/>
-                <a:ea typeface="Ubuntu Mono"/>
-                <a:cs typeface="Ubuntu Mono"/>
-                <a:sym typeface="Ubuntu Mono"/>
-              </a:rPr>
-              <a:t>Recovery of rods, drill strings, BHAs and stuck or lost tools.</a:t>
-            </a:r>
-          </a:p>
-          <a:p>
-            <a:pPr algn="l">
-              <a:lnSpc>
-                <a:spcPts val="930"/>
-              </a:lnSpc>
-              <a:spcAft>
-                <a:spcPts val="200"/>
-              </a:spcAft>
-            </a:pPr>
-            <a:r>
-              <a:rPr sz="710" b="0" i="0">
-                <a:solidFill>
-                  <a:srgbClr val="FFFFFF"/>
-                </a:solidFill>
-                <a:latin typeface="Ubuntu Mono"/>
-                <a:ea typeface="Ubuntu Mono"/>
-                <a:cs typeface="Ubuntu Mono"/>
-                <a:sym typeface="Ubuntu Mono"/>
-              </a:rPr>
-              <a:t>Jarring and impact tools, shock tools and intensifiers.</a:t>
-            </a:r>
-          </a:p>
-          <a:p>
-            <a:pPr algn="l">
-              <a:lnSpc>
-                <a:spcPts val="930"/>
-              </a:lnSpc>
-              <a:spcAft>
-                <a:spcPts val="200"/>
-              </a:spcAft>
-            </a:pPr>
-            <a:r>
-              <a:rPr sz="710" b="0" i="0">
-                <a:solidFill>
-                  <a:srgbClr val="FFFFFF"/>
-                </a:solidFill>
-                <a:latin typeface="Ubuntu Mono"/>
-                <a:ea typeface="Ubuntu Mono"/>
-                <a:cs typeface="Ubuntu Mono"/>
-                <a:sym typeface="Ubuntu Mono"/>
-              </a:rPr>
-              <a:t>Overshots, spears, die collars, magnets, taper taps.</a:t>
-            </a:r>
-          </a:p>
-          <a:p>
-            <a:pPr algn="l">
-              <a:lnSpc>
-                <a:spcPts val="930"/>
-              </a:lnSpc>
-              <a:spcAft>
-                <a:spcPts val="200"/>
-              </a:spcAft>
-            </a:pPr>
-            <a:r>
-              <a:rPr sz="710" b="0" i="0">
-                <a:solidFill>
-                  <a:srgbClr val="FFFFFF"/>
-                </a:solidFill>
-                <a:latin typeface="Ubuntu Mono"/>
-                <a:ea typeface="Ubuntu Mono"/>
-                <a:cs typeface="Ubuntu Mono"/>
-                <a:sym typeface="Ubuntu Mono"/>
-              </a:rPr>
-              <a:t>Tools on site for rental or purchase.</a:t>
-            </a:r>
-          </a:p>
-        </p:txBody>
-      </p:sp>
-      <p:sp>
-        <p:nvSpPr>
-          <p:cNvPr id="21" name="Rectangle 20"/>
-          <p:cNvSpPr/>
-          <p:nvPr/>
-        </p:nvSpPr>
-        <p:spPr>
-          <a:xfrm>
-            <a:off x="2717800" y="3149600"/>
-            <a:ext cx="2120900" cy="1549400"/>
-          </a:xfrm>
-          <a:prstGeom prst="rect">
-            <a:avLst/>
-          </a:prstGeom>
-          <a:solidFill>
-            <a:srgbClr val="0F7FCB"/>
-          </a:solidFill>
-          <a:ln>
-            <a:noFill/>
-          </a:ln>
-        </p:spPr>
-        <p:txBody>
-          <a:bodyPr rtlCol="0" anchor="ctr"/>
-          <a:lstStyle/>
-          <a:p>
-            <a:pPr algn="ctr"/>
-          </a:p>
-        </p:txBody>
-      </p:sp>
-      <p:sp>
-        <p:nvSpPr>
-          <p:cNvPr id="22" name="TextBox 21"/>
-          <p:cNvSpPr txBox="1"/>
-          <p:nvPr/>
-        </p:nvSpPr>
-        <p:spPr>
-          <a:xfrm>
-            <a:off x="2819400" y="3238500"/>
-            <a:ext cx="1917700" cy="127000"/>
-          </a:xfrm>
-          <a:prstGeom prst="rect">
-            <a:avLst/>
-          </a:prstGeom>
-          <a:noFill/>
-        </p:spPr>
-        <p:txBody>
-          <a:bodyPr wrap="square" lIns="0" rIns="0" tIns="0" bIns="0" anchor="t">
-            <a:spAutoFit/>
-          </a:bodyPr>
-          <a:lstStyle/>
-          <a:p>
-            <a:pPr algn="l">
-              <a:spcAft>
-                <a:spcPts val="0"/>
-              </a:spcAft>
-            </a:pPr>
-            <a:r>
-              <a:rPr sz="860" b="1" i="0">
-                <a:solidFill>
-                  <a:srgbClr val="FFFFFF"/>
-                </a:solidFill>
-                <a:latin typeface="Ubuntu Mono"/>
-                <a:ea typeface="Ubuntu Mono"/>
-                <a:cs typeface="Ubuntu Mono"/>
-                <a:sym typeface="Ubuntu Mono"/>
-              </a:rPr>
-              <a:t>WORKOVER</a:t>
-            </a:r>
-          </a:p>
-        </p:txBody>
-      </p:sp>
-      <p:sp>
-        <p:nvSpPr>
-          <p:cNvPr id="23" name="TextBox 22"/>
-          <p:cNvSpPr txBox="1"/>
-          <p:nvPr/>
-        </p:nvSpPr>
-        <p:spPr>
-          <a:xfrm>
-            <a:off x="2819400" y="3429000"/>
-            <a:ext cx="1917700" cy="127000"/>
-          </a:xfrm>
-          <a:prstGeom prst="rect">
-            <a:avLst/>
-          </a:prstGeom>
-          <a:noFill/>
-        </p:spPr>
-        <p:txBody>
-          <a:bodyPr wrap="square" lIns="0" rIns="0" tIns="0" bIns="0" anchor="t">
-            <a:spAutoFit/>
-          </a:bodyPr>
-          <a:lstStyle/>
-          <a:p>
-            <a:pPr algn="l">
-              <a:lnSpc>
-                <a:spcPts val="930"/>
-              </a:lnSpc>
-              <a:spcAft>
-                <a:spcPts val="200"/>
-              </a:spcAft>
-            </a:pPr>
-            <a:r>
-              <a:rPr sz="710" b="0" i="0">
-                <a:solidFill>
-                  <a:srgbClr val="FFFFFF"/>
-                </a:solidFill>
-                <a:latin typeface="Ubuntu Mono"/>
-                <a:ea typeface="Ubuntu Mono"/>
-                <a:cs typeface="Ubuntu Mono"/>
-                <a:sym typeface="Ubuntu Mono"/>
-              </a:rPr>
-              <a:t>Well restoration and preparation for return to production.</a:t>
-            </a:r>
-          </a:p>
-          <a:p>
-            <a:pPr algn="l">
-              <a:lnSpc>
-                <a:spcPts val="930"/>
-              </a:lnSpc>
-              <a:spcAft>
-                <a:spcPts val="200"/>
-              </a:spcAft>
-            </a:pPr>
-            <a:r>
-              <a:rPr sz="710" b="0" i="0">
-                <a:solidFill>
-                  <a:srgbClr val="FFFFFF"/>
-                </a:solidFill>
-                <a:latin typeface="Ubuntu Mono"/>
-                <a:ea typeface="Ubuntu Mono"/>
-                <a:cs typeface="Ubuntu Mono"/>
-                <a:sym typeface="Ubuntu Mono"/>
-              </a:rPr>
-              <a:t>Section milling and wash over.</a:t>
-            </a:r>
-          </a:p>
-          <a:p>
-            <a:pPr algn="l">
-              <a:lnSpc>
-                <a:spcPts val="930"/>
-              </a:lnSpc>
-              <a:spcAft>
-                <a:spcPts val="200"/>
-              </a:spcAft>
-            </a:pPr>
-            <a:r>
-              <a:rPr sz="710" b="0" i="0">
-                <a:solidFill>
-                  <a:srgbClr val="FFFFFF"/>
-                </a:solidFill>
-                <a:latin typeface="Ubuntu Mono"/>
-                <a:ea typeface="Ubuntu Mono"/>
-                <a:cs typeface="Ubuntu Mono"/>
-                <a:sym typeface="Ubuntu Mono"/>
-              </a:rPr>
-              <a:t>Casing repair, scrapers, impression blocks, junk baskets.</a:t>
-            </a:r>
-          </a:p>
-          <a:p>
-            <a:pPr algn="l">
-              <a:lnSpc>
-                <a:spcPts val="930"/>
-              </a:lnSpc>
-              <a:spcAft>
-                <a:spcPts val="200"/>
-              </a:spcAft>
-            </a:pPr>
-            <a:r>
-              <a:rPr sz="710" b="0" i="0">
-                <a:solidFill>
-                  <a:srgbClr val="FFFFFF"/>
-                </a:solidFill>
-                <a:latin typeface="Ubuntu Mono"/>
-                <a:ea typeface="Ubuntu Mono"/>
-                <a:cs typeface="Ubuntu Mono"/>
-                <a:sym typeface="Ubuntu Mono"/>
-              </a:rPr>
-              <a:t>Enlargement and reaming with RTU, DTU and SPX underreamers.</a:t>
-            </a:r>
-          </a:p>
-        </p:txBody>
-      </p:sp>
-      <p:sp>
-        <p:nvSpPr>
-          <p:cNvPr id="24" name="Rectangle 23"/>
-          <p:cNvSpPr/>
-          <p:nvPr/>
-        </p:nvSpPr>
-        <p:spPr>
-          <a:xfrm>
-            <a:off x="4978400" y="3149600"/>
-            <a:ext cx="2120900" cy="1549400"/>
-          </a:xfrm>
-          <a:prstGeom prst="rect">
-            <a:avLst/>
-          </a:prstGeom>
-          <a:solidFill>
-            <a:srgbClr val="2BAEF6"/>
-          </a:solidFill>
-          <a:ln>
-            <a:noFill/>
-          </a:ln>
-        </p:spPr>
-        <p:txBody>
-          <a:bodyPr rtlCol="0" anchor="ctr"/>
-          <a:lstStyle/>
-          <a:p>
-            <a:pPr algn="ctr"/>
-          </a:p>
-        </p:txBody>
-      </p:sp>
-      <p:sp>
-        <p:nvSpPr>
-          <p:cNvPr id="25" name="TextBox 24"/>
-          <p:cNvSpPr txBox="1"/>
-          <p:nvPr/>
-        </p:nvSpPr>
-        <p:spPr>
-          <a:xfrm>
-            <a:off x="5080000" y="3238500"/>
-            <a:ext cx="1917700" cy="127000"/>
-          </a:xfrm>
-          <a:prstGeom prst="rect">
-            <a:avLst/>
-          </a:prstGeom>
-          <a:noFill/>
-        </p:spPr>
-        <p:txBody>
-          <a:bodyPr wrap="square" lIns="0" rIns="0" tIns="0" bIns="0" anchor="t">
-            <a:spAutoFit/>
-          </a:bodyPr>
-          <a:lstStyle/>
-          <a:p>
-            <a:pPr algn="l">
-              <a:spcAft>
-                <a:spcPts val="0"/>
-              </a:spcAft>
-            </a:pPr>
-            <a:r>
-              <a:rPr sz="860" b="1" i="0">
-                <a:solidFill>
-                  <a:srgbClr val="FFFFFF"/>
-                </a:solidFill>
-                <a:latin typeface="Ubuntu Mono"/>
-                <a:ea typeface="Ubuntu Mono"/>
-                <a:cs typeface="Ubuntu Mono"/>
-                <a:sym typeface="Ubuntu Mono"/>
-              </a:rPr>
-              <a:t>PLUG &amp; ABANDONMENT</a:t>
-            </a:r>
-          </a:p>
-        </p:txBody>
-      </p:sp>
-      <p:sp>
-        <p:nvSpPr>
-          <p:cNvPr id="26" name="TextBox 25"/>
-          <p:cNvSpPr txBox="1"/>
-          <p:nvPr/>
-        </p:nvSpPr>
-        <p:spPr>
-          <a:xfrm>
-            <a:off x="5080000" y="3429000"/>
-            <a:ext cx="1917700" cy="127000"/>
-          </a:xfrm>
-          <a:prstGeom prst="rect">
-            <a:avLst/>
-          </a:prstGeom>
-          <a:noFill/>
-        </p:spPr>
-        <p:txBody>
-          <a:bodyPr wrap="square" lIns="0" rIns="0" tIns="0" bIns="0" anchor="t">
-            <a:spAutoFit/>
-          </a:bodyPr>
-          <a:lstStyle/>
-          <a:p>
-            <a:pPr algn="l">
-              <a:lnSpc>
-                <a:spcPts val="930"/>
-              </a:lnSpc>
-              <a:spcAft>
-                <a:spcPts val="200"/>
-              </a:spcAft>
-            </a:pPr>
-            <a:r>
-              <a:rPr sz="710" b="0" i="0">
-                <a:solidFill>
-                  <a:srgbClr val="FFFFFF"/>
-                </a:solidFill>
-                <a:latin typeface="Ubuntu Mono"/>
-                <a:ea typeface="Ubuntu Mono"/>
-                <a:cs typeface="Ubuntu Mono"/>
-                <a:sym typeface="Ubuntu Mono"/>
-              </a:rPr>
-              <a:t>Safe, definitive abandonment of wells.</a:t>
-            </a:r>
-          </a:p>
-          <a:p>
-            <a:pPr algn="l">
-              <a:lnSpc>
-                <a:spcPts val="930"/>
-              </a:lnSpc>
-              <a:spcAft>
-                <a:spcPts val="200"/>
-              </a:spcAft>
-            </a:pPr>
-            <a:r>
-              <a:rPr sz="710" b="0" i="0">
-                <a:solidFill>
-                  <a:srgbClr val="FFFFFF"/>
-                </a:solidFill>
-                <a:latin typeface="Ubuntu Mono"/>
-                <a:ea typeface="Ubuntu Mono"/>
-                <a:cs typeface="Ubuntu Mono"/>
-                <a:sym typeface="Ubuntu Mono"/>
-              </a:rPr>
-              <a:t>Cutting with hydraulic pipe cutters and section mills.</a:t>
-            </a:r>
-          </a:p>
-          <a:p>
-            <a:pPr algn="l">
-              <a:lnSpc>
-                <a:spcPts val="930"/>
-              </a:lnSpc>
-              <a:spcAft>
-                <a:spcPts val="200"/>
-              </a:spcAft>
-            </a:pPr>
-            <a:r>
-              <a:rPr sz="710" b="0" i="0">
-                <a:solidFill>
-                  <a:srgbClr val="FFFFFF"/>
-                </a:solidFill>
-                <a:latin typeface="Ubuntu Mono"/>
-                <a:ea typeface="Ubuntu Mono"/>
-                <a:cs typeface="Ubuntu Mono"/>
-                <a:sym typeface="Ubuntu Mono"/>
-              </a:rPr>
-              <a:t>Whipstocks and sidetracks, packers, bridge plugs, liner hangers.</a:t>
-            </a:r>
-          </a:p>
-          <a:p>
-            <a:pPr algn="l">
-              <a:lnSpc>
-                <a:spcPts val="930"/>
-              </a:lnSpc>
-              <a:spcAft>
-                <a:spcPts val="200"/>
-              </a:spcAft>
-            </a:pPr>
-            <a:r>
-              <a:rPr sz="710" b="0" i="0">
-                <a:solidFill>
-                  <a:srgbClr val="FFFFFF"/>
-                </a:solidFill>
-                <a:latin typeface="Ubuntu Mono"/>
-                <a:ea typeface="Ubuntu Mono"/>
-                <a:cs typeface="Ubuntu Mono"/>
-                <a:sym typeface="Ubuntu Mono"/>
-              </a:rPr>
-              <a:t>Cold cutter, wellhead replacement, casing jack, tanks.</a:t>
+              <a:t>MWD kits with HT electronics</a:t>
             </a:r>
           </a:p>
         </p:txBody>
       </p:sp>
       <p:pic>
         <p:nvPicPr>
-          <p:cNvPr id="27" name="Picture 26" descr="_c_w4_125_170.png"/>
+          <p:cNvPr id="15" name="Picture 14" descr="_c_motor_170_128.png"/>
           <p:cNvPicPr>
             <a:picLocks noChangeAspect="1"/>
           </p:cNvPicPr>
@@ -9296,17 +7370,113 @@
         </p:blipFill>
         <p:spPr>
           <a:xfrm>
-            <a:off x="457200" y="4876800"/>
-            <a:ext cx="1587500" cy="2159000"/>
+            <a:off x="457200" y="3225800"/>
+            <a:ext cx="2159000" cy="1625600"/>
           </a:xfrm>
           <a:prstGeom prst="rect">
             <a:avLst/>
           </a:prstGeom>
         </p:spPr>
       </p:pic>
+      <p:sp>
+        <p:nvSpPr>
+          <p:cNvPr id="16" name="Rectangle 15"/>
+          <p:cNvSpPr/>
+          <p:nvPr/>
+        </p:nvSpPr>
+        <p:spPr>
+          <a:xfrm>
+            <a:off x="457200" y="4851400"/>
+            <a:ext cx="2159000" cy="685800"/>
+          </a:xfrm>
+          <a:prstGeom prst="rect">
+            <a:avLst/>
+          </a:prstGeom>
+          <a:solidFill>
+            <a:srgbClr val="2BAEF6"/>
+          </a:solidFill>
+          <a:ln>
+            <a:noFill/>
+          </a:ln>
+        </p:spPr>
+        <p:txBody>
+          <a:bodyPr rtlCol="0" anchor="ctr"/>
+          <a:lstStyle/>
+          <a:p>
+            <a:pPr algn="ctr"/>
+          </a:p>
+        </p:txBody>
+      </p:sp>
+      <p:sp>
+        <p:nvSpPr>
+          <p:cNvPr id="17" name="TextBox 16"/>
+          <p:cNvSpPr txBox="1"/>
+          <p:nvPr/>
+        </p:nvSpPr>
+        <p:spPr>
+          <a:xfrm>
+            <a:off x="558800" y="4927600"/>
+            <a:ext cx="1955800" cy="127000"/>
+          </a:xfrm>
+          <a:prstGeom prst="rect">
+            <a:avLst/>
+          </a:prstGeom>
+          <a:noFill/>
+        </p:spPr>
+        <p:txBody>
+          <a:bodyPr wrap="square" lIns="0" rIns="0" tIns="0" bIns="0" anchor="t">
+            <a:spAutoFit/>
+          </a:bodyPr>
+          <a:lstStyle/>
+          <a:p>
+            <a:pPr algn="l">
+              <a:lnSpc>
+                <a:spcPts val="760"/>
+              </a:lnSpc>
+              <a:spcAft>
+                <a:spcPts val="100"/>
+              </a:spcAft>
+            </a:pPr>
+            <a:r>
+              <a:rPr sz="800" b="1" i="0">
+                <a:solidFill>
+                  <a:srgbClr val="FFFFFF"/>
+                </a:solidFill>
+                <a:latin typeface="Ubuntu Mono"/>
+                <a:ea typeface="Ubuntu Mono"/>
+                <a:cs typeface="Ubuntu Mono"/>
+                <a:sym typeface="Ubuntu Mono"/>
+              </a:rPr>
+              <a:t>MUD MOTORS &amp; RSS</a:t>
+            </a:r>
+          </a:p>
+          <a:p>
+            <a:pPr algn="l">
+              <a:lnSpc>
+                <a:spcPts val="760"/>
+              </a:lnSpc>
+              <a:spcAft>
+                <a:spcPts val="100"/>
+              </a:spcAft>
+            </a:pPr>
+            <a:r>
+              <a:rPr sz="640" b="0" i="0">
+                <a:solidFill>
+                  <a:srgbClr val="FFFFFF"/>
+                </a:solidFill>
+                <a:latin typeface="Ubuntu Mono"/>
+                <a:ea typeface="Ubuntu Mono"/>
+                <a:cs typeface="Ubuntu Mono"/>
+                <a:sym typeface="Ubuntu Mono"/>
+              </a:rPr>
+              <a:t>PDMs from 3-1/8" to 9-5/8" OD with a wide range of power sections, including high-temperature stators. Push-the-bit and point-the-bit RSS for precise control in complex formations.</a:t>
+            </a:r>
+          </a:p>
+        </p:txBody>
+      </p:sp>
       <p:pic>
         <p:nvPicPr>
-          <p:cNvPr id="28" name="Picture 27" descr="_c_w3_125_170.png"/>
+          <p:cNvPr id="18" name="Picture 17" descr="_c_wellplan_345_128.png"/>
           <p:cNvPicPr>
             <a:picLocks noChangeAspect="1"/>
           </p:cNvPicPr>
@@ -9320,17 +7490,229 @@
         </p:blipFill>
         <p:spPr>
           <a:xfrm>
-            <a:off x="2120900" y="4876800"/>
-            <a:ext cx="1587500" cy="2159000"/>
+            <a:off x="2717800" y="3225800"/>
+            <a:ext cx="4381500" cy="1625600"/>
           </a:xfrm>
           <a:prstGeom prst="rect">
             <a:avLst/>
           </a:prstGeom>
         </p:spPr>
       </p:pic>
+      <p:sp>
+        <p:nvSpPr>
+          <p:cNvPr id="19" name="Rectangle 18"/>
+          <p:cNvSpPr/>
+          <p:nvPr/>
+        </p:nvSpPr>
+        <p:spPr>
+          <a:xfrm>
+            <a:off x="2717800" y="4851400"/>
+            <a:ext cx="4381500" cy="685800"/>
+          </a:xfrm>
+          <a:prstGeom prst="rect">
+            <a:avLst/>
+          </a:prstGeom>
+          <a:solidFill>
+            <a:srgbClr val="0F7FCB"/>
+          </a:solidFill>
+          <a:ln>
+            <a:noFill/>
+          </a:ln>
+        </p:spPr>
+        <p:txBody>
+          <a:bodyPr rtlCol="0" anchor="ctr"/>
+          <a:lstStyle/>
+          <a:p>
+            <a:pPr algn="ctr"/>
+          </a:p>
+        </p:txBody>
+      </p:sp>
+      <p:sp>
+        <p:nvSpPr>
+          <p:cNvPr id="20" name="TextBox 19"/>
+          <p:cNvSpPr txBox="1"/>
+          <p:nvPr/>
+        </p:nvSpPr>
+        <p:spPr>
+          <a:xfrm>
+            <a:off x="2819400" y="4927600"/>
+            <a:ext cx="4191000" cy="127000"/>
+          </a:xfrm>
+          <a:prstGeom prst="rect">
+            <a:avLst/>
+          </a:prstGeom>
+          <a:noFill/>
+        </p:spPr>
+        <p:txBody>
+          <a:bodyPr wrap="square" lIns="0" rIns="0" tIns="0" bIns="0" anchor="t">
+            <a:spAutoFit/>
+          </a:bodyPr>
+          <a:lstStyle/>
+          <a:p>
+            <a:pPr algn="l">
+              <a:lnSpc>
+                <a:spcPts val="800"/>
+              </a:lnSpc>
+              <a:spcAft>
+                <a:spcPts val="100"/>
+              </a:spcAft>
+            </a:pPr>
+            <a:r>
+              <a:rPr sz="800" b="1" i="0">
+                <a:solidFill>
+                  <a:srgbClr val="FFFFFF"/>
+                </a:solidFill>
+                <a:latin typeface="Ubuntu Mono"/>
+                <a:ea typeface="Ubuntu Mono"/>
+                <a:cs typeface="Ubuntu Mono"/>
+                <a:sym typeface="Ubuntu Mono"/>
+              </a:rPr>
+              <a:t>WELL PLANNING</a:t>
+            </a:r>
+          </a:p>
+          <a:p>
+            <a:pPr algn="l">
+              <a:lnSpc>
+                <a:spcPts val="800"/>
+              </a:lnSpc>
+              <a:spcAft>
+                <a:spcPts val="100"/>
+              </a:spcAft>
+            </a:pPr>
+            <a:r>
+              <a:rPr sz="660" b="0" i="0">
+                <a:solidFill>
+                  <a:srgbClr val="FFFFFF"/>
+                </a:solidFill>
+                <a:latin typeface="Ubuntu Mono"/>
+                <a:ea typeface="Ubuntu Mono"/>
+                <a:cs typeface="Ubuntu Mono"/>
+                <a:sym typeface="Ubuntu Mono"/>
+              </a:rPr>
+              <a:t>Innova and DrillScan software: torque and drag, hydraulics and anti-collision, to drill safely and efficiently in line with project goals. Full simulation, high-frequency data recorder.</a:t>
+            </a:r>
+          </a:p>
+        </p:txBody>
+      </p:sp>
+      <p:sp>
+        <p:nvSpPr>
+          <p:cNvPr id="21" name="Rectangle 20"/>
+          <p:cNvSpPr/>
+          <p:nvPr/>
+        </p:nvSpPr>
+        <p:spPr>
+          <a:xfrm>
+            <a:off x="457200" y="5715000"/>
+            <a:ext cx="6642100" cy="3238500"/>
+          </a:xfrm>
+          <a:prstGeom prst="rect">
+            <a:avLst/>
+          </a:prstGeom>
+          <a:solidFill>
+            <a:srgbClr val="EAF4FC"/>
+          </a:solidFill>
+          <a:ln>
+            <a:noFill/>
+          </a:ln>
+        </p:spPr>
+        <p:txBody>
+          <a:bodyPr rtlCol="0" anchor="ctr"/>
+          <a:lstStyle/>
+          <a:p>
+            <a:pPr algn="ctr"/>
+          </a:p>
+        </p:txBody>
+      </p:sp>
+      <p:sp>
+        <p:nvSpPr>
+          <p:cNvPr id="22" name="TextBox 21"/>
+          <p:cNvSpPr txBox="1"/>
+          <p:nvPr/>
+        </p:nvSpPr>
+        <p:spPr>
+          <a:xfrm>
+            <a:off x="609600" y="5816600"/>
+            <a:ext cx="3810000" cy="127000"/>
+          </a:xfrm>
+          <a:prstGeom prst="rect">
+            <a:avLst/>
+          </a:prstGeom>
+          <a:noFill/>
+        </p:spPr>
+        <p:txBody>
+          <a:bodyPr wrap="square" lIns="0" rIns="0" tIns="0" bIns="0" anchor="t">
+            <a:spAutoFit/>
+          </a:bodyPr>
+          <a:lstStyle/>
+          <a:p>
+            <a:pPr algn="l">
+              <a:spcAft>
+                <a:spcPts val="0"/>
+              </a:spcAft>
+            </a:pPr>
+            <a:r>
+              <a:rPr sz="1300" b="1" i="0">
+                <a:solidFill>
+                  <a:srgbClr val="194E9A"/>
+                </a:solidFill>
+                <a:latin typeface="Ubuntu Mono"/>
+                <a:ea typeface="Ubuntu Mono"/>
+                <a:cs typeface="Ubuntu Mono"/>
+                <a:sym typeface="Ubuntu Mono"/>
+              </a:rPr>
+              <a:t>BOOST MUD PULSE MWD SYSTEM</a:t>
+            </a:r>
+          </a:p>
+        </p:txBody>
+      </p:sp>
+      <p:sp>
+        <p:nvSpPr>
+          <p:cNvPr id="23" name="TextBox 22"/>
+          <p:cNvSpPr txBox="1"/>
+          <p:nvPr/>
+        </p:nvSpPr>
+        <p:spPr>
+          <a:xfrm>
+            <a:off x="609600" y="6045200"/>
+            <a:ext cx="4191000" cy="127000"/>
+          </a:xfrm>
+          <a:prstGeom prst="rect">
+            <a:avLst/>
+          </a:prstGeom>
+          <a:noFill/>
+        </p:spPr>
+        <p:txBody>
+          <a:bodyPr wrap="square" lIns="0" rIns="0" tIns="0" bIns="0" anchor="t">
+            <a:spAutoFit/>
+          </a:bodyPr>
+          <a:lstStyle/>
+          <a:p>
+            <a:pPr algn="l">
+              <a:lnSpc>
+                <a:spcPts val="940"/>
+              </a:lnSpc>
+              <a:spcAft>
+                <a:spcPts val="0"/>
+              </a:spcAft>
+            </a:pPr>
+            <a:r>
+              <a:rPr sz="740" b="0" i="0">
+                <a:solidFill>
+                  <a:srgbClr val="0B1B2E"/>
+                </a:solidFill>
+                <a:latin typeface="Ubuntu Mono"/>
+                <a:ea typeface="Ubuntu Mono"/>
+                <a:cs typeface="Ubuntu Mono"/>
+                <a:sym typeface="Ubuntu Mono"/>
+              </a:rPr>
+              <a:t>Rock solid performance for aggressive drilling conditions. A positive mud pulse system that sends surveys, directional telemetry, gamma ray and other sensor data to surface in real time.</a:t>
+            </a:r>
+          </a:p>
+        </p:txBody>
+      </p:sp>
       <p:pic>
         <p:nvPicPr>
-          <p:cNvPr id="29" name="Picture 28" descr="_c_w1_125_170.png"/>
+          <p:cNvPr id="24" name="Picture 23" descr="_c_boost_160_108.png"/>
           <p:cNvPicPr>
             <a:picLocks noChangeAspect="1"/>
           </p:cNvPicPr>
@@ -9344,106 +7726,24 @@
         </p:blipFill>
         <p:spPr>
           <a:xfrm>
-            <a:off x="3784600" y="4876800"/>
-            <a:ext cx="1587500" cy="2159000"/>
+            <a:off x="4953000" y="5791200"/>
+            <a:ext cx="2032000" cy="1371600"/>
           </a:xfrm>
           <a:prstGeom prst="rect">
             <a:avLst/>
           </a:prstGeom>
         </p:spPr>
       </p:pic>
-      <p:pic>
-        <p:nvPicPr>
-          <p:cNvPr id="30" name="Picture 29" descr="_c_w2_130_170.png"/>
-          <p:cNvPicPr>
-            <a:picLocks noChangeAspect="1"/>
-          </p:cNvPicPr>
-          <p:nvPr/>
-        </p:nvPicPr>
-        <p:blipFill>
-          <a:blip r:embed="rId6"/>
-          <a:stretch>
-            <a:fillRect/>
-          </a:stretch>
-        </p:blipFill>
-        <p:spPr>
-          <a:xfrm>
-            <a:off x="5448300" y="4876800"/>
-            <a:ext cx="1651000" cy="2159000"/>
-          </a:xfrm>
-          <a:prstGeom prst="rect">
-            <a:avLst/>
-          </a:prstGeom>
-        </p:spPr>
-      </p:pic>
-      <p:sp>
-        <p:nvSpPr>
-          <p:cNvPr id="31" name="Rectangle 30"/>
-          <p:cNvSpPr/>
-          <p:nvPr/>
-        </p:nvSpPr>
-        <p:spPr>
-          <a:xfrm>
-            <a:off x="457200" y="7315200"/>
-            <a:ext cx="6642100" cy="1905000"/>
-          </a:xfrm>
-          <a:prstGeom prst="rect">
-            <a:avLst/>
-          </a:prstGeom>
-          <a:solidFill>
-            <a:srgbClr val="EAF4FC"/>
-          </a:solidFill>
-          <a:ln>
-            <a:noFill/>
-          </a:ln>
-        </p:spPr>
-        <p:txBody>
-          <a:bodyPr rtlCol="0" anchor="ctr"/>
-          <a:lstStyle/>
-          <a:p>
-            <a:pPr algn="ctr"/>
-          </a:p>
-        </p:txBody>
-      </p:sp>
-      <p:sp>
-        <p:nvSpPr>
-          <p:cNvPr id="32" name="Rectangle 31"/>
-          <p:cNvSpPr/>
-          <p:nvPr/>
-        </p:nvSpPr>
-        <p:spPr>
-          <a:xfrm>
-            <a:off x="457200" y="7315200"/>
-            <a:ext cx="76200" cy="1905000"/>
-          </a:xfrm>
-          <a:prstGeom prst="rect">
-            <a:avLst/>
-          </a:prstGeom>
-          <a:solidFill>
-            <a:srgbClr val="1CB2FE"/>
-          </a:solidFill>
-          <a:ln>
-            <a:noFill/>
-          </a:ln>
-        </p:spPr>
-        <p:txBody>
-          <a:bodyPr rtlCol="0" anchor="ctr"/>
-          <a:lstStyle/>
-          <a:p>
-            <a:pPr algn="ctr"/>
-          </a:p>
-        </p:txBody>
-      </p:sp>
-      <p:sp>
-        <p:nvSpPr>
-          <p:cNvPr id="33" name="TextBox 32"/>
+      <p:sp>
+        <p:nvSpPr>
+          <p:cNvPr id="25" name="TextBox 24"/>
           <p:cNvSpPr txBox="1"/>
           <p:nvPr/>
         </p:nvSpPr>
         <p:spPr>
           <a:xfrm>
-            <a:off x="685800" y="7442200"/>
-            <a:ext cx="5080000" cy="127000"/>
+            <a:off x="609600" y="6527800"/>
+            <a:ext cx="4254500" cy="127000"/>
           </a:xfrm>
           <a:prstGeom prst="rect">
             <a:avLst/>
@@ -9457,57 +7757,61 @@
           <a:lstStyle/>
           <a:p>
             <a:pPr algn="l">
-              <a:spcAft>
-                <a:spcPts val="0"/>
-              </a:spcAft>
-            </a:pPr>
-            <a:r>
-              <a:rPr sz="1300" b="1" i="0">
-                <a:solidFill>
-                  <a:srgbClr val="194E9A"/>
-                </a:solidFill>
-                <a:latin typeface="Ubuntu Mono"/>
-                <a:ea typeface="Ubuntu Mono"/>
-                <a:cs typeface="Ubuntu Mono"/>
-                <a:sym typeface="Ubuntu Mono"/>
-              </a:rPr>
-              <a:t>WATER WELLS TOO</a:t>
-            </a:r>
-          </a:p>
-        </p:txBody>
-      </p:sp>
-      <p:sp>
-        <p:nvSpPr>
-          <p:cNvPr id="34" name="TextBox 33"/>
-          <p:cNvSpPr txBox="1"/>
-          <p:nvPr/>
-        </p:nvSpPr>
-        <p:spPr>
-          <a:xfrm>
-            <a:off x="685800" y="7670800"/>
-            <a:ext cx="6223000" cy="127000"/>
-          </a:xfrm>
-          <a:prstGeom prst="rect">
-            <a:avLst/>
-          </a:prstGeom>
-          <a:noFill/>
-        </p:spPr>
-        <p:txBody>
-          <a:bodyPr wrap="square" lIns="0" rIns="0" tIns="0" bIns="0" anchor="t">
-            <a:spAutoFit/>
-          </a:bodyPr>
-          <a:lstStyle/>
+              <a:lnSpc>
+                <a:spcPts val="910"/>
+              </a:lnSpc>
+              <a:spcAft>
+                <a:spcPts val="160"/>
+              </a:spcAft>
+            </a:pPr>
+            <a:r>
+              <a:rPr sz="530" b="0" i="0">
+                <a:solidFill>
+                  <a:srgbClr val="1CB2FE"/>
+                </a:solidFill>
+                <a:latin typeface="Ubuntu Mono"/>
+                <a:ea typeface="Ubuntu Mono"/>
+                <a:cs typeface="Ubuntu Mono"/>
+                <a:sym typeface="Ubuntu Mono"/>
+              </a:rPr>
+              <a:t>■ </a:t>
+            </a:r>
+            <a:r>
+              <a:rPr sz="710" b="0" i="0">
+                <a:solidFill>
+                  <a:srgbClr val="0B1B2E"/>
+                </a:solidFill>
+                <a:latin typeface="Ubuntu Mono"/>
+                <a:ea typeface="Ubuntu Mono"/>
+                <a:cs typeface="Ubuntu Mono"/>
+                <a:sym typeface="Ubuntu Mono"/>
+              </a:rPr>
+              <a:t>Field-proven design, standard rating 185°C, 200°C version available</a:t>
+            </a:r>
+          </a:p>
           <a:p>
             <a:pPr algn="l">
               <a:lnSpc>
-                <a:spcPts val="980"/>
+                <a:spcPts val="910"/>
               </a:lnSpc>
               <a:spcAft>
-                <a:spcPts val="0"/>
-              </a:spcAft>
-            </a:pPr>
-            <a:r>
-              <a:rPr sz="760" b="0" i="0">
+                <a:spcPts val="160"/>
+              </a:spcAft>
+            </a:pPr>
+            <a:r>
+              <a:rPr sz="530" b="0" i="0">
+                <a:solidFill>
+                  <a:srgbClr val="1CB2FE"/>
+                </a:solidFill>
+                <a:latin typeface="Ubuntu Mono"/>
+                <a:ea typeface="Ubuntu Mono"/>
+                <a:cs typeface="Ubuntu Mono"/>
+                <a:sym typeface="Ubuntu Mono"/>
+              </a:rPr>
+              <a:t>■ </a:t>
+            </a:r>
+            <a:r>
+              <a:rPr sz="710" b="0" i="0">
                 <a:solidFill>
                   <a:srgbClr val="0B1B2E"/>
                 </a:solidFill>
@@ -9516,21 +7820,123 @@
                 <a:cs typeface="Ubuntu Mono"/>
                 <a:sym typeface="Ubuntu Mono"/>
               </a:rPr>
-              <a:t>We also work on water wells, typically between 300 and 1,000 m, in support of drilling contractors. Habits formed on 3,000 m wells mean we handle shallow wells with the same rigor.</a:t>
-            </a:r>
-          </a:p>
-        </p:txBody>
-      </p:sp>
-      <p:sp>
-        <p:nvSpPr>
-          <p:cNvPr id="35" name="Rectangle 34"/>
+              <a:t>Top and bottom mounted positive pulse systems</a:t>
+            </a:r>
+          </a:p>
+          <a:p>
+            <a:pPr algn="l">
+              <a:lnSpc>
+                <a:spcPts val="910"/>
+              </a:lnSpc>
+              <a:spcAft>
+                <a:spcPts val="160"/>
+              </a:spcAft>
+            </a:pPr>
+            <a:r>
+              <a:rPr sz="530" b="0" i="0">
+                <a:solidFill>
+                  <a:srgbClr val="1CB2FE"/>
+                </a:solidFill>
+                <a:latin typeface="Ubuntu Mono"/>
+                <a:ea typeface="Ubuntu Mono"/>
+                <a:cs typeface="Ubuntu Mono"/>
+                <a:sym typeface="Ubuntu Mono"/>
+              </a:rPr>
+              <a:t>■ </a:t>
+            </a:r>
+            <a:r>
+              <a:rPr sz="710" b="0" i="0">
+                <a:solidFill>
+                  <a:srgbClr val="0B1B2E"/>
+                </a:solidFill>
+                <a:latin typeface="Ubuntu Mono"/>
+                <a:ea typeface="Ubuntu Mono"/>
+                <a:cs typeface="Ubuntu Mono"/>
+                <a:sym typeface="Ubuntu Mono"/>
+              </a:rPr>
+              <a:t>Motor-driven pulser with anti-plugging technology: performs in LCM and high-solids mud</a:t>
+            </a:r>
+          </a:p>
+          <a:p>
+            <a:pPr algn="l">
+              <a:lnSpc>
+                <a:spcPts val="910"/>
+              </a:lnSpc>
+              <a:spcAft>
+                <a:spcPts val="160"/>
+              </a:spcAft>
+            </a:pPr>
+            <a:r>
+              <a:rPr sz="530" b="0" i="0">
+                <a:solidFill>
+                  <a:srgbClr val="1CB2FE"/>
+                </a:solidFill>
+                <a:latin typeface="Ubuntu Mono"/>
+                <a:ea typeface="Ubuntu Mono"/>
+                <a:cs typeface="Ubuntu Mono"/>
+                <a:sym typeface="Ubuntu Mono"/>
+              </a:rPr>
+              <a:t>■ </a:t>
+            </a:r>
+            <a:r>
+              <a:rPr sz="710" b="0" i="0">
+                <a:solidFill>
+                  <a:srgbClr val="0B1B2E"/>
+                </a:solidFill>
+                <a:latin typeface="Ubuntu Mono"/>
+                <a:ea typeface="Ubuntu Mono"/>
+                <a:cs typeface="Ubuntu Mono"/>
+                <a:sym typeface="Ubuntu Mono"/>
+              </a:rPr>
+              <a:t>Wide range of flow rates and rotary speeds, easy to assemble and service</a:t>
+            </a:r>
+          </a:p>
+          <a:p>
+            <a:pPr algn="l">
+              <a:lnSpc>
+                <a:spcPts val="910"/>
+              </a:lnSpc>
+              <a:spcAft>
+                <a:spcPts val="160"/>
+              </a:spcAft>
+            </a:pPr>
+            <a:r>
+              <a:rPr sz="530" b="0" i="0">
+                <a:solidFill>
+                  <a:srgbClr val="1CB2FE"/>
+                </a:solidFill>
+                <a:latin typeface="Ubuntu Mono"/>
+                <a:ea typeface="Ubuntu Mono"/>
+                <a:cs typeface="Ubuntu Mono"/>
+                <a:sym typeface="Ubuntu Mono"/>
+              </a:rPr>
+              <a:t>■ </a:t>
+            </a:r>
+            <a:r>
+              <a:rPr sz="710" b="0" i="0">
+                <a:solidFill>
+                  <a:srgbClr val="0B1B2E"/>
+                </a:solidFill>
+                <a:latin typeface="Ubuntu Mono"/>
+                <a:ea typeface="Ubuntu Mono"/>
+                <a:cs typeface="Ubuntu Mono"/>
+                <a:sym typeface="Ubuntu Mono"/>
+              </a:rPr>
+              <a:t>Down-linking for adjustable logging sequences (4 programmable)</a:t>
+            </a:r>
+          </a:p>
+        </p:txBody>
+      </p:sp>
+      <p:sp>
+        <p:nvSpPr>
+          <p:cNvPr id="26" name="Rectangle 25"/>
           <p:cNvSpPr/>
           <p:nvPr/>
         </p:nvSpPr>
         <p:spPr>
           <a:xfrm>
-            <a:off x="685800" y="8128000"/>
-            <a:ext cx="1955800" cy="939800"/>
+            <a:off x="609600" y="7620000"/>
+            <a:ext cx="1549400" cy="355600"/>
           </a:xfrm>
           <a:prstGeom prst="rect">
             <a:avLst/>
@@ -9554,14 +7960,14 @@
       </p:sp>
       <p:sp>
         <p:nvSpPr>
-          <p:cNvPr id="36" name="TextBox 35"/>
+          <p:cNvPr id="27" name="TextBox 26"/>
           <p:cNvSpPr txBox="1"/>
           <p:nvPr/>
         </p:nvSpPr>
         <p:spPr>
           <a:xfrm>
-            <a:off x="787400" y="8204200"/>
-            <a:ext cx="1752600" cy="127000"/>
+            <a:off x="685800" y="7670800"/>
+            <a:ext cx="1422400" cy="127000"/>
           </a:xfrm>
           <a:prstGeom prst="rect">
             <a:avLst/>
@@ -9576,59 +7982,59 @@
           <a:p>
             <a:pPr algn="l">
               <a:lnSpc>
-                <a:spcPts val="880"/>
+                <a:spcPts val="940"/>
               </a:lnSpc>
               <a:spcAft>
-                <a:spcPts val="200"/>
-              </a:spcAft>
-            </a:pPr>
-            <a:r>
-              <a:rPr sz="860" b="1" i="0">
-                <a:solidFill>
-                  <a:srgbClr val="0F7FCB"/>
-                </a:solidFill>
-                <a:latin typeface="Ubuntu Mono"/>
-                <a:ea typeface="Ubuntu Mono"/>
-                <a:cs typeface="Ubuntu Mono"/>
-                <a:sym typeface="Ubuntu Mono"/>
-              </a:rPr>
-              <a:t>CUT &amp; PULL</a:t>
+                <a:spcPts val="0"/>
+              </a:spcAft>
+            </a:pPr>
+            <a:r>
+              <a:rPr sz="580" b="0" i="0">
+                <a:solidFill>
+                  <a:srgbClr val="5A6B7F"/>
+                </a:solidFill>
+                <a:latin typeface="Ubuntu Mono"/>
+                <a:ea typeface="Ubuntu Mono"/>
+                <a:cs typeface="Ubuntu Mono"/>
+                <a:sym typeface="Ubuntu Mono"/>
+              </a:rPr>
+              <a:t>OUTSIDE DIAMETER</a:t>
             </a:r>
           </a:p>
           <a:p>
             <a:pPr algn="l">
               <a:lnSpc>
-                <a:spcPts val="880"/>
+                <a:spcPts val="940"/>
               </a:lnSpc>
               <a:spcAft>
-                <a:spcPts val="200"/>
-              </a:spcAft>
-            </a:pPr>
-            <a:r>
-              <a:rPr sz="690" b="0" i="0">
-                <a:solidFill>
-                  <a:srgbClr val="0B1B2E"/>
-                </a:solidFill>
-                <a:latin typeface="Ubuntu Mono"/>
-                <a:ea typeface="Ubuntu Mono"/>
-                <a:cs typeface="Ubuntu Mono"/>
-                <a:sym typeface="Ubuntu Mono"/>
-              </a:rPr>
-              <a:t>Hydraulic and external pipe cutters, spears and overshots to cut and pull casing, tubing or stuck strings.</a:t>
-            </a:r>
-          </a:p>
-        </p:txBody>
-      </p:sp>
-      <p:sp>
-        <p:nvSpPr>
-          <p:cNvPr id="37" name="Rectangle 36"/>
+                <a:spcPts val="0"/>
+              </a:spcAft>
+            </a:pPr>
+            <a:r>
+              <a:rPr sz="860" b="1" i="0">
+                <a:solidFill>
+                  <a:srgbClr val="194E9A"/>
+                </a:solidFill>
+                <a:latin typeface="Ubuntu Mono"/>
+                <a:ea typeface="Ubuntu Mono"/>
+                <a:cs typeface="Ubuntu Mono"/>
+                <a:sym typeface="Ubuntu Mono"/>
+              </a:rPr>
+              <a:t>47.6 mm (1.875")</a:t>
+            </a:r>
+          </a:p>
+        </p:txBody>
+      </p:sp>
+      <p:sp>
+        <p:nvSpPr>
+          <p:cNvPr id="28" name="Rectangle 27"/>
           <p:cNvSpPr/>
           <p:nvPr/>
         </p:nvSpPr>
         <p:spPr>
           <a:xfrm>
-            <a:off x="2743200" y="8128000"/>
-            <a:ext cx="1955800" cy="939800"/>
+            <a:off x="2216150" y="7620000"/>
+            <a:ext cx="1549400" cy="355600"/>
           </a:xfrm>
           <a:prstGeom prst="rect">
             <a:avLst/>
@@ -9652,14 +8058,14 @@
       </p:sp>
       <p:sp>
         <p:nvSpPr>
-          <p:cNvPr id="38" name="TextBox 37"/>
+          <p:cNvPr id="29" name="TextBox 28"/>
           <p:cNvSpPr txBox="1"/>
           <p:nvPr/>
         </p:nvSpPr>
         <p:spPr>
           <a:xfrm>
-            <a:off x="2844800" y="8204200"/>
-            <a:ext cx="1752600" cy="127000"/>
+            <a:off x="2292350" y="7670800"/>
+            <a:ext cx="1422400" cy="127000"/>
           </a:xfrm>
           <a:prstGeom prst="rect">
             <a:avLst/>
@@ -9674,59 +8080,59 @@
           <a:p>
             <a:pPr algn="l">
               <a:lnSpc>
-                <a:spcPts val="880"/>
+                <a:spcPts val="940"/>
               </a:lnSpc>
               <a:spcAft>
-                <a:spcPts val="200"/>
-              </a:spcAft>
-            </a:pPr>
-            <a:r>
-              <a:rPr sz="860" b="1" i="0">
-                <a:solidFill>
-                  <a:srgbClr val="0F7FCB"/>
-                </a:solidFill>
-                <a:latin typeface="Ubuntu Mono"/>
-                <a:ea typeface="Ubuntu Mono"/>
-                <a:cs typeface="Ubuntu Mono"/>
-                <a:sym typeface="Ubuntu Mono"/>
-              </a:rPr>
-              <a:t>REAMING</a:t>
+                <a:spcPts val="0"/>
+              </a:spcAft>
+            </a:pPr>
+            <a:r>
+              <a:rPr sz="580" b="0" i="0">
+                <a:solidFill>
+                  <a:srgbClr val="5A6B7F"/>
+                </a:solidFill>
+                <a:latin typeface="Ubuntu Mono"/>
+                <a:ea typeface="Ubuntu Mono"/>
+                <a:cs typeface="Ubuntu Mono"/>
+                <a:sym typeface="Ubuntu Mono"/>
+              </a:rPr>
+              <a:t>PRESSURE RATING</a:t>
             </a:r>
           </a:p>
           <a:p>
             <a:pPr algn="l">
               <a:lnSpc>
-                <a:spcPts val="880"/>
+                <a:spcPts val="940"/>
               </a:lnSpc>
               <a:spcAft>
-                <a:spcPts val="200"/>
-              </a:spcAft>
-            </a:pPr>
-            <a:r>
-              <a:rPr sz="690" b="0" i="0">
-                <a:solidFill>
-                  <a:srgbClr val="0B1B2E"/>
-                </a:solidFill>
-                <a:latin typeface="Ubuntu Mono"/>
-                <a:ea typeface="Ubuntu Mono"/>
-                <a:cs typeface="Ubuntu Mono"/>
-                <a:sym typeface="Ubuntu Mono"/>
-              </a:rPr>
-              <a:t>Rotary and directional underreamers, hole openers, roller reamers and SPX drag-type underreamers.</a:t>
-            </a:r>
-          </a:p>
-        </p:txBody>
-      </p:sp>
-      <p:sp>
-        <p:nvSpPr>
-          <p:cNvPr id="39" name="Rectangle 38"/>
+                <a:spcPts val="0"/>
+              </a:spcAft>
+            </a:pPr>
+            <a:r>
+              <a:rPr sz="860" b="1" i="0">
+                <a:solidFill>
+                  <a:srgbClr val="194E9A"/>
+                </a:solidFill>
+                <a:latin typeface="Ubuntu Mono"/>
+                <a:ea typeface="Ubuntu Mono"/>
+                <a:cs typeface="Ubuntu Mono"/>
+                <a:sym typeface="Ubuntu Mono"/>
+              </a:rPr>
+              <a:t>20,000 psi</a:t>
+            </a:r>
+          </a:p>
+        </p:txBody>
+      </p:sp>
+      <p:sp>
+        <p:nvSpPr>
+          <p:cNvPr id="30" name="Rectangle 29"/>
           <p:cNvSpPr/>
           <p:nvPr/>
         </p:nvSpPr>
         <p:spPr>
           <a:xfrm>
-            <a:off x="4800600" y="8128000"/>
-            <a:ext cx="1955800" cy="939800"/>
+            <a:off x="3822700" y="7620000"/>
+            <a:ext cx="1549400" cy="355600"/>
           </a:xfrm>
           <a:prstGeom prst="rect">
             <a:avLst/>
@@ -9750,14 +8156,14 @@
       </p:sp>
       <p:sp>
         <p:nvSpPr>
-          <p:cNvPr id="40" name="TextBox 39"/>
+          <p:cNvPr id="31" name="TextBox 30"/>
           <p:cNvSpPr txBox="1"/>
           <p:nvPr/>
         </p:nvSpPr>
         <p:spPr>
           <a:xfrm>
-            <a:off x="4902200" y="8204200"/>
-            <a:ext cx="1752600" cy="127000"/>
+            <a:off x="3898900" y="7670800"/>
+            <a:ext cx="1422400" cy="127000"/>
           </a:xfrm>
           <a:prstGeom prst="rect">
             <a:avLst/>
@@ -9772,36 +8178,583 @@
           <a:p>
             <a:pPr algn="l">
               <a:lnSpc>
-                <a:spcPts val="880"/>
+                <a:spcPts val="940"/>
               </a:lnSpc>
               <a:spcAft>
-                <a:spcPts val="200"/>
-              </a:spcAft>
-            </a:pPr>
-            <a:r>
-              <a:rPr sz="860" b="1" i="0">
-                <a:solidFill>
-                  <a:srgbClr val="0F7FCB"/>
-                </a:solidFill>
-                <a:latin typeface="Ubuntu Mono"/>
-                <a:ea typeface="Ubuntu Mono"/>
-                <a:cs typeface="Ubuntu Mono"/>
-                <a:sym typeface="Ubuntu Mono"/>
-              </a:rPr>
-              <a:t>MILLING</a:t>
+                <a:spcPts val="0"/>
+              </a:spcAft>
+            </a:pPr>
+            <a:r>
+              <a:rPr sz="580" b="0" i="0">
+                <a:solidFill>
+                  <a:srgbClr val="5A6B7F"/>
+                </a:solidFill>
+                <a:latin typeface="Ubuntu Mono"/>
+                <a:ea typeface="Ubuntu Mono"/>
+                <a:cs typeface="Ubuntu Mono"/>
+                <a:sym typeface="Ubuntu Mono"/>
+              </a:rPr>
+              <a:t>TEMPERATURE</a:t>
             </a:r>
           </a:p>
           <a:p>
             <a:pPr algn="l">
               <a:lnSpc>
-                <a:spcPts val="880"/>
+                <a:spcPts val="940"/>
               </a:lnSpc>
               <a:spcAft>
-                <a:spcPts val="200"/>
-              </a:spcAft>
-            </a:pPr>
-            <a:r>
-              <a:rPr sz="690" b="0" i="0">
+                <a:spcPts val="0"/>
+              </a:spcAft>
+            </a:pPr>
+            <a:r>
+              <a:rPr sz="860" b="1" i="0">
+                <a:solidFill>
+                  <a:srgbClr val="194E9A"/>
+                </a:solidFill>
+                <a:latin typeface="Ubuntu Mono"/>
+                <a:ea typeface="Ubuntu Mono"/>
+                <a:cs typeface="Ubuntu Mono"/>
+                <a:sym typeface="Ubuntu Mono"/>
+              </a:rPr>
+              <a:t>-20 to 185°C</a:t>
+            </a:r>
+          </a:p>
+        </p:txBody>
+      </p:sp>
+      <p:sp>
+        <p:nvSpPr>
+          <p:cNvPr id="32" name="Rectangle 31"/>
+          <p:cNvSpPr/>
+          <p:nvPr/>
+        </p:nvSpPr>
+        <p:spPr>
+          <a:xfrm>
+            <a:off x="5429250" y="7620000"/>
+            <a:ext cx="1549400" cy="355600"/>
+          </a:xfrm>
+          <a:prstGeom prst="rect">
+            <a:avLst/>
+          </a:prstGeom>
+          <a:solidFill>
+            <a:srgbClr val="FFFFFF"/>
+          </a:solidFill>
+          <a:ln w="9525">
+            <a:solidFill>
+              <a:srgbClr val="C5D6E8"/>
+            </a:solidFill>
+          </a:ln>
+        </p:spPr>
+        <p:txBody>
+          <a:bodyPr rtlCol="0" anchor="ctr"/>
+          <a:lstStyle/>
+          <a:p>
+            <a:pPr algn="ctr"/>
+          </a:p>
+        </p:txBody>
+      </p:sp>
+      <p:sp>
+        <p:nvSpPr>
+          <p:cNvPr id="33" name="TextBox 32"/>
+          <p:cNvSpPr txBox="1"/>
+          <p:nvPr/>
+        </p:nvSpPr>
+        <p:spPr>
+          <a:xfrm>
+            <a:off x="5505450" y="7670800"/>
+            <a:ext cx="1422400" cy="127000"/>
+          </a:xfrm>
+          <a:prstGeom prst="rect">
+            <a:avLst/>
+          </a:prstGeom>
+          <a:noFill/>
+        </p:spPr>
+        <p:txBody>
+          <a:bodyPr wrap="square" lIns="0" rIns="0" tIns="0" bIns="0" anchor="t">
+            <a:spAutoFit/>
+          </a:bodyPr>
+          <a:lstStyle/>
+          <a:p>
+            <a:pPr algn="l">
+              <a:lnSpc>
+                <a:spcPts val="940"/>
+              </a:lnSpc>
+              <a:spcAft>
+                <a:spcPts val="0"/>
+              </a:spcAft>
+            </a:pPr>
+            <a:r>
+              <a:rPr sz="580" b="0" i="0">
+                <a:solidFill>
+                  <a:srgbClr val="5A6B7F"/>
+                </a:solidFill>
+                <a:latin typeface="Ubuntu Mono"/>
+                <a:ea typeface="Ubuntu Mono"/>
+                <a:cs typeface="Ubuntu Mono"/>
+                <a:sym typeface="Ubuntu Mono"/>
+              </a:rPr>
+              <a:t>COLLAR SIZES</a:t>
+            </a:r>
+          </a:p>
+          <a:p>
+            <a:pPr algn="l">
+              <a:lnSpc>
+                <a:spcPts val="940"/>
+              </a:lnSpc>
+              <a:spcAft>
+                <a:spcPts val="0"/>
+              </a:spcAft>
+            </a:pPr>
+            <a:r>
+              <a:rPr sz="860" b="1" i="0">
+                <a:solidFill>
+                  <a:srgbClr val="194E9A"/>
+                </a:solidFill>
+                <a:latin typeface="Ubuntu Mono"/>
+                <a:ea typeface="Ubuntu Mono"/>
+                <a:cs typeface="Ubuntu Mono"/>
+                <a:sym typeface="Ubuntu Mono"/>
+              </a:rPr>
+              <a:t>3.5" to 8"</a:t>
+            </a:r>
+          </a:p>
+        </p:txBody>
+      </p:sp>
+      <p:sp>
+        <p:nvSpPr>
+          <p:cNvPr id="34" name="Rectangle 33"/>
+          <p:cNvSpPr/>
+          <p:nvPr/>
+        </p:nvSpPr>
+        <p:spPr>
+          <a:xfrm>
+            <a:off x="609600" y="8026400"/>
+            <a:ext cx="1549400" cy="355600"/>
+          </a:xfrm>
+          <a:prstGeom prst="rect">
+            <a:avLst/>
+          </a:prstGeom>
+          <a:solidFill>
+            <a:srgbClr val="FFFFFF"/>
+          </a:solidFill>
+          <a:ln w="9525">
+            <a:solidFill>
+              <a:srgbClr val="C5D6E8"/>
+            </a:solidFill>
+          </a:ln>
+        </p:spPr>
+        <p:txBody>
+          <a:bodyPr rtlCol="0" anchor="ctr"/>
+          <a:lstStyle/>
+          <a:p>
+            <a:pPr algn="ctr"/>
+          </a:p>
+        </p:txBody>
+      </p:sp>
+      <p:sp>
+        <p:nvSpPr>
+          <p:cNvPr id="35" name="TextBox 34"/>
+          <p:cNvSpPr txBox="1"/>
+          <p:nvPr/>
+        </p:nvSpPr>
+        <p:spPr>
+          <a:xfrm>
+            <a:off x="685800" y="8077200"/>
+            <a:ext cx="1422400" cy="127000"/>
+          </a:xfrm>
+          <a:prstGeom prst="rect">
+            <a:avLst/>
+          </a:prstGeom>
+          <a:noFill/>
+        </p:spPr>
+        <p:txBody>
+          <a:bodyPr wrap="square" lIns="0" rIns="0" tIns="0" bIns="0" anchor="t">
+            <a:spAutoFit/>
+          </a:bodyPr>
+          <a:lstStyle/>
+          <a:p>
+            <a:pPr algn="l">
+              <a:lnSpc>
+                <a:spcPts val="940"/>
+              </a:lnSpc>
+              <a:spcAft>
+                <a:spcPts val="0"/>
+              </a:spcAft>
+            </a:pPr>
+            <a:r>
+              <a:rPr sz="580" b="0" i="0">
+                <a:solidFill>
+                  <a:srgbClr val="5A6B7F"/>
+                </a:solidFill>
+                <a:latin typeface="Ubuntu Mono"/>
+                <a:ea typeface="Ubuntu Mono"/>
+                <a:cs typeface="Ubuntu Mono"/>
+                <a:sym typeface="Ubuntu Mono"/>
+              </a:rPr>
+              <a:t>FLOW RATE</a:t>
+            </a:r>
+          </a:p>
+          <a:p>
+            <a:pPr algn="l">
+              <a:lnSpc>
+                <a:spcPts val="940"/>
+              </a:lnSpc>
+              <a:spcAft>
+                <a:spcPts val="0"/>
+              </a:spcAft>
+            </a:pPr>
+            <a:r>
+              <a:rPr sz="860" b="1" i="0">
+                <a:solidFill>
+                  <a:srgbClr val="194E9A"/>
+                </a:solidFill>
+                <a:latin typeface="Ubuntu Mono"/>
+                <a:ea typeface="Ubuntu Mono"/>
+                <a:cs typeface="Ubuntu Mono"/>
+                <a:sym typeface="Ubuntu Mono"/>
+              </a:rPr>
+              <a:t>75 - 1,200 gpm</a:t>
+            </a:r>
+          </a:p>
+        </p:txBody>
+      </p:sp>
+      <p:sp>
+        <p:nvSpPr>
+          <p:cNvPr id="36" name="Rectangle 35"/>
+          <p:cNvSpPr/>
+          <p:nvPr/>
+        </p:nvSpPr>
+        <p:spPr>
+          <a:xfrm>
+            <a:off x="2216150" y="8026400"/>
+            <a:ext cx="1549400" cy="355600"/>
+          </a:xfrm>
+          <a:prstGeom prst="rect">
+            <a:avLst/>
+          </a:prstGeom>
+          <a:solidFill>
+            <a:srgbClr val="FFFFFF"/>
+          </a:solidFill>
+          <a:ln w="9525">
+            <a:solidFill>
+              <a:srgbClr val="C5D6E8"/>
+            </a:solidFill>
+          </a:ln>
+        </p:spPr>
+        <p:txBody>
+          <a:bodyPr rtlCol="0" anchor="ctr"/>
+          <a:lstStyle/>
+          <a:p>
+            <a:pPr algn="ctr"/>
+          </a:p>
+        </p:txBody>
+      </p:sp>
+      <p:sp>
+        <p:nvSpPr>
+          <p:cNvPr id="37" name="TextBox 36"/>
+          <p:cNvSpPr txBox="1"/>
+          <p:nvPr/>
+        </p:nvSpPr>
+        <p:spPr>
+          <a:xfrm>
+            <a:off x="2292350" y="8077200"/>
+            <a:ext cx="1422400" cy="127000"/>
+          </a:xfrm>
+          <a:prstGeom prst="rect">
+            <a:avLst/>
+          </a:prstGeom>
+          <a:noFill/>
+        </p:spPr>
+        <p:txBody>
+          <a:bodyPr wrap="square" lIns="0" rIns="0" tIns="0" bIns="0" anchor="t">
+            <a:spAutoFit/>
+          </a:bodyPr>
+          <a:lstStyle/>
+          <a:p>
+            <a:pPr algn="l">
+              <a:lnSpc>
+                <a:spcPts val="940"/>
+              </a:lnSpc>
+              <a:spcAft>
+                <a:spcPts val="0"/>
+              </a:spcAft>
+            </a:pPr>
+            <a:r>
+              <a:rPr sz="580" b="0" i="0">
+                <a:solidFill>
+                  <a:srgbClr val="5A6B7F"/>
+                </a:solidFill>
+                <a:latin typeface="Ubuntu Mono"/>
+                <a:ea typeface="Ubuntu Mono"/>
+                <a:cs typeface="Ubuntu Mono"/>
+                <a:sym typeface="Ubuntu Mono"/>
+              </a:rPr>
+              <a:t>BATTERY LIFE</a:t>
+            </a:r>
+          </a:p>
+          <a:p>
+            <a:pPr algn="l">
+              <a:lnSpc>
+                <a:spcPts val="940"/>
+              </a:lnSpc>
+              <a:spcAft>
+                <a:spcPts val="0"/>
+              </a:spcAft>
+            </a:pPr>
+            <a:r>
+              <a:rPr sz="860" b="1" i="0">
+                <a:solidFill>
+                  <a:srgbClr val="194E9A"/>
+                </a:solidFill>
+                <a:latin typeface="Ubuntu Mono"/>
+                <a:ea typeface="Ubuntu Mono"/>
+                <a:cs typeface="Ubuntu Mono"/>
+                <a:sym typeface="Ubuntu Mono"/>
+              </a:rPr>
+              <a:t>400+ h (2 modules)</a:t>
+            </a:r>
+          </a:p>
+        </p:txBody>
+      </p:sp>
+      <p:sp>
+        <p:nvSpPr>
+          <p:cNvPr id="38" name="Rectangle 37"/>
+          <p:cNvSpPr/>
+          <p:nvPr/>
+        </p:nvSpPr>
+        <p:spPr>
+          <a:xfrm>
+            <a:off x="3822700" y="8026400"/>
+            <a:ext cx="1549400" cy="355600"/>
+          </a:xfrm>
+          <a:prstGeom prst="rect">
+            <a:avLst/>
+          </a:prstGeom>
+          <a:solidFill>
+            <a:srgbClr val="FFFFFF"/>
+          </a:solidFill>
+          <a:ln w="9525">
+            <a:solidFill>
+              <a:srgbClr val="C5D6E8"/>
+            </a:solidFill>
+          </a:ln>
+        </p:spPr>
+        <p:txBody>
+          <a:bodyPr rtlCol="0" anchor="ctr"/>
+          <a:lstStyle/>
+          <a:p>
+            <a:pPr algn="ctr"/>
+          </a:p>
+        </p:txBody>
+      </p:sp>
+      <p:sp>
+        <p:nvSpPr>
+          <p:cNvPr id="39" name="TextBox 38"/>
+          <p:cNvSpPr txBox="1"/>
+          <p:nvPr/>
+        </p:nvSpPr>
+        <p:spPr>
+          <a:xfrm>
+            <a:off x="3898900" y="8077200"/>
+            <a:ext cx="1422400" cy="127000"/>
+          </a:xfrm>
+          <a:prstGeom prst="rect">
+            <a:avLst/>
+          </a:prstGeom>
+          <a:noFill/>
+        </p:spPr>
+        <p:txBody>
+          <a:bodyPr wrap="square" lIns="0" rIns="0" tIns="0" bIns="0" anchor="t">
+            <a:spAutoFit/>
+          </a:bodyPr>
+          <a:lstStyle/>
+          <a:p>
+            <a:pPr algn="l">
+              <a:lnSpc>
+                <a:spcPts val="940"/>
+              </a:lnSpc>
+              <a:spcAft>
+                <a:spcPts val="0"/>
+              </a:spcAft>
+            </a:pPr>
+            <a:r>
+              <a:rPr sz="580" b="0" i="0">
+                <a:solidFill>
+                  <a:srgbClr val="5A6B7F"/>
+                </a:solidFill>
+                <a:latin typeface="Ubuntu Mono"/>
+                <a:ea typeface="Ubuntu Mono"/>
+                <a:cs typeface="Ubuntu Mono"/>
+                <a:sym typeface="Ubuntu Mono"/>
+              </a:rPr>
+              <a:t>SHOCK LIMIT</a:t>
+            </a:r>
+          </a:p>
+          <a:p>
+            <a:pPr algn="l">
+              <a:lnSpc>
+                <a:spcPts val="940"/>
+              </a:lnSpc>
+              <a:spcAft>
+                <a:spcPts val="0"/>
+              </a:spcAft>
+            </a:pPr>
+            <a:r>
+              <a:rPr sz="860" b="1" i="0">
+                <a:solidFill>
+                  <a:srgbClr val="194E9A"/>
+                </a:solidFill>
+                <a:latin typeface="Ubuntu Mono"/>
+                <a:ea typeface="Ubuntu Mono"/>
+                <a:cs typeface="Ubuntu Mono"/>
+                <a:sym typeface="Ubuntu Mono"/>
+              </a:rPr>
+              <a:t>500 g</a:t>
+            </a:r>
+          </a:p>
+        </p:txBody>
+      </p:sp>
+      <p:sp>
+        <p:nvSpPr>
+          <p:cNvPr id="40" name="Rectangle 39"/>
+          <p:cNvSpPr/>
+          <p:nvPr/>
+        </p:nvSpPr>
+        <p:spPr>
+          <a:xfrm>
+            <a:off x="5429250" y="8026400"/>
+            <a:ext cx="1549400" cy="355600"/>
+          </a:xfrm>
+          <a:prstGeom prst="rect">
+            <a:avLst/>
+          </a:prstGeom>
+          <a:solidFill>
+            <a:srgbClr val="FFFFFF"/>
+          </a:solidFill>
+          <a:ln w="9525">
+            <a:solidFill>
+              <a:srgbClr val="C5D6E8"/>
+            </a:solidFill>
+          </a:ln>
+        </p:spPr>
+        <p:txBody>
+          <a:bodyPr rtlCol="0" anchor="ctr"/>
+          <a:lstStyle/>
+          <a:p>
+            <a:pPr algn="ctr"/>
+          </a:p>
+        </p:txBody>
+      </p:sp>
+      <p:sp>
+        <p:nvSpPr>
+          <p:cNvPr id="41" name="TextBox 40"/>
+          <p:cNvSpPr txBox="1"/>
+          <p:nvPr/>
+        </p:nvSpPr>
+        <p:spPr>
+          <a:xfrm>
+            <a:off x="5505450" y="8077200"/>
+            <a:ext cx="1422400" cy="127000"/>
+          </a:xfrm>
+          <a:prstGeom prst="rect">
+            <a:avLst/>
+          </a:prstGeom>
+          <a:noFill/>
+        </p:spPr>
+        <p:txBody>
+          <a:bodyPr wrap="square" lIns="0" rIns="0" tIns="0" bIns="0" anchor="t">
+            <a:spAutoFit/>
+          </a:bodyPr>
+          <a:lstStyle/>
+          <a:p>
+            <a:pPr algn="l">
+              <a:lnSpc>
+                <a:spcPts val="940"/>
+              </a:lnSpc>
+              <a:spcAft>
+                <a:spcPts val="0"/>
+              </a:spcAft>
+            </a:pPr>
+            <a:r>
+              <a:rPr sz="580" b="0" i="0">
+                <a:solidFill>
+                  <a:srgbClr val="5A6B7F"/>
+                </a:solidFill>
+                <a:latin typeface="Ubuntu Mono"/>
+                <a:ea typeface="Ubuntu Mono"/>
+                <a:cs typeface="Ubuntu Mono"/>
+                <a:sym typeface="Ubuntu Mono"/>
+              </a:rPr>
+              <a:t>INTERNAL MEMORY</a:t>
+            </a:r>
+          </a:p>
+          <a:p>
+            <a:pPr algn="l">
+              <a:lnSpc>
+                <a:spcPts val="940"/>
+              </a:lnSpc>
+              <a:spcAft>
+                <a:spcPts val="0"/>
+              </a:spcAft>
+            </a:pPr>
+            <a:r>
+              <a:rPr sz="860" b="1" i="0">
+                <a:solidFill>
+                  <a:srgbClr val="194E9A"/>
+                </a:solidFill>
+                <a:latin typeface="Ubuntu Mono"/>
+                <a:ea typeface="Ubuntu Mono"/>
+                <a:cs typeface="Ubuntu Mono"/>
+                <a:sym typeface="Ubuntu Mono"/>
+              </a:rPr>
+              <a:t>24 MB</a:t>
+            </a:r>
+          </a:p>
+        </p:txBody>
+      </p:sp>
+      <p:sp>
+        <p:nvSpPr>
+          <p:cNvPr id="42" name="TextBox 41"/>
+          <p:cNvSpPr txBox="1"/>
+          <p:nvPr/>
+        </p:nvSpPr>
+        <p:spPr>
+          <a:xfrm>
+            <a:off x="609600" y="8483600"/>
+            <a:ext cx="6350000" cy="127000"/>
+          </a:xfrm>
+          <a:prstGeom prst="rect">
+            <a:avLst/>
+          </a:prstGeom>
+          <a:noFill/>
+        </p:spPr>
+        <p:txBody>
+          <a:bodyPr wrap="square" lIns="0" rIns="0" tIns="0" bIns="0" anchor="t">
+            <a:spAutoFit/>
+          </a:bodyPr>
+          <a:lstStyle/>
+          <a:p>
+            <a:pPr algn="l">
+              <a:lnSpc>
+                <a:spcPts val="860"/>
+              </a:lnSpc>
+              <a:spcAft>
+                <a:spcPts val="0"/>
+              </a:spcAft>
+            </a:pPr>
+            <a:r>
+              <a:rPr sz="680" b="1" i="0">
+                <a:solidFill>
+                  <a:srgbClr val="194E9A"/>
+                </a:solidFill>
+                <a:latin typeface="Ubuntu Mono"/>
+                <a:ea typeface="Ubuntu Mono"/>
+                <a:cs typeface="Ubuntu Mono"/>
+                <a:sym typeface="Ubuntu Mono"/>
+              </a:rPr>
+              <a:t>Telemetry: </a:t>
+            </a:r>
+            <a:r>
+              <a:rPr sz="680" b="0" i="0">
                 <a:solidFill>
                   <a:srgbClr val="0B1B2E"/>
                 </a:solidFill>
@@ -9810,21 +8763,501 @@
                 <a:cs typeface="Ubuntu Mono"/>
                 <a:sym typeface="Ubuntu Mono"/>
               </a:rPr>
-              <a:t>Junk mills, pilot and taper mills, section mills and washover shoes to clear and open the hole.</a:t>
-            </a:r>
-          </a:p>
-        </p:txBody>
-      </p:sp>
-      <p:sp>
-        <p:nvSpPr>
-          <p:cNvPr id="41" name="Rectangle 40"/>
+              <a:t>inclination, azimuth, toolface, continuous inclination and azimuth, gamma ray, shock, vibration, RPM, stick-slip, temperature, annular pressure, battery status. Inclination ±0.10°, azimuth ±0.50°, toolface ±0.20°.</a:t>
+            </a:r>
+          </a:p>
+        </p:txBody>
+      </p:sp>
+      <p:sp>
+        <p:nvSpPr>
+          <p:cNvPr id="43" name="TextBox 42"/>
+          <p:cNvSpPr txBox="1"/>
+          <p:nvPr/>
+        </p:nvSpPr>
+        <p:spPr>
+          <a:xfrm>
+            <a:off x="457200" y="9093200"/>
+            <a:ext cx="3810000" cy="127000"/>
+          </a:xfrm>
+          <a:prstGeom prst="rect">
+            <a:avLst/>
+          </a:prstGeom>
+          <a:noFill/>
+        </p:spPr>
+        <p:txBody>
+          <a:bodyPr wrap="square" lIns="0" rIns="0" tIns="0" bIns="0" anchor="t">
+            <a:spAutoFit/>
+          </a:bodyPr>
+          <a:lstStyle/>
+          <a:p>
+            <a:pPr algn="l">
+              <a:spcAft>
+                <a:spcPts val="0"/>
+              </a:spcAft>
+            </a:pPr>
+            <a:r>
+              <a:rPr sz="860" b="1" i="0">
+                <a:solidFill>
+                  <a:srgbClr val="194E9A"/>
+                </a:solidFill>
+                <a:latin typeface="Ubuntu Mono"/>
+                <a:ea typeface="Ubuntu Mono"/>
+                <a:cs typeface="Ubuntu Mono"/>
+                <a:sym typeface="Ubuntu Mono"/>
+              </a:rPr>
+              <a:t>ALSO AVAILABLE</a:t>
+            </a:r>
+          </a:p>
+        </p:txBody>
+      </p:sp>
+      <p:sp>
+        <p:nvSpPr>
+          <p:cNvPr id="44" name="Rectangle 43"/>
           <p:cNvSpPr/>
           <p:nvPr/>
         </p:nvSpPr>
         <p:spPr>
           <a:xfrm>
-            <a:off x="457200" y="9398000"/>
-            <a:ext cx="6642100" cy="787400"/>
+            <a:off x="457200" y="9296400"/>
+            <a:ext cx="2273300" cy="215900"/>
+          </a:xfrm>
+          <a:prstGeom prst="rect">
+            <a:avLst/>
+          </a:prstGeom>
+          <a:solidFill>
+            <a:srgbClr val="FFFFFF"/>
+          </a:solidFill>
+          <a:ln w="9525">
+            <a:solidFill>
+              <a:srgbClr val="0F7FCB"/>
+            </a:solidFill>
+          </a:ln>
+        </p:spPr>
+        <p:txBody>
+          <a:bodyPr rtlCol="0" anchor="ctr"/>
+          <a:lstStyle/>
+          <a:p>
+            <a:pPr algn="ctr"/>
+          </a:p>
+        </p:txBody>
+      </p:sp>
+      <p:sp>
+        <p:nvSpPr>
+          <p:cNvPr id="45" name="TextBox 44"/>
+          <p:cNvSpPr txBox="1"/>
+          <p:nvPr/>
+        </p:nvSpPr>
+        <p:spPr>
+          <a:xfrm>
+            <a:off x="457200" y="9349740"/>
+            <a:ext cx="2273300" cy="127000"/>
+          </a:xfrm>
+          <a:prstGeom prst="rect">
+            <a:avLst/>
+          </a:prstGeom>
+          <a:noFill/>
+        </p:spPr>
+        <p:txBody>
+          <a:bodyPr wrap="square" lIns="0" rIns="0" tIns="0" bIns="0" anchor="t">
+            <a:spAutoFit/>
+          </a:bodyPr>
+          <a:lstStyle/>
+          <a:p>
+            <a:pPr algn="ctr">
+              <a:spcAft>
+                <a:spcPts val="0"/>
+              </a:spcAft>
+            </a:pPr>
+            <a:r>
+              <a:rPr sz="660" b="0" i="0">
+                <a:solidFill>
+                  <a:srgbClr val="194E9A"/>
+                </a:solidFill>
+                <a:latin typeface="Ubuntu Mono"/>
+                <a:ea typeface="Ubuntu Mono"/>
+                <a:cs typeface="Ubuntu Mono"/>
+                <a:sym typeface="Ubuntu Mono"/>
+              </a:rPr>
+              <a:t>Survey equipment (LWD, gyro, dual telemetry)</a:t>
+            </a:r>
+          </a:p>
+        </p:txBody>
+      </p:sp>
+      <p:sp>
+        <p:nvSpPr>
+          <p:cNvPr id="46" name="Rectangle 45"/>
+          <p:cNvSpPr/>
+          <p:nvPr/>
+        </p:nvSpPr>
+        <p:spPr>
+          <a:xfrm>
+            <a:off x="2806700" y="9296400"/>
+            <a:ext cx="796925" cy="215900"/>
+          </a:xfrm>
+          <a:prstGeom prst="rect">
+            <a:avLst/>
+          </a:prstGeom>
+          <a:solidFill>
+            <a:srgbClr val="FFFFFF"/>
+          </a:solidFill>
+          <a:ln w="9525">
+            <a:solidFill>
+              <a:srgbClr val="0F7FCB"/>
+            </a:solidFill>
+          </a:ln>
+        </p:spPr>
+        <p:txBody>
+          <a:bodyPr rtlCol="0" anchor="ctr"/>
+          <a:lstStyle/>
+          <a:p>
+            <a:pPr algn="ctr"/>
+          </a:p>
+        </p:txBody>
+      </p:sp>
+      <p:sp>
+        <p:nvSpPr>
+          <p:cNvPr id="47" name="TextBox 46"/>
+          <p:cNvSpPr txBox="1"/>
+          <p:nvPr/>
+        </p:nvSpPr>
+        <p:spPr>
+          <a:xfrm>
+            <a:off x="2806700" y="9349740"/>
+            <a:ext cx="796925" cy="127000"/>
+          </a:xfrm>
+          <a:prstGeom prst="rect">
+            <a:avLst/>
+          </a:prstGeom>
+          <a:noFill/>
+        </p:spPr>
+        <p:txBody>
+          <a:bodyPr wrap="square" lIns="0" rIns="0" tIns="0" bIns="0" anchor="t">
+            <a:spAutoFit/>
+          </a:bodyPr>
+          <a:lstStyle/>
+          <a:p>
+            <a:pPr algn="ctr">
+              <a:spcAft>
+                <a:spcPts val="0"/>
+              </a:spcAft>
+            </a:pPr>
+            <a:r>
+              <a:rPr sz="660" b="0" i="0">
+                <a:solidFill>
+                  <a:srgbClr val="194E9A"/>
+                </a:solidFill>
+                <a:latin typeface="Ubuntu Mono"/>
+                <a:ea typeface="Ubuntu Mono"/>
+                <a:cs typeface="Ubuntu Mono"/>
+                <a:sym typeface="Ubuntu Mono"/>
+              </a:rPr>
+              <a:t>Turbodrilling</a:t>
+            </a:r>
+          </a:p>
+        </p:txBody>
+      </p:sp>
+      <p:sp>
+        <p:nvSpPr>
+          <p:cNvPr id="48" name="Rectangle 47"/>
+          <p:cNvSpPr/>
+          <p:nvPr/>
+        </p:nvSpPr>
+        <p:spPr>
+          <a:xfrm>
+            <a:off x="3679825" y="9296400"/>
+            <a:ext cx="796925" cy="215900"/>
+          </a:xfrm>
+          <a:prstGeom prst="rect">
+            <a:avLst/>
+          </a:prstGeom>
+          <a:solidFill>
+            <a:srgbClr val="FFFFFF"/>
+          </a:solidFill>
+          <a:ln w="9525">
+            <a:solidFill>
+              <a:srgbClr val="0F7FCB"/>
+            </a:solidFill>
+          </a:ln>
+        </p:spPr>
+        <p:txBody>
+          <a:bodyPr rtlCol="0" anchor="ctr"/>
+          <a:lstStyle/>
+          <a:p>
+            <a:pPr algn="ctr"/>
+          </a:p>
+        </p:txBody>
+      </p:sp>
+      <p:sp>
+        <p:nvSpPr>
+          <p:cNvPr id="49" name="TextBox 48"/>
+          <p:cNvSpPr txBox="1"/>
+          <p:nvPr/>
+        </p:nvSpPr>
+        <p:spPr>
+          <a:xfrm>
+            <a:off x="3679825" y="9349740"/>
+            <a:ext cx="796925" cy="127000"/>
+          </a:xfrm>
+          <a:prstGeom prst="rect">
+            <a:avLst/>
+          </a:prstGeom>
+          <a:noFill/>
+        </p:spPr>
+        <p:txBody>
+          <a:bodyPr wrap="square" lIns="0" rIns="0" tIns="0" bIns="0" anchor="t">
+            <a:spAutoFit/>
+          </a:bodyPr>
+          <a:lstStyle/>
+          <a:p>
+            <a:pPr algn="ctr">
+              <a:spcAft>
+                <a:spcPts val="0"/>
+              </a:spcAft>
+            </a:pPr>
+            <a:r>
+              <a:rPr sz="660" b="0" i="0">
+                <a:solidFill>
+                  <a:srgbClr val="194E9A"/>
+                </a:solidFill>
+                <a:latin typeface="Ubuntu Mono"/>
+                <a:ea typeface="Ubuntu Mono"/>
+                <a:cs typeface="Ubuntu Mono"/>
+                <a:sym typeface="Ubuntu Mono"/>
+              </a:rPr>
+              <a:t>Jar placement</a:t>
+            </a:r>
+          </a:p>
+        </p:txBody>
+      </p:sp>
+      <p:sp>
+        <p:nvSpPr>
+          <p:cNvPr id="50" name="Rectangle 49"/>
+          <p:cNvSpPr/>
+          <p:nvPr/>
+        </p:nvSpPr>
+        <p:spPr>
+          <a:xfrm>
+            <a:off x="4552950" y="9296400"/>
+            <a:ext cx="1225550" cy="215900"/>
+          </a:xfrm>
+          <a:prstGeom prst="rect">
+            <a:avLst/>
+          </a:prstGeom>
+          <a:solidFill>
+            <a:srgbClr val="FFFFFF"/>
+          </a:solidFill>
+          <a:ln w="9525">
+            <a:solidFill>
+              <a:srgbClr val="0F7FCB"/>
+            </a:solidFill>
+          </a:ln>
+        </p:spPr>
+        <p:txBody>
+          <a:bodyPr rtlCol="0" anchor="ctr"/>
+          <a:lstStyle/>
+          <a:p>
+            <a:pPr algn="ctr"/>
+          </a:p>
+        </p:txBody>
+      </p:sp>
+      <p:sp>
+        <p:nvSpPr>
+          <p:cNvPr id="51" name="TextBox 50"/>
+          <p:cNvSpPr txBox="1"/>
+          <p:nvPr/>
+        </p:nvSpPr>
+        <p:spPr>
+          <a:xfrm>
+            <a:off x="4552950" y="9349740"/>
+            <a:ext cx="1225550" cy="127000"/>
+          </a:xfrm>
+          <a:prstGeom prst="rect">
+            <a:avLst/>
+          </a:prstGeom>
+          <a:noFill/>
+        </p:spPr>
+        <p:txBody>
+          <a:bodyPr wrap="square" lIns="0" rIns="0" tIns="0" bIns="0" anchor="t">
+            <a:spAutoFit/>
+          </a:bodyPr>
+          <a:lstStyle/>
+          <a:p>
+            <a:pPr algn="ctr">
+              <a:spcAft>
+                <a:spcPts val="0"/>
+              </a:spcAft>
+            </a:pPr>
+            <a:r>
+              <a:rPr sz="660" b="0" i="0">
+                <a:solidFill>
+                  <a:srgbClr val="194E9A"/>
+                </a:solidFill>
+                <a:latin typeface="Ubuntu Mono"/>
+                <a:ea typeface="Ubuntu Mono"/>
+                <a:cs typeface="Ubuntu Mono"/>
+                <a:sym typeface="Ubuntu Mono"/>
+              </a:rPr>
+              <a:t>Non-magnetic equipment</a:t>
+            </a:r>
+          </a:p>
+        </p:txBody>
+      </p:sp>
+      <p:sp>
+        <p:nvSpPr>
+          <p:cNvPr id="52" name="Rectangle 51"/>
+          <p:cNvSpPr/>
+          <p:nvPr/>
+        </p:nvSpPr>
+        <p:spPr>
+          <a:xfrm>
+            <a:off x="5854700" y="9296400"/>
+            <a:ext cx="1177925" cy="215900"/>
+          </a:xfrm>
+          <a:prstGeom prst="rect">
+            <a:avLst/>
+          </a:prstGeom>
+          <a:solidFill>
+            <a:srgbClr val="FFFFFF"/>
+          </a:solidFill>
+          <a:ln w="9525">
+            <a:solidFill>
+              <a:srgbClr val="0F7FCB"/>
+            </a:solidFill>
+          </a:ln>
+        </p:spPr>
+        <p:txBody>
+          <a:bodyPr rtlCol="0" anchor="ctr"/>
+          <a:lstStyle/>
+          <a:p>
+            <a:pPr algn="ctr"/>
+          </a:p>
+        </p:txBody>
+      </p:sp>
+      <p:sp>
+        <p:nvSpPr>
+          <p:cNvPr id="53" name="TextBox 52"/>
+          <p:cNvSpPr txBox="1"/>
+          <p:nvPr/>
+        </p:nvSpPr>
+        <p:spPr>
+          <a:xfrm>
+            <a:off x="5854700" y="9349740"/>
+            <a:ext cx="1177925" cy="127000"/>
+          </a:xfrm>
+          <a:prstGeom prst="rect">
+            <a:avLst/>
+          </a:prstGeom>
+          <a:noFill/>
+        </p:spPr>
+        <p:txBody>
+          <a:bodyPr wrap="square" lIns="0" rIns="0" tIns="0" bIns="0" anchor="t">
+            <a:spAutoFit/>
+          </a:bodyPr>
+          <a:lstStyle/>
+          <a:p>
+            <a:pPr algn="ctr">
+              <a:spcAft>
+                <a:spcPts val="0"/>
+              </a:spcAft>
+            </a:pPr>
+            <a:r>
+              <a:rPr sz="660" b="0" i="0">
+                <a:solidFill>
+                  <a:srgbClr val="194E9A"/>
+                </a:solidFill>
+                <a:latin typeface="Ubuntu Mono"/>
+                <a:ea typeface="Ubuntu Mono"/>
+                <a:cs typeface="Ubuntu Mono"/>
+                <a:sym typeface="Ubuntu Mono"/>
+              </a:rPr>
+              <a:t>Slimhole tools 3-1/2"</a:t>
+            </a:r>
+          </a:p>
+        </p:txBody>
+      </p:sp>
+      <p:sp>
+        <p:nvSpPr>
+          <p:cNvPr id="54" name="Rectangle 53"/>
+          <p:cNvSpPr/>
+          <p:nvPr/>
+        </p:nvSpPr>
+        <p:spPr>
+          <a:xfrm>
+            <a:off x="457200" y="9563100"/>
+            <a:ext cx="1320800" cy="215900"/>
+          </a:xfrm>
+          <a:prstGeom prst="rect">
+            <a:avLst/>
+          </a:prstGeom>
+          <a:solidFill>
+            <a:srgbClr val="FFFFFF"/>
+          </a:solidFill>
+          <a:ln w="9525">
+            <a:solidFill>
+              <a:srgbClr val="0F7FCB"/>
+            </a:solidFill>
+          </a:ln>
+        </p:spPr>
+        <p:txBody>
+          <a:bodyPr rtlCol="0" anchor="ctr"/>
+          <a:lstStyle/>
+          <a:p>
+            <a:pPr algn="ctr"/>
+          </a:p>
+        </p:txBody>
+      </p:sp>
+      <p:sp>
+        <p:nvSpPr>
+          <p:cNvPr id="55" name="TextBox 54"/>
+          <p:cNvSpPr txBox="1"/>
+          <p:nvPr/>
+        </p:nvSpPr>
+        <p:spPr>
+          <a:xfrm>
+            <a:off x="457200" y="9616440"/>
+            <a:ext cx="1320800" cy="127000"/>
+          </a:xfrm>
+          <a:prstGeom prst="rect">
+            <a:avLst/>
+          </a:prstGeom>
+          <a:noFill/>
+        </p:spPr>
+        <p:txBody>
+          <a:bodyPr wrap="square" lIns="0" rIns="0" tIns="0" bIns="0" anchor="t">
+            <a:spAutoFit/>
+          </a:bodyPr>
+          <a:lstStyle/>
+          <a:p>
+            <a:pPr algn="ctr">
+              <a:spcAft>
+                <a:spcPts val="0"/>
+              </a:spcAft>
+            </a:pPr>
+            <a:r>
+              <a:rPr sz="660" b="0" i="0">
+                <a:solidFill>
+                  <a:srgbClr val="194E9A"/>
+                </a:solidFill>
+                <a:latin typeface="Ubuntu Mono"/>
+                <a:ea typeface="Ubuntu Mono"/>
+                <a:cs typeface="Ubuntu Mono"/>
+                <a:sym typeface="Ubuntu Mono"/>
+              </a:rPr>
+              <a:t>High-temperature systems</a:t>
+            </a:r>
+          </a:p>
+        </p:txBody>
+      </p:sp>
+      <p:sp>
+        <p:nvSpPr>
+          <p:cNvPr id="56" name="Rectangle 55"/>
+          <p:cNvSpPr/>
+          <p:nvPr/>
+        </p:nvSpPr>
+        <p:spPr>
+          <a:xfrm>
+            <a:off x="457200" y="9956800"/>
+            <a:ext cx="6642100" cy="330200"/>
           </a:xfrm>
           <a:prstGeom prst="rect">
             <a:avLst/>
@@ -9846,14 +9279,14 @@
       </p:sp>
       <p:sp>
         <p:nvSpPr>
-          <p:cNvPr id="42" name="TextBox 41"/>
+          <p:cNvPr id="57" name="TextBox 56"/>
           <p:cNvSpPr txBox="1"/>
           <p:nvPr/>
         </p:nvSpPr>
         <p:spPr>
           <a:xfrm>
-            <a:off x="635000" y="9499600"/>
-            <a:ext cx="6350000" cy="127000"/>
+            <a:off x="457200" y="9956800"/>
+            <a:ext cx="6642100" cy="330200"/>
           </a:xfrm>
           <a:prstGeom prst="rect">
             <a:avLst/>
@@ -9861,43 +9294,18 @@
           <a:noFill/>
         </p:spPr>
         <p:txBody>
-          <a:bodyPr wrap="square" lIns="0" rIns="0" tIns="0" bIns="0" anchor="t">
+          <a:bodyPr wrap="square" lIns="0" rIns="0" tIns="0" bIns="0" anchor="ctr">
             <a:spAutoFit/>
           </a:bodyPr>
           <a:lstStyle/>
           <a:p>
-            <a:pPr algn="l">
-              <a:lnSpc>
-                <a:spcPts val="960"/>
-              </a:lnSpc>
-              <a:spcAft>
-                <a:spcPts val="200"/>
-              </a:spcAft>
-            </a:pPr>
-            <a:r>
-              <a:rPr sz="840" b="1" i="0">
-                <a:solidFill>
-                  <a:srgbClr val="1CB2FE"/>
-                </a:solidFill>
-                <a:latin typeface="Ubuntu Mono"/>
-                <a:ea typeface="Ubuntu Mono"/>
-                <a:cs typeface="Ubuntu Mono"/>
-                <a:sym typeface="Ubuntu Mono"/>
-              </a:rPr>
-              <a:t>WHERE WE WORK</a:t>
-            </a:r>
-          </a:p>
-          <a:p>
-            <a:pPr algn="l">
-              <a:lnSpc>
-                <a:spcPts val="960"/>
-              </a:lnSpc>
-              <a:spcAft>
-                <a:spcPts val="200"/>
-              </a:spcAft>
-            </a:pPr>
-            <a:r>
-              <a:rPr sz="740" b="0" i="0">
+            <a:pPr algn="ctr">
+              <a:spcAft>
+                <a:spcPts val="0"/>
+              </a:spcAft>
+            </a:pPr>
+            <a:r>
+              <a:rPr sz="800" b="1" i="0">
                 <a:solidFill>
                   <a:srgbClr val="FFFFFF"/>
                 </a:solidFill>
@@ -9906,14 +9314,14 @@
                 <a:cs typeface="Ubuntu Mono"/>
                 <a:sym typeface="Ubuntu Mono"/>
               </a:rPr>
-              <a:t>Based in Lons (64), south-west France. We mobilise across metropolitan France within 24 to 48 hours in an emergency, and have international experience in Europe and North Africa. A single dedicated team follows each job from diagnosis to resolution.</a:t>
-            </a:r>
-          </a:p>
-        </p:txBody>
-      </p:sp>
-      <p:sp>
-        <p:nvSpPr>
-          <p:cNvPr id="43" name="Rectangle 42"/>
+              <a:t>98,500 m drilled · 75 wells · up to 3,000 m TVD · geothermal, oil &amp; gas, underground gas storage</a:t>
+            </a:r>
+          </a:p>
+        </p:txBody>
+      </p:sp>
+      <p:sp>
+        <p:nvSpPr>
+          <p:cNvPr id="58" name="Rectangle 57"/>
           <p:cNvSpPr/>
           <p:nvPr/>
         </p:nvSpPr>
@@ -9942,7 +9350,7 @@
       </p:sp>
       <p:sp>
         <p:nvSpPr>
-          <p:cNvPr id="44" name="TextBox 43"/>
+          <p:cNvPr id="59" name="TextBox 58"/>
           <p:cNvSpPr txBox="1"/>
           <p:nvPr/>
         </p:nvSpPr>
@@ -9984,7 +9392,7 @@
       </p:sp>
       <p:sp>
         <p:nvSpPr>
-          <p:cNvPr id="45" name="TextBox 44"/>
+          <p:cNvPr id="60" name="TextBox 59"/>
           <p:cNvSpPr txBox="1"/>
           <p:nvPr/>
         </p:nvSpPr>
@@ -10033,6 +9441,1934 @@
 </file>
 
 <file path=ppt/slides/slide5.xml><?xml version="1.0" encoding="utf-8"?>
+<p:sld xmlns:a="http://schemas.openxmlformats.org/drawingml/2006/main" xmlns:p="http://schemas.openxmlformats.org/presentationml/2006/main" xmlns:r="http://schemas.openxmlformats.org/officeDocument/2006/relationships">
+  <p:cSld>
+    <p:spTree>
+      <p:nvGrpSpPr>
+        <p:cNvPr id="1" name=""/>
+        <p:cNvGrpSpPr/>
+        <p:nvPr/>
+      </p:nvGrpSpPr>
+      <p:grpSpPr/>
+      <p:pic>
+        <p:nvPicPr>
+          <p:cNvPr id="2" name="Picture 1" descr="logo.png"/>
+          <p:cNvPicPr>
+            <a:picLocks noChangeAspect="1"/>
+          </p:cNvPicPr>
+          <p:nvPr/>
+        </p:nvPicPr>
+        <p:blipFill>
+          <a:blip r:embed="rId2"/>
+          <a:stretch>
+            <a:fillRect/>
+          </a:stretch>
+        </p:blipFill>
+        <p:spPr>
+          <a:xfrm>
+            <a:off x="5600700" y="279400"/>
+            <a:ext cx="1498600" cy="336115"/>
+          </a:xfrm>
+          <a:prstGeom prst="rect">
+            <a:avLst/>
+          </a:prstGeom>
+        </p:spPr>
+      </p:pic>
+      <p:sp>
+        <p:nvSpPr>
+          <p:cNvPr id="3" name="TextBox 2"/>
+          <p:cNvSpPr txBox="1"/>
+          <p:nvPr/>
+        </p:nvSpPr>
+        <p:spPr>
+          <a:xfrm>
+            <a:off x="457200" y="508000"/>
+            <a:ext cx="5588000" cy="127000"/>
+          </a:xfrm>
+          <a:prstGeom prst="rect">
+            <a:avLst/>
+          </a:prstGeom>
+          <a:noFill/>
+        </p:spPr>
+        <p:txBody>
+          <a:bodyPr wrap="square" lIns="0" rIns="0" tIns="0" bIns="0" anchor="t">
+            <a:spAutoFit/>
+          </a:bodyPr>
+          <a:lstStyle/>
+          <a:p>
+            <a:pPr algn="l">
+              <a:lnSpc>
+                <a:spcPts val="2700"/>
+              </a:lnSpc>
+              <a:spcAft>
+                <a:spcPts val="0"/>
+              </a:spcAft>
+            </a:pPr>
+            <a:r>
+              <a:rPr sz="2400" b="1" i="0">
+                <a:solidFill>
+                  <a:srgbClr val="1CB2FE"/>
+                </a:solidFill>
+                <a:latin typeface="Ubuntu Mono"/>
+                <a:ea typeface="Ubuntu Mono"/>
+                <a:cs typeface="Ubuntu Mono"/>
+                <a:sym typeface="Ubuntu Mono"/>
+              </a:rPr>
+              <a:t>FISHING, WORKOVER
+&amp; PLUG AND ABANDONMENT</a:t>
+            </a:r>
+          </a:p>
+        </p:txBody>
+      </p:sp>
+      <p:sp>
+        <p:nvSpPr>
+          <p:cNvPr id="4" name="Rectangle 3"/>
+          <p:cNvSpPr/>
+          <p:nvPr/>
+        </p:nvSpPr>
+        <p:spPr>
+          <a:xfrm>
+            <a:off x="457200" y="1447800"/>
+            <a:ext cx="44450" cy="711200"/>
+          </a:xfrm>
+          <a:prstGeom prst="rect">
+            <a:avLst/>
+          </a:prstGeom>
+          <a:solidFill>
+            <a:srgbClr val="0F7FCB"/>
+          </a:solidFill>
+          <a:ln>
+            <a:noFill/>
+          </a:ln>
+        </p:spPr>
+        <p:txBody>
+          <a:bodyPr rtlCol="0" anchor="ctr"/>
+          <a:lstStyle/>
+          <a:p>
+            <a:pPr algn="ctr"/>
+          </a:p>
+        </p:txBody>
+      </p:sp>
+      <p:sp>
+        <p:nvSpPr>
+          <p:cNvPr id="5" name="TextBox 4"/>
+          <p:cNvSpPr txBox="1"/>
+          <p:nvPr/>
+        </p:nvSpPr>
+        <p:spPr>
+          <a:xfrm>
+            <a:off x="584200" y="1447800"/>
+            <a:ext cx="6515100" cy="127000"/>
+          </a:xfrm>
+          <a:prstGeom prst="rect">
+            <a:avLst/>
+          </a:prstGeom>
+          <a:noFill/>
+        </p:spPr>
+        <p:txBody>
+          <a:bodyPr wrap="square" lIns="0" rIns="0" tIns="0" bIns="0" anchor="t">
+            <a:spAutoFit/>
+          </a:bodyPr>
+          <a:lstStyle/>
+          <a:p>
+            <a:pPr algn="l">
+              <a:lnSpc>
+                <a:spcPts val="1100"/>
+              </a:lnSpc>
+              <a:spcAft>
+                <a:spcPts val="400"/>
+              </a:spcAft>
+            </a:pPr>
+            <a:r>
+              <a:rPr sz="800" b="0" i="0">
+                <a:solidFill>
+                  <a:srgbClr val="0B1B2E"/>
+                </a:solidFill>
+                <a:latin typeface="Ubuntu Mono"/>
+                <a:ea typeface="Ubuntu Mono"/>
+                <a:cs typeface="Ubuntu Mono"/>
+                <a:sym typeface="Ubuntu Mono"/>
+              </a:rPr>
+              <a:t>Fishing, workover and plug &amp; abandonment (P&amp;A): the full range of operations to recover, restore and secure wells, during drilling, workover or abandonment. Our fishing team responds quickly with a large rental and sale fleet, backed by our own workshop and custom tool design.</a:t>
+            </a:r>
+          </a:p>
+        </p:txBody>
+      </p:sp>
+      <p:sp>
+        <p:nvSpPr>
+          <p:cNvPr id="6" name="Rectangle 5"/>
+          <p:cNvSpPr/>
+          <p:nvPr/>
+        </p:nvSpPr>
+        <p:spPr>
+          <a:xfrm>
+            <a:off x="457200" y="2311400"/>
+            <a:ext cx="1587500" cy="660400"/>
+          </a:xfrm>
+          <a:prstGeom prst="rect">
+            <a:avLst/>
+          </a:prstGeom>
+          <a:solidFill>
+            <a:srgbClr val="194E9A"/>
+          </a:solidFill>
+          <a:ln>
+            <a:noFill/>
+          </a:ln>
+        </p:spPr>
+        <p:txBody>
+          <a:bodyPr rtlCol="0" anchor="ctr"/>
+          <a:lstStyle/>
+          <a:p>
+            <a:pPr algn="ctr"/>
+          </a:p>
+        </p:txBody>
+      </p:sp>
+      <p:sp>
+        <p:nvSpPr>
+          <p:cNvPr id="7" name="TextBox 6"/>
+          <p:cNvSpPr txBox="1"/>
+          <p:nvPr/>
+        </p:nvSpPr>
+        <p:spPr>
+          <a:xfrm>
+            <a:off x="457200" y="2417064"/>
+            <a:ext cx="1587500" cy="127000"/>
+          </a:xfrm>
+          <a:prstGeom prst="rect">
+            <a:avLst/>
+          </a:prstGeom>
+          <a:noFill/>
+        </p:spPr>
+        <p:txBody>
+          <a:bodyPr wrap="square" lIns="0" rIns="0" tIns="0" bIns="0" anchor="t">
+            <a:spAutoFit/>
+          </a:bodyPr>
+          <a:lstStyle/>
+          <a:p>
+            <a:pPr algn="ctr">
+              <a:lnSpc>
+                <a:spcPts val="2500"/>
+              </a:lnSpc>
+              <a:spcAft>
+                <a:spcPts val="0"/>
+              </a:spcAft>
+            </a:pPr>
+            <a:r>
+              <a:rPr sz="2200" b="1" i="0">
+                <a:solidFill>
+                  <a:srgbClr val="FFFFFF"/>
+                </a:solidFill>
+                <a:latin typeface="Ubuntu Mono"/>
+                <a:ea typeface="Ubuntu Mono"/>
+                <a:cs typeface="Ubuntu Mono"/>
+                <a:sym typeface="Ubuntu Mono"/>
+              </a:rPr>
+              <a:t>2,500</a:t>
+            </a:r>
+          </a:p>
+        </p:txBody>
+      </p:sp>
+      <p:sp>
+        <p:nvSpPr>
+          <p:cNvPr id="8" name="TextBox 7"/>
+          <p:cNvSpPr txBox="1"/>
+          <p:nvPr/>
+        </p:nvSpPr>
+        <p:spPr>
+          <a:xfrm>
+            <a:off x="533400" y="2759964"/>
+            <a:ext cx="1435100" cy="127000"/>
+          </a:xfrm>
+          <a:prstGeom prst="rect">
+            <a:avLst/>
+          </a:prstGeom>
+          <a:noFill/>
+        </p:spPr>
+        <p:txBody>
+          <a:bodyPr wrap="square" lIns="0" rIns="0" tIns="0" bIns="0" anchor="t">
+            <a:spAutoFit/>
+          </a:bodyPr>
+          <a:lstStyle/>
+          <a:p>
+            <a:pPr algn="ctr">
+              <a:lnSpc>
+                <a:spcPts val="840"/>
+              </a:lnSpc>
+              <a:spcAft>
+                <a:spcPts val="0"/>
+              </a:spcAft>
+            </a:pPr>
+            <a:r>
+              <a:rPr sz="690" b="0" i="0">
+                <a:solidFill>
+                  <a:srgbClr val="FFFFFF"/>
+                </a:solidFill>
+                <a:latin typeface="Ubuntu Mono"/>
+                <a:ea typeface="Ubuntu Mono"/>
+                <a:cs typeface="Ubuntu Mono"/>
+                <a:sym typeface="Ubuntu Mono"/>
+              </a:rPr>
+              <a:t>tools available</a:t>
+            </a:r>
+          </a:p>
+        </p:txBody>
+      </p:sp>
+      <p:sp>
+        <p:nvSpPr>
+          <p:cNvPr id="9" name="Rectangle 8"/>
+          <p:cNvSpPr/>
+          <p:nvPr/>
+        </p:nvSpPr>
+        <p:spPr>
+          <a:xfrm>
+            <a:off x="2120900" y="2311400"/>
+            <a:ext cx="1587500" cy="660400"/>
+          </a:xfrm>
+          <a:prstGeom prst="rect">
+            <a:avLst/>
+          </a:prstGeom>
+          <a:solidFill>
+            <a:srgbClr val="0F7FCB"/>
+          </a:solidFill>
+          <a:ln>
+            <a:noFill/>
+          </a:ln>
+        </p:spPr>
+        <p:txBody>
+          <a:bodyPr rtlCol="0" anchor="ctr"/>
+          <a:lstStyle/>
+          <a:p>
+            <a:pPr algn="ctr"/>
+          </a:p>
+        </p:txBody>
+      </p:sp>
+      <p:sp>
+        <p:nvSpPr>
+          <p:cNvPr id="10" name="TextBox 9"/>
+          <p:cNvSpPr txBox="1"/>
+          <p:nvPr/>
+        </p:nvSpPr>
+        <p:spPr>
+          <a:xfrm>
+            <a:off x="2120900" y="2417064"/>
+            <a:ext cx="1587500" cy="127000"/>
+          </a:xfrm>
+          <a:prstGeom prst="rect">
+            <a:avLst/>
+          </a:prstGeom>
+          <a:noFill/>
+        </p:spPr>
+        <p:txBody>
+          <a:bodyPr wrap="square" lIns="0" rIns="0" tIns="0" bIns="0" anchor="t">
+            <a:spAutoFit/>
+          </a:bodyPr>
+          <a:lstStyle/>
+          <a:p>
+            <a:pPr algn="ctr">
+              <a:lnSpc>
+                <a:spcPts val="2300"/>
+              </a:lnSpc>
+              <a:spcAft>
+                <a:spcPts val="0"/>
+              </a:spcAft>
+            </a:pPr>
+            <a:r>
+              <a:rPr sz="2000" b="1" i="0">
+                <a:solidFill>
+                  <a:srgbClr val="FFFFFF"/>
+                </a:solidFill>
+                <a:latin typeface="Ubuntu Mono"/>
+                <a:ea typeface="Ubuntu Mono"/>
+                <a:cs typeface="Ubuntu Mono"/>
+                <a:sym typeface="Ubuntu Mono"/>
+              </a:rPr>
+              <a:t>24 / 48h</a:t>
+            </a:r>
+          </a:p>
+        </p:txBody>
+      </p:sp>
+      <p:sp>
+        <p:nvSpPr>
+          <p:cNvPr id="11" name="TextBox 10"/>
+          <p:cNvSpPr txBox="1"/>
+          <p:nvPr/>
+        </p:nvSpPr>
+        <p:spPr>
+          <a:xfrm>
+            <a:off x="2197100" y="2734564"/>
+            <a:ext cx="1435100" cy="127000"/>
+          </a:xfrm>
+          <a:prstGeom prst="rect">
+            <a:avLst/>
+          </a:prstGeom>
+          <a:noFill/>
+        </p:spPr>
+        <p:txBody>
+          <a:bodyPr wrap="square" lIns="0" rIns="0" tIns="0" bIns="0" anchor="t">
+            <a:spAutoFit/>
+          </a:bodyPr>
+          <a:lstStyle/>
+          <a:p>
+            <a:pPr algn="ctr">
+              <a:lnSpc>
+                <a:spcPts val="840"/>
+              </a:lnSpc>
+              <a:spcAft>
+                <a:spcPts val="0"/>
+              </a:spcAft>
+            </a:pPr>
+            <a:r>
+              <a:rPr sz="690" b="0" i="0">
+                <a:solidFill>
+                  <a:srgbClr val="FFFFFF"/>
+                </a:solidFill>
+                <a:latin typeface="Ubuntu Mono"/>
+                <a:ea typeface="Ubuntu Mono"/>
+                <a:cs typeface="Ubuntu Mono"/>
+                <a:sym typeface="Ubuntu Mono"/>
+              </a:rPr>
+              <a:t>response time</a:t>
+            </a:r>
+          </a:p>
+        </p:txBody>
+      </p:sp>
+      <p:sp>
+        <p:nvSpPr>
+          <p:cNvPr id="12" name="Rectangle 11"/>
+          <p:cNvSpPr/>
+          <p:nvPr/>
+        </p:nvSpPr>
+        <p:spPr>
+          <a:xfrm>
+            <a:off x="3784600" y="2311400"/>
+            <a:ext cx="1587500" cy="660400"/>
+          </a:xfrm>
+          <a:prstGeom prst="rect">
+            <a:avLst/>
+          </a:prstGeom>
+          <a:solidFill>
+            <a:srgbClr val="2BAEF6"/>
+          </a:solidFill>
+          <a:ln>
+            <a:noFill/>
+          </a:ln>
+        </p:spPr>
+        <p:txBody>
+          <a:bodyPr rtlCol="0" anchor="ctr"/>
+          <a:lstStyle/>
+          <a:p>
+            <a:pPr algn="ctr"/>
+          </a:p>
+        </p:txBody>
+      </p:sp>
+      <p:sp>
+        <p:nvSpPr>
+          <p:cNvPr id="13" name="TextBox 12"/>
+          <p:cNvSpPr txBox="1"/>
+          <p:nvPr/>
+        </p:nvSpPr>
+        <p:spPr>
+          <a:xfrm>
+            <a:off x="3784600" y="2417064"/>
+            <a:ext cx="1587500" cy="127000"/>
+          </a:xfrm>
+          <a:prstGeom prst="rect">
+            <a:avLst/>
+          </a:prstGeom>
+          <a:noFill/>
+        </p:spPr>
+        <p:txBody>
+          <a:bodyPr wrap="square" lIns="0" rIns="0" tIns="0" bIns="0" anchor="t">
+            <a:spAutoFit/>
+          </a:bodyPr>
+          <a:lstStyle/>
+          <a:p>
+            <a:pPr algn="ctr">
+              <a:lnSpc>
+                <a:spcPts val="2500"/>
+              </a:lnSpc>
+              <a:spcAft>
+                <a:spcPts val="0"/>
+              </a:spcAft>
+            </a:pPr>
+            <a:r>
+              <a:rPr sz="2200" b="1" i="0">
+                <a:solidFill>
+                  <a:srgbClr val="FFFFFF"/>
+                </a:solidFill>
+                <a:latin typeface="Ubuntu Mono"/>
+                <a:ea typeface="Ubuntu Mono"/>
+                <a:cs typeface="Ubuntu Mono"/>
+                <a:sym typeface="Ubuntu Mono"/>
+              </a:rPr>
+              <a:t>142</a:t>
+            </a:r>
+          </a:p>
+        </p:txBody>
+      </p:sp>
+      <p:sp>
+        <p:nvSpPr>
+          <p:cNvPr id="14" name="TextBox 13"/>
+          <p:cNvSpPr txBox="1"/>
+          <p:nvPr/>
+        </p:nvSpPr>
+        <p:spPr>
+          <a:xfrm>
+            <a:off x="3860800" y="2759964"/>
+            <a:ext cx="1435100" cy="127000"/>
+          </a:xfrm>
+          <a:prstGeom prst="rect">
+            <a:avLst/>
+          </a:prstGeom>
+          <a:noFill/>
+        </p:spPr>
+        <p:txBody>
+          <a:bodyPr wrap="square" lIns="0" rIns="0" tIns="0" bIns="0" anchor="t">
+            <a:spAutoFit/>
+          </a:bodyPr>
+          <a:lstStyle/>
+          <a:p>
+            <a:pPr algn="ctr">
+              <a:lnSpc>
+                <a:spcPts val="840"/>
+              </a:lnSpc>
+              <a:spcAft>
+                <a:spcPts val="0"/>
+              </a:spcAft>
+            </a:pPr>
+            <a:r>
+              <a:rPr sz="690" b="0" i="0">
+                <a:solidFill>
+                  <a:srgbClr val="FFFFFF"/>
+                </a:solidFill>
+                <a:latin typeface="Ubuntu Mono"/>
+                <a:ea typeface="Ubuntu Mono"/>
+                <a:cs typeface="Ubuntu Mono"/>
+                <a:sym typeface="Ubuntu Mono"/>
+              </a:rPr>
+              <a:t>fishing, workover and P&amp;A interventions</a:t>
+            </a:r>
+          </a:p>
+        </p:txBody>
+      </p:sp>
+      <p:sp>
+        <p:nvSpPr>
+          <p:cNvPr id="15" name="Rectangle 14"/>
+          <p:cNvSpPr/>
+          <p:nvPr/>
+        </p:nvSpPr>
+        <p:spPr>
+          <a:xfrm>
+            <a:off x="5448300" y="2311400"/>
+            <a:ext cx="1651000" cy="660400"/>
+          </a:xfrm>
+          <a:prstGeom prst="rect">
+            <a:avLst/>
+          </a:prstGeom>
+          <a:solidFill>
+            <a:srgbClr val="194E9A"/>
+          </a:solidFill>
+          <a:ln>
+            <a:noFill/>
+          </a:ln>
+        </p:spPr>
+        <p:txBody>
+          <a:bodyPr rtlCol="0" anchor="ctr"/>
+          <a:lstStyle/>
+          <a:p>
+            <a:pPr algn="ctr"/>
+          </a:p>
+        </p:txBody>
+      </p:sp>
+      <p:sp>
+        <p:nvSpPr>
+          <p:cNvPr id="16" name="TextBox 15"/>
+          <p:cNvSpPr txBox="1"/>
+          <p:nvPr/>
+        </p:nvSpPr>
+        <p:spPr>
+          <a:xfrm>
+            <a:off x="5448300" y="2417064"/>
+            <a:ext cx="1651000" cy="127000"/>
+          </a:xfrm>
+          <a:prstGeom prst="rect">
+            <a:avLst/>
+          </a:prstGeom>
+          <a:noFill/>
+        </p:spPr>
+        <p:txBody>
+          <a:bodyPr wrap="square" lIns="0" rIns="0" tIns="0" bIns="0" anchor="t">
+            <a:spAutoFit/>
+          </a:bodyPr>
+          <a:lstStyle/>
+          <a:p>
+            <a:pPr algn="ctr">
+              <a:lnSpc>
+                <a:spcPts val="2000"/>
+              </a:lnSpc>
+              <a:spcAft>
+                <a:spcPts val="0"/>
+              </a:spcAft>
+            </a:pPr>
+            <a:r>
+              <a:rPr sz="1700" b="1" i="0">
+                <a:solidFill>
+                  <a:srgbClr val="FFFFFF"/>
+                </a:solidFill>
+                <a:latin typeface="Ubuntu Mono"/>
+                <a:ea typeface="Ubuntu Mono"/>
+                <a:cs typeface="Ubuntu Mono"/>
+                <a:sym typeface="Ubuntu Mono"/>
+              </a:rPr>
+              <a:t>ISO 9001</a:t>
+            </a:r>
+          </a:p>
+        </p:txBody>
+      </p:sp>
+      <p:sp>
+        <p:nvSpPr>
+          <p:cNvPr id="17" name="TextBox 16"/>
+          <p:cNvSpPr txBox="1"/>
+          <p:nvPr/>
+        </p:nvSpPr>
+        <p:spPr>
+          <a:xfrm>
+            <a:off x="5524500" y="2696464"/>
+            <a:ext cx="1498600" cy="127000"/>
+          </a:xfrm>
+          <a:prstGeom prst="rect">
+            <a:avLst/>
+          </a:prstGeom>
+          <a:noFill/>
+        </p:spPr>
+        <p:txBody>
+          <a:bodyPr wrap="square" lIns="0" rIns="0" tIns="0" bIns="0" anchor="t">
+            <a:spAutoFit/>
+          </a:bodyPr>
+          <a:lstStyle/>
+          <a:p>
+            <a:pPr algn="ctr">
+              <a:lnSpc>
+                <a:spcPts val="840"/>
+              </a:lnSpc>
+              <a:spcAft>
+                <a:spcPts val="0"/>
+              </a:spcAft>
+            </a:pPr>
+            <a:r>
+              <a:rPr sz="690" b="0" i="0">
+                <a:solidFill>
+                  <a:srgbClr val="FFFFFF"/>
+                </a:solidFill>
+                <a:latin typeface="Ubuntu Mono"/>
+                <a:ea typeface="Ubuntu Mono"/>
+                <a:cs typeface="Ubuntu Mono"/>
+                <a:sym typeface="Ubuntu Mono"/>
+              </a:rPr>
+              <a:t>certified quality management</a:t>
+            </a:r>
+          </a:p>
+        </p:txBody>
+      </p:sp>
+      <p:sp>
+        <p:nvSpPr>
+          <p:cNvPr id="18" name="Rectangle 17"/>
+          <p:cNvSpPr/>
+          <p:nvPr/>
+        </p:nvSpPr>
+        <p:spPr>
+          <a:xfrm>
+            <a:off x="457200" y="3149600"/>
+            <a:ext cx="2120900" cy="1549400"/>
+          </a:xfrm>
+          <a:prstGeom prst="rect">
+            <a:avLst/>
+          </a:prstGeom>
+          <a:solidFill>
+            <a:srgbClr val="194E9A"/>
+          </a:solidFill>
+          <a:ln>
+            <a:noFill/>
+          </a:ln>
+        </p:spPr>
+        <p:txBody>
+          <a:bodyPr rtlCol="0" anchor="ctr"/>
+          <a:lstStyle/>
+          <a:p>
+            <a:pPr algn="ctr"/>
+          </a:p>
+        </p:txBody>
+      </p:sp>
+      <p:sp>
+        <p:nvSpPr>
+          <p:cNvPr id="19" name="TextBox 18"/>
+          <p:cNvSpPr txBox="1"/>
+          <p:nvPr/>
+        </p:nvSpPr>
+        <p:spPr>
+          <a:xfrm>
+            <a:off x="558800" y="3238500"/>
+            <a:ext cx="1917700" cy="127000"/>
+          </a:xfrm>
+          <a:prstGeom prst="rect">
+            <a:avLst/>
+          </a:prstGeom>
+          <a:noFill/>
+        </p:spPr>
+        <p:txBody>
+          <a:bodyPr wrap="square" lIns="0" rIns="0" tIns="0" bIns="0" anchor="t">
+            <a:spAutoFit/>
+          </a:bodyPr>
+          <a:lstStyle/>
+          <a:p>
+            <a:pPr algn="l">
+              <a:spcAft>
+                <a:spcPts val="0"/>
+              </a:spcAft>
+            </a:pPr>
+            <a:r>
+              <a:rPr sz="860" b="1" i="0">
+                <a:solidFill>
+                  <a:srgbClr val="FFFFFF"/>
+                </a:solidFill>
+                <a:latin typeface="Ubuntu Mono"/>
+                <a:ea typeface="Ubuntu Mono"/>
+                <a:cs typeface="Ubuntu Mono"/>
+                <a:sym typeface="Ubuntu Mono"/>
+              </a:rPr>
+              <a:t>FISHING</a:t>
+            </a:r>
+          </a:p>
+        </p:txBody>
+      </p:sp>
+      <p:sp>
+        <p:nvSpPr>
+          <p:cNvPr id="20" name="TextBox 19"/>
+          <p:cNvSpPr txBox="1"/>
+          <p:nvPr/>
+        </p:nvSpPr>
+        <p:spPr>
+          <a:xfrm>
+            <a:off x="558800" y="3429000"/>
+            <a:ext cx="1917700" cy="127000"/>
+          </a:xfrm>
+          <a:prstGeom prst="rect">
+            <a:avLst/>
+          </a:prstGeom>
+          <a:noFill/>
+        </p:spPr>
+        <p:txBody>
+          <a:bodyPr wrap="square" lIns="0" rIns="0" tIns="0" bIns="0" anchor="t">
+            <a:spAutoFit/>
+          </a:bodyPr>
+          <a:lstStyle/>
+          <a:p>
+            <a:pPr algn="l">
+              <a:lnSpc>
+                <a:spcPts val="930"/>
+              </a:lnSpc>
+              <a:spcAft>
+                <a:spcPts val="200"/>
+              </a:spcAft>
+            </a:pPr>
+            <a:r>
+              <a:rPr sz="710" b="0" i="0">
+                <a:solidFill>
+                  <a:srgbClr val="FFFFFF"/>
+                </a:solidFill>
+                <a:latin typeface="Ubuntu Mono"/>
+                <a:ea typeface="Ubuntu Mono"/>
+                <a:cs typeface="Ubuntu Mono"/>
+                <a:sym typeface="Ubuntu Mono"/>
+              </a:rPr>
+              <a:t>Recovery of rods, drill strings, BHAs and stuck or lost tools.</a:t>
+            </a:r>
+          </a:p>
+          <a:p>
+            <a:pPr algn="l">
+              <a:lnSpc>
+                <a:spcPts val="930"/>
+              </a:lnSpc>
+              <a:spcAft>
+                <a:spcPts val="200"/>
+              </a:spcAft>
+            </a:pPr>
+            <a:r>
+              <a:rPr sz="710" b="0" i="0">
+                <a:solidFill>
+                  <a:srgbClr val="FFFFFF"/>
+                </a:solidFill>
+                <a:latin typeface="Ubuntu Mono"/>
+                <a:ea typeface="Ubuntu Mono"/>
+                <a:cs typeface="Ubuntu Mono"/>
+                <a:sym typeface="Ubuntu Mono"/>
+              </a:rPr>
+              <a:t>Jarring and impact tools, shock tools and intensifiers.</a:t>
+            </a:r>
+          </a:p>
+          <a:p>
+            <a:pPr algn="l">
+              <a:lnSpc>
+                <a:spcPts val="930"/>
+              </a:lnSpc>
+              <a:spcAft>
+                <a:spcPts val="200"/>
+              </a:spcAft>
+            </a:pPr>
+            <a:r>
+              <a:rPr sz="710" b="0" i="0">
+                <a:solidFill>
+                  <a:srgbClr val="FFFFFF"/>
+                </a:solidFill>
+                <a:latin typeface="Ubuntu Mono"/>
+                <a:ea typeface="Ubuntu Mono"/>
+                <a:cs typeface="Ubuntu Mono"/>
+                <a:sym typeface="Ubuntu Mono"/>
+              </a:rPr>
+              <a:t>Overshots, spears, die collars, magnets, taper taps.</a:t>
+            </a:r>
+          </a:p>
+          <a:p>
+            <a:pPr algn="l">
+              <a:lnSpc>
+                <a:spcPts val="930"/>
+              </a:lnSpc>
+              <a:spcAft>
+                <a:spcPts val="200"/>
+              </a:spcAft>
+            </a:pPr>
+            <a:r>
+              <a:rPr sz="710" b="0" i="0">
+                <a:solidFill>
+                  <a:srgbClr val="FFFFFF"/>
+                </a:solidFill>
+                <a:latin typeface="Ubuntu Mono"/>
+                <a:ea typeface="Ubuntu Mono"/>
+                <a:cs typeface="Ubuntu Mono"/>
+                <a:sym typeface="Ubuntu Mono"/>
+              </a:rPr>
+              <a:t>Tools on site for rental or purchase.</a:t>
+            </a:r>
+          </a:p>
+        </p:txBody>
+      </p:sp>
+      <p:sp>
+        <p:nvSpPr>
+          <p:cNvPr id="21" name="Rectangle 20"/>
+          <p:cNvSpPr/>
+          <p:nvPr/>
+        </p:nvSpPr>
+        <p:spPr>
+          <a:xfrm>
+            <a:off x="2717800" y="3149600"/>
+            <a:ext cx="2120900" cy="1549400"/>
+          </a:xfrm>
+          <a:prstGeom prst="rect">
+            <a:avLst/>
+          </a:prstGeom>
+          <a:solidFill>
+            <a:srgbClr val="0F7FCB"/>
+          </a:solidFill>
+          <a:ln>
+            <a:noFill/>
+          </a:ln>
+        </p:spPr>
+        <p:txBody>
+          <a:bodyPr rtlCol="0" anchor="ctr"/>
+          <a:lstStyle/>
+          <a:p>
+            <a:pPr algn="ctr"/>
+          </a:p>
+        </p:txBody>
+      </p:sp>
+      <p:sp>
+        <p:nvSpPr>
+          <p:cNvPr id="22" name="TextBox 21"/>
+          <p:cNvSpPr txBox="1"/>
+          <p:nvPr/>
+        </p:nvSpPr>
+        <p:spPr>
+          <a:xfrm>
+            <a:off x="2819400" y="3238500"/>
+            <a:ext cx="1917700" cy="127000"/>
+          </a:xfrm>
+          <a:prstGeom prst="rect">
+            <a:avLst/>
+          </a:prstGeom>
+          <a:noFill/>
+        </p:spPr>
+        <p:txBody>
+          <a:bodyPr wrap="square" lIns="0" rIns="0" tIns="0" bIns="0" anchor="t">
+            <a:spAutoFit/>
+          </a:bodyPr>
+          <a:lstStyle/>
+          <a:p>
+            <a:pPr algn="l">
+              <a:spcAft>
+                <a:spcPts val="0"/>
+              </a:spcAft>
+            </a:pPr>
+            <a:r>
+              <a:rPr sz="860" b="1" i="0">
+                <a:solidFill>
+                  <a:srgbClr val="FFFFFF"/>
+                </a:solidFill>
+                <a:latin typeface="Ubuntu Mono"/>
+                <a:ea typeface="Ubuntu Mono"/>
+                <a:cs typeface="Ubuntu Mono"/>
+                <a:sym typeface="Ubuntu Mono"/>
+              </a:rPr>
+              <a:t>WORKOVER</a:t>
+            </a:r>
+          </a:p>
+        </p:txBody>
+      </p:sp>
+      <p:sp>
+        <p:nvSpPr>
+          <p:cNvPr id="23" name="TextBox 22"/>
+          <p:cNvSpPr txBox="1"/>
+          <p:nvPr/>
+        </p:nvSpPr>
+        <p:spPr>
+          <a:xfrm>
+            <a:off x="2819400" y="3429000"/>
+            <a:ext cx="1917700" cy="127000"/>
+          </a:xfrm>
+          <a:prstGeom prst="rect">
+            <a:avLst/>
+          </a:prstGeom>
+          <a:noFill/>
+        </p:spPr>
+        <p:txBody>
+          <a:bodyPr wrap="square" lIns="0" rIns="0" tIns="0" bIns="0" anchor="t">
+            <a:spAutoFit/>
+          </a:bodyPr>
+          <a:lstStyle/>
+          <a:p>
+            <a:pPr algn="l">
+              <a:lnSpc>
+                <a:spcPts val="930"/>
+              </a:lnSpc>
+              <a:spcAft>
+                <a:spcPts val="200"/>
+              </a:spcAft>
+            </a:pPr>
+            <a:r>
+              <a:rPr sz="710" b="0" i="0">
+                <a:solidFill>
+                  <a:srgbClr val="FFFFFF"/>
+                </a:solidFill>
+                <a:latin typeface="Ubuntu Mono"/>
+                <a:ea typeface="Ubuntu Mono"/>
+                <a:cs typeface="Ubuntu Mono"/>
+                <a:sym typeface="Ubuntu Mono"/>
+              </a:rPr>
+              <a:t>Well restoration and preparation for return to production.</a:t>
+            </a:r>
+          </a:p>
+          <a:p>
+            <a:pPr algn="l">
+              <a:lnSpc>
+                <a:spcPts val="930"/>
+              </a:lnSpc>
+              <a:spcAft>
+                <a:spcPts val="200"/>
+              </a:spcAft>
+            </a:pPr>
+            <a:r>
+              <a:rPr sz="710" b="0" i="0">
+                <a:solidFill>
+                  <a:srgbClr val="FFFFFF"/>
+                </a:solidFill>
+                <a:latin typeface="Ubuntu Mono"/>
+                <a:ea typeface="Ubuntu Mono"/>
+                <a:cs typeface="Ubuntu Mono"/>
+                <a:sym typeface="Ubuntu Mono"/>
+              </a:rPr>
+              <a:t>Section milling and wash over.</a:t>
+            </a:r>
+          </a:p>
+          <a:p>
+            <a:pPr algn="l">
+              <a:lnSpc>
+                <a:spcPts val="930"/>
+              </a:lnSpc>
+              <a:spcAft>
+                <a:spcPts val="200"/>
+              </a:spcAft>
+            </a:pPr>
+            <a:r>
+              <a:rPr sz="710" b="0" i="0">
+                <a:solidFill>
+                  <a:srgbClr val="FFFFFF"/>
+                </a:solidFill>
+                <a:latin typeface="Ubuntu Mono"/>
+                <a:ea typeface="Ubuntu Mono"/>
+                <a:cs typeface="Ubuntu Mono"/>
+                <a:sym typeface="Ubuntu Mono"/>
+              </a:rPr>
+              <a:t>Casing repair, scrapers, impression blocks, junk baskets.</a:t>
+            </a:r>
+          </a:p>
+          <a:p>
+            <a:pPr algn="l">
+              <a:lnSpc>
+                <a:spcPts val="930"/>
+              </a:lnSpc>
+              <a:spcAft>
+                <a:spcPts val="200"/>
+              </a:spcAft>
+            </a:pPr>
+            <a:r>
+              <a:rPr sz="710" b="0" i="0">
+                <a:solidFill>
+                  <a:srgbClr val="FFFFFF"/>
+                </a:solidFill>
+                <a:latin typeface="Ubuntu Mono"/>
+                <a:ea typeface="Ubuntu Mono"/>
+                <a:cs typeface="Ubuntu Mono"/>
+                <a:sym typeface="Ubuntu Mono"/>
+              </a:rPr>
+              <a:t>Enlargement and reaming with RTU, DTU and SPX underreamers.</a:t>
+            </a:r>
+          </a:p>
+        </p:txBody>
+      </p:sp>
+      <p:sp>
+        <p:nvSpPr>
+          <p:cNvPr id="24" name="Rectangle 23"/>
+          <p:cNvSpPr/>
+          <p:nvPr/>
+        </p:nvSpPr>
+        <p:spPr>
+          <a:xfrm>
+            <a:off x="4978400" y="3149600"/>
+            <a:ext cx="2120900" cy="1549400"/>
+          </a:xfrm>
+          <a:prstGeom prst="rect">
+            <a:avLst/>
+          </a:prstGeom>
+          <a:solidFill>
+            <a:srgbClr val="2BAEF6"/>
+          </a:solidFill>
+          <a:ln>
+            <a:noFill/>
+          </a:ln>
+        </p:spPr>
+        <p:txBody>
+          <a:bodyPr rtlCol="0" anchor="ctr"/>
+          <a:lstStyle/>
+          <a:p>
+            <a:pPr algn="ctr"/>
+          </a:p>
+        </p:txBody>
+      </p:sp>
+      <p:sp>
+        <p:nvSpPr>
+          <p:cNvPr id="25" name="TextBox 24"/>
+          <p:cNvSpPr txBox="1"/>
+          <p:nvPr/>
+        </p:nvSpPr>
+        <p:spPr>
+          <a:xfrm>
+            <a:off x="5080000" y="3238500"/>
+            <a:ext cx="1917700" cy="127000"/>
+          </a:xfrm>
+          <a:prstGeom prst="rect">
+            <a:avLst/>
+          </a:prstGeom>
+          <a:noFill/>
+        </p:spPr>
+        <p:txBody>
+          <a:bodyPr wrap="square" lIns="0" rIns="0" tIns="0" bIns="0" anchor="t">
+            <a:spAutoFit/>
+          </a:bodyPr>
+          <a:lstStyle/>
+          <a:p>
+            <a:pPr algn="l">
+              <a:spcAft>
+                <a:spcPts val="0"/>
+              </a:spcAft>
+            </a:pPr>
+            <a:r>
+              <a:rPr sz="860" b="1" i="0">
+                <a:solidFill>
+                  <a:srgbClr val="FFFFFF"/>
+                </a:solidFill>
+                <a:latin typeface="Ubuntu Mono"/>
+                <a:ea typeface="Ubuntu Mono"/>
+                <a:cs typeface="Ubuntu Mono"/>
+                <a:sym typeface="Ubuntu Mono"/>
+              </a:rPr>
+              <a:t>PLUG &amp; ABANDONMENT</a:t>
+            </a:r>
+          </a:p>
+        </p:txBody>
+      </p:sp>
+      <p:sp>
+        <p:nvSpPr>
+          <p:cNvPr id="26" name="TextBox 25"/>
+          <p:cNvSpPr txBox="1"/>
+          <p:nvPr/>
+        </p:nvSpPr>
+        <p:spPr>
+          <a:xfrm>
+            <a:off x="5080000" y="3429000"/>
+            <a:ext cx="1917700" cy="127000"/>
+          </a:xfrm>
+          <a:prstGeom prst="rect">
+            <a:avLst/>
+          </a:prstGeom>
+          <a:noFill/>
+        </p:spPr>
+        <p:txBody>
+          <a:bodyPr wrap="square" lIns="0" rIns="0" tIns="0" bIns="0" anchor="t">
+            <a:spAutoFit/>
+          </a:bodyPr>
+          <a:lstStyle/>
+          <a:p>
+            <a:pPr algn="l">
+              <a:lnSpc>
+                <a:spcPts val="930"/>
+              </a:lnSpc>
+              <a:spcAft>
+                <a:spcPts val="200"/>
+              </a:spcAft>
+            </a:pPr>
+            <a:r>
+              <a:rPr sz="710" b="0" i="0">
+                <a:solidFill>
+                  <a:srgbClr val="FFFFFF"/>
+                </a:solidFill>
+                <a:latin typeface="Ubuntu Mono"/>
+                <a:ea typeface="Ubuntu Mono"/>
+                <a:cs typeface="Ubuntu Mono"/>
+                <a:sym typeface="Ubuntu Mono"/>
+              </a:rPr>
+              <a:t>Safe, definitive abandonment of wells.</a:t>
+            </a:r>
+          </a:p>
+          <a:p>
+            <a:pPr algn="l">
+              <a:lnSpc>
+                <a:spcPts val="930"/>
+              </a:lnSpc>
+              <a:spcAft>
+                <a:spcPts val="200"/>
+              </a:spcAft>
+            </a:pPr>
+            <a:r>
+              <a:rPr sz="710" b="0" i="0">
+                <a:solidFill>
+                  <a:srgbClr val="FFFFFF"/>
+                </a:solidFill>
+                <a:latin typeface="Ubuntu Mono"/>
+                <a:ea typeface="Ubuntu Mono"/>
+                <a:cs typeface="Ubuntu Mono"/>
+                <a:sym typeface="Ubuntu Mono"/>
+              </a:rPr>
+              <a:t>Cutting with hydraulic pipe cutters and section mills.</a:t>
+            </a:r>
+          </a:p>
+          <a:p>
+            <a:pPr algn="l">
+              <a:lnSpc>
+                <a:spcPts val="930"/>
+              </a:lnSpc>
+              <a:spcAft>
+                <a:spcPts val="200"/>
+              </a:spcAft>
+            </a:pPr>
+            <a:r>
+              <a:rPr sz="710" b="0" i="0">
+                <a:solidFill>
+                  <a:srgbClr val="FFFFFF"/>
+                </a:solidFill>
+                <a:latin typeface="Ubuntu Mono"/>
+                <a:ea typeface="Ubuntu Mono"/>
+                <a:cs typeface="Ubuntu Mono"/>
+                <a:sym typeface="Ubuntu Mono"/>
+              </a:rPr>
+              <a:t>Whipstocks and sidetracks, packers, bridge plugs, liner hangers.</a:t>
+            </a:r>
+          </a:p>
+          <a:p>
+            <a:pPr algn="l">
+              <a:lnSpc>
+                <a:spcPts val="930"/>
+              </a:lnSpc>
+              <a:spcAft>
+                <a:spcPts val="200"/>
+              </a:spcAft>
+            </a:pPr>
+            <a:r>
+              <a:rPr sz="710" b="0" i="0">
+                <a:solidFill>
+                  <a:srgbClr val="FFFFFF"/>
+                </a:solidFill>
+                <a:latin typeface="Ubuntu Mono"/>
+                <a:ea typeface="Ubuntu Mono"/>
+                <a:cs typeface="Ubuntu Mono"/>
+                <a:sym typeface="Ubuntu Mono"/>
+              </a:rPr>
+              <a:t>Cold cutter, wellhead replacement, casing jack, tanks.</a:t>
+            </a:r>
+          </a:p>
+        </p:txBody>
+      </p:sp>
+      <p:pic>
+        <p:nvPicPr>
+          <p:cNvPr id="27" name="Picture 26" descr="_c_w4_125_170.png"/>
+          <p:cNvPicPr>
+            <a:picLocks noChangeAspect="1"/>
+          </p:cNvPicPr>
+          <p:nvPr/>
+        </p:nvPicPr>
+        <p:blipFill>
+          <a:blip r:embed="rId3"/>
+          <a:stretch>
+            <a:fillRect/>
+          </a:stretch>
+        </p:blipFill>
+        <p:spPr>
+          <a:xfrm>
+            <a:off x="457200" y="4876800"/>
+            <a:ext cx="1587500" cy="2159000"/>
+          </a:xfrm>
+          <a:prstGeom prst="rect">
+            <a:avLst/>
+          </a:prstGeom>
+        </p:spPr>
+      </p:pic>
+      <p:pic>
+        <p:nvPicPr>
+          <p:cNvPr id="28" name="Picture 27" descr="_c_w3_125_170.png"/>
+          <p:cNvPicPr>
+            <a:picLocks noChangeAspect="1"/>
+          </p:cNvPicPr>
+          <p:nvPr/>
+        </p:nvPicPr>
+        <p:blipFill>
+          <a:blip r:embed="rId4"/>
+          <a:stretch>
+            <a:fillRect/>
+          </a:stretch>
+        </p:blipFill>
+        <p:spPr>
+          <a:xfrm>
+            <a:off x="2120900" y="4876800"/>
+            <a:ext cx="1587500" cy="2159000"/>
+          </a:xfrm>
+          <a:prstGeom prst="rect">
+            <a:avLst/>
+          </a:prstGeom>
+        </p:spPr>
+      </p:pic>
+      <p:pic>
+        <p:nvPicPr>
+          <p:cNvPr id="29" name="Picture 28" descr="_c_w1_125_170.png"/>
+          <p:cNvPicPr>
+            <a:picLocks noChangeAspect="1"/>
+          </p:cNvPicPr>
+          <p:nvPr/>
+        </p:nvPicPr>
+        <p:blipFill>
+          <a:blip r:embed="rId5"/>
+          <a:stretch>
+            <a:fillRect/>
+          </a:stretch>
+        </p:blipFill>
+        <p:spPr>
+          <a:xfrm>
+            <a:off x="3784600" y="4876800"/>
+            <a:ext cx="1587500" cy="2159000"/>
+          </a:xfrm>
+          <a:prstGeom prst="rect">
+            <a:avLst/>
+          </a:prstGeom>
+        </p:spPr>
+      </p:pic>
+      <p:pic>
+        <p:nvPicPr>
+          <p:cNvPr id="30" name="Picture 29" descr="_c_w2_130_170.png"/>
+          <p:cNvPicPr>
+            <a:picLocks noChangeAspect="1"/>
+          </p:cNvPicPr>
+          <p:nvPr/>
+        </p:nvPicPr>
+        <p:blipFill>
+          <a:blip r:embed="rId6"/>
+          <a:stretch>
+            <a:fillRect/>
+          </a:stretch>
+        </p:blipFill>
+        <p:spPr>
+          <a:xfrm>
+            <a:off x="5448300" y="4876800"/>
+            <a:ext cx="1651000" cy="2159000"/>
+          </a:xfrm>
+          <a:prstGeom prst="rect">
+            <a:avLst/>
+          </a:prstGeom>
+        </p:spPr>
+      </p:pic>
+      <p:sp>
+        <p:nvSpPr>
+          <p:cNvPr id="31" name="Rectangle 30"/>
+          <p:cNvSpPr/>
+          <p:nvPr/>
+        </p:nvSpPr>
+        <p:spPr>
+          <a:xfrm>
+            <a:off x="457200" y="7315200"/>
+            <a:ext cx="6642100" cy="1905000"/>
+          </a:xfrm>
+          <a:prstGeom prst="rect">
+            <a:avLst/>
+          </a:prstGeom>
+          <a:solidFill>
+            <a:srgbClr val="EAF4FC"/>
+          </a:solidFill>
+          <a:ln>
+            <a:noFill/>
+          </a:ln>
+        </p:spPr>
+        <p:txBody>
+          <a:bodyPr rtlCol="0" anchor="ctr"/>
+          <a:lstStyle/>
+          <a:p>
+            <a:pPr algn="ctr"/>
+          </a:p>
+        </p:txBody>
+      </p:sp>
+      <p:sp>
+        <p:nvSpPr>
+          <p:cNvPr id="32" name="Rectangle 31"/>
+          <p:cNvSpPr/>
+          <p:nvPr/>
+        </p:nvSpPr>
+        <p:spPr>
+          <a:xfrm>
+            <a:off x="457200" y="7315200"/>
+            <a:ext cx="76200" cy="1905000"/>
+          </a:xfrm>
+          <a:prstGeom prst="rect">
+            <a:avLst/>
+          </a:prstGeom>
+          <a:solidFill>
+            <a:srgbClr val="1CB2FE"/>
+          </a:solidFill>
+          <a:ln>
+            <a:noFill/>
+          </a:ln>
+        </p:spPr>
+        <p:txBody>
+          <a:bodyPr rtlCol="0" anchor="ctr"/>
+          <a:lstStyle/>
+          <a:p>
+            <a:pPr algn="ctr"/>
+          </a:p>
+        </p:txBody>
+      </p:sp>
+      <p:sp>
+        <p:nvSpPr>
+          <p:cNvPr id="33" name="TextBox 32"/>
+          <p:cNvSpPr txBox="1"/>
+          <p:nvPr/>
+        </p:nvSpPr>
+        <p:spPr>
+          <a:xfrm>
+            <a:off x="685800" y="7442200"/>
+            <a:ext cx="5080000" cy="127000"/>
+          </a:xfrm>
+          <a:prstGeom prst="rect">
+            <a:avLst/>
+          </a:prstGeom>
+          <a:noFill/>
+        </p:spPr>
+        <p:txBody>
+          <a:bodyPr wrap="square" lIns="0" rIns="0" tIns="0" bIns="0" anchor="t">
+            <a:spAutoFit/>
+          </a:bodyPr>
+          <a:lstStyle/>
+          <a:p>
+            <a:pPr algn="l">
+              <a:spcAft>
+                <a:spcPts val="0"/>
+              </a:spcAft>
+            </a:pPr>
+            <a:r>
+              <a:rPr sz="1300" b="1" i="0">
+                <a:solidFill>
+                  <a:srgbClr val="194E9A"/>
+                </a:solidFill>
+                <a:latin typeface="Ubuntu Mono"/>
+                <a:ea typeface="Ubuntu Mono"/>
+                <a:cs typeface="Ubuntu Mono"/>
+                <a:sym typeface="Ubuntu Mono"/>
+              </a:rPr>
+              <a:t>WATER WELLS TOO</a:t>
+            </a:r>
+          </a:p>
+        </p:txBody>
+      </p:sp>
+      <p:sp>
+        <p:nvSpPr>
+          <p:cNvPr id="34" name="TextBox 33"/>
+          <p:cNvSpPr txBox="1"/>
+          <p:nvPr/>
+        </p:nvSpPr>
+        <p:spPr>
+          <a:xfrm>
+            <a:off x="685800" y="7670800"/>
+            <a:ext cx="6223000" cy="127000"/>
+          </a:xfrm>
+          <a:prstGeom prst="rect">
+            <a:avLst/>
+          </a:prstGeom>
+          <a:noFill/>
+        </p:spPr>
+        <p:txBody>
+          <a:bodyPr wrap="square" lIns="0" rIns="0" tIns="0" bIns="0" anchor="t">
+            <a:spAutoFit/>
+          </a:bodyPr>
+          <a:lstStyle/>
+          <a:p>
+            <a:pPr algn="l">
+              <a:lnSpc>
+                <a:spcPts val="980"/>
+              </a:lnSpc>
+              <a:spcAft>
+                <a:spcPts val="0"/>
+              </a:spcAft>
+            </a:pPr>
+            <a:r>
+              <a:rPr sz="760" b="0" i="0">
+                <a:solidFill>
+                  <a:srgbClr val="0B1B2E"/>
+                </a:solidFill>
+                <a:latin typeface="Ubuntu Mono"/>
+                <a:ea typeface="Ubuntu Mono"/>
+                <a:cs typeface="Ubuntu Mono"/>
+                <a:sym typeface="Ubuntu Mono"/>
+              </a:rPr>
+              <a:t>We also work on water wells, typically between 300 and 1,000 m, in support of drilling contractors. Habits formed on 3,000 m wells mean we handle shallow wells with the same rigor.</a:t>
+            </a:r>
+          </a:p>
+        </p:txBody>
+      </p:sp>
+      <p:sp>
+        <p:nvSpPr>
+          <p:cNvPr id="35" name="Rectangle 34"/>
+          <p:cNvSpPr/>
+          <p:nvPr/>
+        </p:nvSpPr>
+        <p:spPr>
+          <a:xfrm>
+            <a:off x="685800" y="8128000"/>
+            <a:ext cx="1955800" cy="939800"/>
+          </a:xfrm>
+          <a:prstGeom prst="rect">
+            <a:avLst/>
+          </a:prstGeom>
+          <a:solidFill>
+            <a:srgbClr val="FFFFFF"/>
+          </a:solidFill>
+          <a:ln w="9525">
+            <a:solidFill>
+              <a:srgbClr val="C5D6E8"/>
+            </a:solidFill>
+          </a:ln>
+        </p:spPr>
+        <p:txBody>
+          <a:bodyPr rtlCol="0" anchor="ctr"/>
+          <a:lstStyle/>
+          <a:p>
+            <a:pPr algn="ctr"/>
+          </a:p>
+        </p:txBody>
+      </p:sp>
+      <p:sp>
+        <p:nvSpPr>
+          <p:cNvPr id="36" name="TextBox 35"/>
+          <p:cNvSpPr txBox="1"/>
+          <p:nvPr/>
+        </p:nvSpPr>
+        <p:spPr>
+          <a:xfrm>
+            <a:off x="787400" y="8204200"/>
+            <a:ext cx="1752600" cy="127000"/>
+          </a:xfrm>
+          <a:prstGeom prst="rect">
+            <a:avLst/>
+          </a:prstGeom>
+          <a:noFill/>
+        </p:spPr>
+        <p:txBody>
+          <a:bodyPr wrap="square" lIns="0" rIns="0" tIns="0" bIns="0" anchor="t">
+            <a:spAutoFit/>
+          </a:bodyPr>
+          <a:lstStyle/>
+          <a:p>
+            <a:pPr algn="l">
+              <a:lnSpc>
+                <a:spcPts val="880"/>
+              </a:lnSpc>
+              <a:spcAft>
+                <a:spcPts val="200"/>
+              </a:spcAft>
+            </a:pPr>
+            <a:r>
+              <a:rPr sz="860" b="1" i="0">
+                <a:solidFill>
+                  <a:srgbClr val="0F7FCB"/>
+                </a:solidFill>
+                <a:latin typeface="Ubuntu Mono"/>
+                <a:ea typeface="Ubuntu Mono"/>
+                <a:cs typeface="Ubuntu Mono"/>
+                <a:sym typeface="Ubuntu Mono"/>
+              </a:rPr>
+              <a:t>CUT &amp; PULL</a:t>
+            </a:r>
+          </a:p>
+          <a:p>
+            <a:pPr algn="l">
+              <a:lnSpc>
+                <a:spcPts val="880"/>
+              </a:lnSpc>
+              <a:spcAft>
+                <a:spcPts val="200"/>
+              </a:spcAft>
+            </a:pPr>
+            <a:r>
+              <a:rPr sz="690" b="0" i="0">
+                <a:solidFill>
+                  <a:srgbClr val="0B1B2E"/>
+                </a:solidFill>
+                <a:latin typeface="Ubuntu Mono"/>
+                <a:ea typeface="Ubuntu Mono"/>
+                <a:cs typeface="Ubuntu Mono"/>
+                <a:sym typeface="Ubuntu Mono"/>
+              </a:rPr>
+              <a:t>Hydraulic and external pipe cutters, spears and overshots to cut and pull casing, tubing or stuck strings.</a:t>
+            </a:r>
+          </a:p>
+        </p:txBody>
+      </p:sp>
+      <p:sp>
+        <p:nvSpPr>
+          <p:cNvPr id="37" name="Rectangle 36"/>
+          <p:cNvSpPr/>
+          <p:nvPr/>
+        </p:nvSpPr>
+        <p:spPr>
+          <a:xfrm>
+            <a:off x="2743200" y="8128000"/>
+            <a:ext cx="1955800" cy="939800"/>
+          </a:xfrm>
+          <a:prstGeom prst="rect">
+            <a:avLst/>
+          </a:prstGeom>
+          <a:solidFill>
+            <a:srgbClr val="FFFFFF"/>
+          </a:solidFill>
+          <a:ln w="9525">
+            <a:solidFill>
+              <a:srgbClr val="C5D6E8"/>
+            </a:solidFill>
+          </a:ln>
+        </p:spPr>
+        <p:txBody>
+          <a:bodyPr rtlCol="0" anchor="ctr"/>
+          <a:lstStyle/>
+          <a:p>
+            <a:pPr algn="ctr"/>
+          </a:p>
+        </p:txBody>
+      </p:sp>
+      <p:sp>
+        <p:nvSpPr>
+          <p:cNvPr id="38" name="TextBox 37"/>
+          <p:cNvSpPr txBox="1"/>
+          <p:nvPr/>
+        </p:nvSpPr>
+        <p:spPr>
+          <a:xfrm>
+            <a:off x="2844800" y="8204200"/>
+            <a:ext cx="1752600" cy="127000"/>
+          </a:xfrm>
+          <a:prstGeom prst="rect">
+            <a:avLst/>
+          </a:prstGeom>
+          <a:noFill/>
+        </p:spPr>
+        <p:txBody>
+          <a:bodyPr wrap="square" lIns="0" rIns="0" tIns="0" bIns="0" anchor="t">
+            <a:spAutoFit/>
+          </a:bodyPr>
+          <a:lstStyle/>
+          <a:p>
+            <a:pPr algn="l">
+              <a:lnSpc>
+                <a:spcPts val="880"/>
+              </a:lnSpc>
+              <a:spcAft>
+                <a:spcPts val="200"/>
+              </a:spcAft>
+            </a:pPr>
+            <a:r>
+              <a:rPr sz="860" b="1" i="0">
+                <a:solidFill>
+                  <a:srgbClr val="0F7FCB"/>
+                </a:solidFill>
+                <a:latin typeface="Ubuntu Mono"/>
+                <a:ea typeface="Ubuntu Mono"/>
+                <a:cs typeface="Ubuntu Mono"/>
+                <a:sym typeface="Ubuntu Mono"/>
+              </a:rPr>
+              <a:t>REAMING</a:t>
+            </a:r>
+          </a:p>
+          <a:p>
+            <a:pPr algn="l">
+              <a:lnSpc>
+                <a:spcPts val="880"/>
+              </a:lnSpc>
+              <a:spcAft>
+                <a:spcPts val="200"/>
+              </a:spcAft>
+            </a:pPr>
+            <a:r>
+              <a:rPr sz="690" b="0" i="0">
+                <a:solidFill>
+                  <a:srgbClr val="0B1B2E"/>
+                </a:solidFill>
+                <a:latin typeface="Ubuntu Mono"/>
+                <a:ea typeface="Ubuntu Mono"/>
+                <a:cs typeface="Ubuntu Mono"/>
+                <a:sym typeface="Ubuntu Mono"/>
+              </a:rPr>
+              <a:t>Rotary and directional underreamers, hole openers, roller reamers and SPX drag-type underreamers.</a:t>
+            </a:r>
+          </a:p>
+        </p:txBody>
+      </p:sp>
+      <p:sp>
+        <p:nvSpPr>
+          <p:cNvPr id="39" name="Rectangle 38"/>
+          <p:cNvSpPr/>
+          <p:nvPr/>
+        </p:nvSpPr>
+        <p:spPr>
+          <a:xfrm>
+            <a:off x="4800600" y="8128000"/>
+            <a:ext cx="1955800" cy="939800"/>
+          </a:xfrm>
+          <a:prstGeom prst="rect">
+            <a:avLst/>
+          </a:prstGeom>
+          <a:solidFill>
+            <a:srgbClr val="FFFFFF"/>
+          </a:solidFill>
+          <a:ln w="9525">
+            <a:solidFill>
+              <a:srgbClr val="C5D6E8"/>
+            </a:solidFill>
+          </a:ln>
+        </p:spPr>
+        <p:txBody>
+          <a:bodyPr rtlCol="0" anchor="ctr"/>
+          <a:lstStyle/>
+          <a:p>
+            <a:pPr algn="ctr"/>
+          </a:p>
+        </p:txBody>
+      </p:sp>
+      <p:sp>
+        <p:nvSpPr>
+          <p:cNvPr id="40" name="TextBox 39"/>
+          <p:cNvSpPr txBox="1"/>
+          <p:nvPr/>
+        </p:nvSpPr>
+        <p:spPr>
+          <a:xfrm>
+            <a:off x="4902200" y="8204200"/>
+            <a:ext cx="1752600" cy="127000"/>
+          </a:xfrm>
+          <a:prstGeom prst="rect">
+            <a:avLst/>
+          </a:prstGeom>
+          <a:noFill/>
+        </p:spPr>
+        <p:txBody>
+          <a:bodyPr wrap="square" lIns="0" rIns="0" tIns="0" bIns="0" anchor="t">
+            <a:spAutoFit/>
+          </a:bodyPr>
+          <a:lstStyle/>
+          <a:p>
+            <a:pPr algn="l">
+              <a:lnSpc>
+                <a:spcPts val="880"/>
+              </a:lnSpc>
+              <a:spcAft>
+                <a:spcPts val="200"/>
+              </a:spcAft>
+            </a:pPr>
+            <a:r>
+              <a:rPr sz="860" b="1" i="0">
+                <a:solidFill>
+                  <a:srgbClr val="0F7FCB"/>
+                </a:solidFill>
+                <a:latin typeface="Ubuntu Mono"/>
+                <a:ea typeface="Ubuntu Mono"/>
+                <a:cs typeface="Ubuntu Mono"/>
+                <a:sym typeface="Ubuntu Mono"/>
+              </a:rPr>
+              <a:t>MILLING</a:t>
+            </a:r>
+          </a:p>
+          <a:p>
+            <a:pPr algn="l">
+              <a:lnSpc>
+                <a:spcPts val="880"/>
+              </a:lnSpc>
+              <a:spcAft>
+                <a:spcPts val="200"/>
+              </a:spcAft>
+            </a:pPr>
+            <a:r>
+              <a:rPr sz="690" b="0" i="0">
+                <a:solidFill>
+                  <a:srgbClr val="0B1B2E"/>
+                </a:solidFill>
+                <a:latin typeface="Ubuntu Mono"/>
+                <a:ea typeface="Ubuntu Mono"/>
+                <a:cs typeface="Ubuntu Mono"/>
+                <a:sym typeface="Ubuntu Mono"/>
+              </a:rPr>
+              <a:t>Junk mills, pilot and taper mills, section mills and washover shoes to clear and open the hole.</a:t>
+            </a:r>
+          </a:p>
+        </p:txBody>
+      </p:sp>
+      <p:sp>
+        <p:nvSpPr>
+          <p:cNvPr id="41" name="Rectangle 40"/>
+          <p:cNvSpPr/>
+          <p:nvPr/>
+        </p:nvSpPr>
+        <p:spPr>
+          <a:xfrm>
+            <a:off x="457200" y="9398000"/>
+            <a:ext cx="6642100" cy="787400"/>
+          </a:xfrm>
+          <a:prstGeom prst="rect">
+            <a:avLst/>
+          </a:prstGeom>
+          <a:solidFill>
+            <a:srgbClr val="194E9A"/>
+          </a:solidFill>
+          <a:ln>
+            <a:noFill/>
+          </a:ln>
+        </p:spPr>
+        <p:txBody>
+          <a:bodyPr rtlCol="0" anchor="ctr"/>
+          <a:lstStyle/>
+          <a:p>
+            <a:pPr algn="ctr"/>
+          </a:p>
+        </p:txBody>
+      </p:sp>
+      <p:sp>
+        <p:nvSpPr>
+          <p:cNvPr id="42" name="TextBox 41"/>
+          <p:cNvSpPr txBox="1"/>
+          <p:nvPr/>
+        </p:nvSpPr>
+        <p:spPr>
+          <a:xfrm>
+            <a:off x="635000" y="9499600"/>
+            <a:ext cx="6350000" cy="127000"/>
+          </a:xfrm>
+          <a:prstGeom prst="rect">
+            <a:avLst/>
+          </a:prstGeom>
+          <a:noFill/>
+        </p:spPr>
+        <p:txBody>
+          <a:bodyPr wrap="square" lIns="0" rIns="0" tIns="0" bIns="0" anchor="t">
+            <a:spAutoFit/>
+          </a:bodyPr>
+          <a:lstStyle/>
+          <a:p>
+            <a:pPr algn="l">
+              <a:lnSpc>
+                <a:spcPts val="960"/>
+              </a:lnSpc>
+              <a:spcAft>
+                <a:spcPts val="200"/>
+              </a:spcAft>
+            </a:pPr>
+            <a:r>
+              <a:rPr sz="840" b="1" i="0">
+                <a:solidFill>
+                  <a:srgbClr val="1CB2FE"/>
+                </a:solidFill>
+                <a:latin typeface="Ubuntu Mono"/>
+                <a:ea typeface="Ubuntu Mono"/>
+                <a:cs typeface="Ubuntu Mono"/>
+                <a:sym typeface="Ubuntu Mono"/>
+              </a:rPr>
+              <a:t>WHERE WE WORK</a:t>
+            </a:r>
+          </a:p>
+          <a:p>
+            <a:pPr algn="l">
+              <a:lnSpc>
+                <a:spcPts val="960"/>
+              </a:lnSpc>
+              <a:spcAft>
+                <a:spcPts val="200"/>
+              </a:spcAft>
+            </a:pPr>
+            <a:r>
+              <a:rPr sz="740" b="0" i="0">
+                <a:solidFill>
+                  <a:srgbClr val="FFFFFF"/>
+                </a:solidFill>
+                <a:latin typeface="Ubuntu Mono"/>
+                <a:ea typeface="Ubuntu Mono"/>
+                <a:cs typeface="Ubuntu Mono"/>
+                <a:sym typeface="Ubuntu Mono"/>
+              </a:rPr>
+              <a:t>Based in Lons (64), south-west France. We mobilise across metropolitan France within 24 to 48 hours in an emergency, and have international experience in Europe and North Africa. A single dedicated team follows each job from diagnosis to resolution.</a:t>
+            </a:r>
+          </a:p>
+        </p:txBody>
+      </p:sp>
+      <p:sp>
+        <p:nvSpPr>
+          <p:cNvPr id="43" name="Rectangle 42"/>
+          <p:cNvSpPr/>
+          <p:nvPr/>
+        </p:nvSpPr>
+        <p:spPr>
+          <a:xfrm>
+            <a:off x="457200" y="10388600"/>
+            <a:ext cx="6642100" cy="10160"/>
+          </a:xfrm>
+          <a:prstGeom prst="rect">
+            <a:avLst/>
+          </a:prstGeom>
+          <a:solidFill>
+            <a:srgbClr val="B9CCE0"/>
+          </a:solidFill>
+          <a:ln>
+            <a:noFill/>
+          </a:ln>
+        </p:spPr>
+        <p:txBody>
+          <a:bodyPr rtlCol="0" anchor="ctr"/>
+          <a:lstStyle/>
+          <a:p>
+            <a:pPr algn="ctr"/>
+          </a:p>
+        </p:txBody>
+      </p:sp>
+      <p:sp>
+        <p:nvSpPr>
+          <p:cNvPr id="44" name="TextBox 43"/>
+          <p:cNvSpPr txBox="1"/>
+          <p:nvPr/>
+        </p:nvSpPr>
+        <p:spPr>
+          <a:xfrm>
+            <a:off x="457200" y="10464800"/>
+            <a:ext cx="5080000" cy="127000"/>
+          </a:xfrm>
+          <a:prstGeom prst="rect">
+            <a:avLst/>
+          </a:prstGeom>
+          <a:noFill/>
+        </p:spPr>
+        <p:txBody>
+          <a:bodyPr wrap="square" lIns="0" rIns="0" tIns="0" bIns="0" anchor="t">
+            <a:spAutoFit/>
+          </a:bodyPr>
+          <a:lstStyle/>
+          <a:p>
+            <a:pPr algn="l">
+              <a:spcAft>
+                <a:spcPts val="0"/>
+              </a:spcAft>
+            </a:pPr>
+            <a:r>
+              <a:rPr sz="640" b="0" i="0">
+                <a:solidFill>
+                  <a:srgbClr val="5A6B7F"/>
+                </a:solidFill>
+                <a:latin typeface="Ubuntu Mono"/>
+                <a:ea typeface="Ubuntu Mono"/>
+                <a:cs typeface="Ubuntu Mono"/>
+                <a:sym typeface="Ubuntu Mono"/>
+              </a:rPr>
+              <a:t>Enedril · Fishing and Drilling Solutions · 3 avenue des lacs, 64140 Lons (France) · info@enedril.fr · +33 (0)5 59 04 50 45</a:t>
+            </a:r>
+          </a:p>
+        </p:txBody>
+      </p:sp>
+      <p:sp>
+        <p:nvSpPr>
+          <p:cNvPr id="45" name="TextBox 44"/>
+          <p:cNvSpPr txBox="1"/>
+          <p:nvPr/>
+        </p:nvSpPr>
+        <p:spPr>
+          <a:xfrm>
+            <a:off x="6604000" y="10464800"/>
+            <a:ext cx="495300" cy="127000"/>
+          </a:xfrm>
+          <a:prstGeom prst="rect">
+            <a:avLst/>
+          </a:prstGeom>
+          <a:noFill/>
+        </p:spPr>
+        <p:txBody>
+          <a:bodyPr wrap="square" lIns="0" rIns="0" tIns="0" bIns="0" anchor="t">
+            <a:spAutoFit/>
+          </a:bodyPr>
+          <a:lstStyle/>
+          <a:p>
+            <a:pPr algn="r">
+              <a:spcAft>
+                <a:spcPts val="0"/>
+              </a:spcAft>
+            </a:pPr>
+            <a:r>
+              <a:rPr sz="800" b="0" i="0">
+                <a:solidFill>
+                  <a:srgbClr val="194E9A"/>
+                </a:solidFill>
+                <a:latin typeface="Ubuntu Mono"/>
+                <a:ea typeface="Ubuntu Mono"/>
+                <a:cs typeface="Ubuntu Mono"/>
+                <a:sym typeface="Ubuntu Mono"/>
+              </a:rPr>
+              <a:t>5</a:t>
+            </a:r>
+          </a:p>
+        </p:txBody>
+      </p:sp>
+    </p:spTree>
+  </p:cSld>
+  <p:clrMapOvr>
+    <a:masterClrMapping/>
+  </p:clrMapOvr>
+</p:sld>
+</file>
+
+<file path=ppt/slides/slide6.xml><?xml version="1.0" encoding="utf-8"?>
 <p:sld xmlns:a="http://schemas.openxmlformats.org/drawingml/2006/main" xmlns:p="http://schemas.openxmlformats.org/presentationml/2006/main" xmlns:r="http://schemas.openxmlformats.org/officeDocument/2006/relationships">
   <p:cSld>
     <p:spTree>
@@ -14836,7 +16172,7 @@
                 <a:cs typeface="Ubuntu Mono"/>
                 <a:sym typeface="Ubuntu Mono"/>
               </a:rPr>
-              <a:t>5</a:t>
+              <a:t>6</a:t>
             </a:r>
           </a:p>
         </p:txBody>
@@ -14849,7 +16185,7 @@
 </p:sld>
 </file>
 
-<file path=ppt/slides/slide6.xml><?xml version="1.0" encoding="utf-8"?>
+<file path=ppt/slides/slide7.xml><?xml version="1.0" encoding="utf-8"?>
 <p:sld xmlns:a="http://schemas.openxmlformats.org/drawingml/2006/main" xmlns:p="http://schemas.openxmlformats.org/presentationml/2006/main" xmlns:r="http://schemas.openxmlformats.org/officeDocument/2006/relationships">
   <p:cSld>
     <p:spTree>

--- a/Plaquette_Enedril_6p.pptx
+++ b/Plaquette_Enedril_6p.pptx
@@ -3715,7 +3715,7 @@
                 <a:cs typeface="Ubuntu Mono"/>
                 <a:sym typeface="Ubuntu Mono"/>
               </a:rPr>
-              <a:t>Enedril (formerly Mustang Oil Services) is an independent French company founded in 2013 and specialised in directional drilling, fishing and well intervention for geothermal, oil &amp; gas and underground gas storage projects, in France and abroad. Run since 2022 by Fabien and Alexis, it combines solid field experience with technical know-how, and is known for being fast, flexible and easy to work with.</a:t>
+              <a:t>Enedril is an independent French company founded in 2013, specialised in directional drilling, fishing and well intervention for geothermal, oil &amp; gas and underground gas storage projects, in France and abroad. Run since 2022 by Fabien and Alexis, it combines solid field experience with technical know-how, and is known for being fast, flexible and easy to work with.</a:t>
             </a:r>
           </a:p>
         </p:txBody>
@@ -4278,7 +4278,7 @@
                 <a:cs typeface="Ubuntu Mono"/>
                 <a:sym typeface="Ubuntu Mono"/>
               </a:rPr>
-              <a:t>Since 2021 we operate from Lons, near Pau, with two fully equipped workshops of more than 1,000 m², a 5 t overhead crane, a break-out unit, a jar tester, lathe, milling and grinding machines and a separate welding shop.</a:t>
+              <a:t>Since 2013 we operate from Lons, near Pau, with two fully equipped workshops of more than 1,000 m², a 5 t overhead crane, a break-out unit, a jar tester, lathe, milling and grinding machines and a separate welding shop.</a:t>
             </a:r>
           </a:p>
           <a:p>
@@ -6545,7 +6545,7 @@
                 <a:cs typeface="Ubuntu Mono"/>
                 <a:sym typeface="Ubuntu Mono"/>
               </a:rPr>
-              <a:t>Rebranding: Mustang Oil Services becomes Enedril, Fishing and Drilling Solutions.</a:t>
+              <a:t>Rebranding: Mustang Services becomes Enedril, Fishing and Drilling Solutions.</a:t>
             </a:r>
           </a:p>
         </p:txBody>
